--- a/lecons/F1/02_F1_M1_L02_Our_Planet_the_Earth.pptx
+++ b/lecons/F1/02_F1_M1_L02_Our_Planet_the_Earth.pptx
@@ -58,9 +58,18 @@
     <p:sldId id="306" r:id="rId52"/>
     <p:sldId id="307" r:id="rId53"/>
     <p:sldId id="308" r:id="rId54"/>
+    <p:sldId id="309" r:id="rId55"/>
+    <p:sldId id="310" r:id="rId56"/>
+    <p:sldId id="311" r:id="rId57"/>
+    <p:sldId id="312" r:id="rId58"/>
+    <p:sldId id="313" r:id="rId59"/>
+    <p:sldId id="314" r:id="rId60"/>
+    <p:sldId id="315" r:id="rId61"/>
+    <p:sldId id="316" r:id="rId62"/>
+    <p:sldId id="317" r:id="rId63"/>
   </p:sldIdLst>
   <p:notesMasterIdLst>
-    <p:notesMasterId r:id="rId55"/>
+    <p:notesMasterId r:id="rId64"/>
   </p:notesMasterIdLst>
   <p:sldSz cx="12192000" cy="6858000"/>
   <p:notesSz cx="6858000" cy="12192000"/>
@@ -642,7 +651,7 @@
           <a:p>
             <a:r>
               <a:rPr lang="en-US" dirty="0"/>
-              <a:t>Question 1: What is the problem in the situation? Think for a moment, then raise your hand to answer.</a:t>
+              <a:t>Listen carefully to this situation from real life. During a clear night in Garoua, Aminatou sees many stars in the sky. She asks her brother: "Is the Earth also a star, and what does it look like from space?" Her brother does not know how to answer her. Think about it, because I am going to ask you some questions.</a:t>
             </a:r>
             <a:endParaRPr lang="en-US" dirty="0"/>
           </a:p>
@@ -730,7 +739,7 @@
           <a:p>
             <a:r>
               <a:rPr lang="en-US" dirty="0"/>
-              <a:t>Good. Aminatou does not know what kind of body the Earth is.</a:t>
+              <a:t>Question 1: What is the problem in the situation? Think for a moment, then raise your hand to answer.</a:t>
             </a:r>
             <a:endParaRPr lang="en-US" dirty="0"/>
           </a:p>
@@ -818,7 +827,7 @@
           <a:p>
             <a:r>
               <a:rPr lang="en-US" dirty="0"/>
-              <a:t>Question 2: Is the Earth a star? Think for a moment, then raise your hand to answer.</a:t>
+              <a:t>Good. Aminatou does not know what kind of body the Earth is and what it looks like.</a:t>
             </a:r>
             <a:endParaRPr lang="en-US" dirty="0"/>
           </a:p>
@@ -906,7 +915,7 @@
           <a:p>
             <a:r>
               <a:rPr lang="en-US" dirty="0"/>
-              <a:t>Good. No, it is a planet that moves around the Sun.</a:t>
+              <a:t>Question 2: Is the Earth a star? Think for a moment, then raise your hand to answer.</a:t>
             </a:r>
             <a:endParaRPr lang="en-US" dirty="0"/>
           </a:p>
@@ -994,7 +1003,7 @@
           <a:p>
             <a:r>
               <a:rPr lang="en-US" dirty="0"/>
-              <a:t>Question 3: What covers most of the Earth? Think for a moment, then raise your hand to answer.</a:t>
+              <a:t>Good. No, it is a planet that moves around the Sun.</a:t>
             </a:r>
             <a:endParaRPr lang="en-US" dirty="0"/>
           </a:p>
@@ -1082,7 +1091,7 @@
           <a:p>
             <a:r>
               <a:rPr lang="en-US" dirty="0"/>
-              <a:t>Good. Water (oceans and seas).</a:t>
+              <a:t>Question 3: What covers most of the Earth? Think for a moment, then raise your hand to answer.</a:t>
             </a:r>
             <a:endParaRPr lang="en-US" dirty="0"/>
           </a:p>
@@ -1170,7 +1179,7 @@
           <a:p>
             <a:r>
               <a:rPr lang="en-US" dirty="0"/>
-              <a:t>From this situation, the action we are working towards in this lesson is the following: use a globe or a map to locate the continents and oceans of the world.</a:t>
+              <a:t>Good. Water (oceans and seas).</a:t>
             </a:r>
             <a:endParaRPr lang="en-US" dirty="0"/>
           </a:p>
@@ -1258,7 +1267,7 @@
           <a:p>
             <a:r>
               <a:rPr lang="en-US" dirty="0"/>
-              <a:t>Why is this lesson important for you? This lesson helps us to know the place of our planet in the universe and its main land and water areas.</a:t>
+              <a:t>From this situation, the action we are working towards in this lesson is the following: use a globe or a map to locate the continents and oceans of the world.</a:t>
             </a:r>
             <a:endParaRPr lang="en-US" dirty="0"/>
           </a:p>
@@ -1346,7 +1355,7 @@
           <a:p>
             <a:r>
               <a:rPr lang="en-US" dirty="0"/>
-              <a:t>Activity 1. Look carefully at this diagram: the Sun and the eight planets. Observe every detail before I ask the question.</a:t>
+              <a:t>Why is this lesson important for you? This lesson helps us to know the place of our planet in the universe and its main land and water areas.</a:t>
             </a:r>
             <a:endParaRPr lang="en-US" dirty="0"/>
           </a:p>
@@ -1434,7 +1443,7 @@
           <a:p>
             <a:r>
               <a:rPr lang="en-US" dirty="0"/>
-              <a:t>Here is the question for Activity 1: What is the position of the Earth from the Sun? How many planets are there? Take one minute to think and write your answer in your rough notebook.</a:t>
+              <a:t>Activity 1. Look carefully at this diagram: the Sun and the planets. Observe every detail before I ask the question.</a:t>
             </a:r>
             <a:endParaRPr lang="en-US" dirty="0"/>
           </a:p>
@@ -1610,7 +1619,7 @@
           <a:p>
             <a:r>
               <a:rPr lang="en-US" dirty="0"/>
-              <a:t>Let us check the answer together. The Earth is the third planet from the Sun. There are eight planets.</a:t>
+              <a:t>Here is the question for Activity 1: How many planets move around the Sun? Take one minute to think and write your answer in your rough notebook.</a:t>
             </a:r>
             <a:endParaRPr lang="en-US" dirty="0"/>
           </a:p>
@@ -1698,7 +1707,7 @@
           <a:p>
             <a:r>
               <a:rPr lang="en-US" dirty="0"/>
-              <a:t>Activity 2. Look carefully at this picture: the Earth seen from space. Observe every detail before I ask the question.</a:t>
+              <a:t>Let us check the answer together. Eight planets move around the Sun.</a:t>
             </a:r>
             <a:endParaRPr lang="en-US" dirty="0"/>
           </a:p>
@@ -1786,7 +1795,7 @@
           <a:p>
             <a:r>
               <a:rPr lang="en-US" dirty="0"/>
-              <a:t>Here is the question for Activity 2: What is the shape of the Earth? Take one minute to think and write your answer in your rough notebook.</a:t>
+              <a:t>Here is the next question: What is the position of the Earth from the Sun? Take one minute to think and write your answer in your rough notebook.</a:t>
             </a:r>
             <a:endParaRPr lang="en-US" dirty="0"/>
           </a:p>
@@ -1874,7 +1883,7 @@
           <a:p>
             <a:r>
               <a:rPr lang="en-US" dirty="0"/>
-              <a:t>Let us check the answer together. It is round like a ball, slightly flat at the poles (a sphere).</a:t>
+              <a:t>Let us check the answer together. The Earth is the third planet from the Sun.</a:t>
             </a:r>
             <a:endParaRPr lang="en-US" dirty="0"/>
           </a:p>
@@ -1962,7 +1971,7 @@
           <a:p>
             <a:r>
               <a:rPr lang="en-US" dirty="0"/>
-              <a:t>Activity 3. Look carefully at this diagram: the main lines of latitude. Observe every detail before I ask the question.</a:t>
+              <a:t>Activity 2. Look carefully at this picture: the Earth seen from space. Observe every detail before I ask the question.</a:t>
             </a:r>
             <a:endParaRPr lang="en-US" dirty="0"/>
           </a:p>
@@ -2050,7 +2059,7 @@
           <a:p>
             <a:r>
               <a:rPr lang="en-US" dirty="0"/>
-              <a:t>Here is the question for Activity 3: Which imaginary line divides the Earth into a northern and a southern half? Take one minute to think and write your answer in your rough notebook.</a:t>
+              <a:t>Here is the question for Activity 2: What is the shape of the Earth? Take one minute to think and write your answer in your rough notebook.</a:t>
             </a:r>
             <a:endParaRPr lang="en-US" dirty="0"/>
           </a:p>
@@ -2138,7 +2147,7 @@
           <a:p>
             <a:r>
               <a:rPr lang="en-US" dirty="0"/>
-              <a:t>Let us check the answer together. The Equator (0° latitude).</a:t>
+              <a:t>Let us check the answer together. It is round like a ball, slightly flat at the poles.</a:t>
             </a:r>
             <a:endParaRPr lang="en-US" dirty="0"/>
           </a:p>
@@ -2226,7 +2235,7 @@
           <a:p>
             <a:r>
               <a:rPr lang="en-US" dirty="0"/>
-              <a:t>Activity 4. Look carefully at this diagram: the continents and oceans. Observe every detail before I ask the question.</a:t>
+              <a:t>Activity 3. Look carefully at this diagram: imaginary lines on the Earth. Observe every detail before I ask the question.</a:t>
             </a:r>
             <a:endParaRPr lang="en-US" dirty="0"/>
           </a:p>
@@ -2314,7 +2323,7 @@
           <a:p>
             <a:r>
               <a:rPr lang="en-US" dirty="0"/>
-              <a:t>Here is the question for Activity 4: Name four continents and three oceans. Take one minute to think and write your answer in your rough notebook.</a:t>
+              <a:t>Here is the question for Activity 3: Which imaginary line divides the Earth into a northern half and a southern half? Take one minute to think and write your answer in your rough notebook.</a:t>
             </a:r>
             <a:endParaRPr lang="en-US" dirty="0"/>
           </a:p>
@@ -2402,7 +2411,7 @@
           <a:p>
             <a:r>
               <a:rPr lang="en-US" dirty="0"/>
-              <a:t>Let us check the answer together. Africa, Asia, Europe, America (also Australia, Antarctica); the Pacific, the Atlantic and the Indian Ocean.</a:t>
+              <a:t>Let us check the answer together. The Equator (latitude 0°).</a:t>
             </a:r>
             <a:endParaRPr lang="en-US" dirty="0"/>
           </a:p>
@@ -2490,7 +2499,7 @@
           <a:p>
             <a:r>
               <a:rPr lang="en-US" dirty="0"/>
-              <a:t>Our topic is The Earth in the Universe, and the sub-topic is The Earth: A Planet of the Solar System. The key notions we shall use today are: universe, solar system, planet, latitude, longitude, continent, ocean. At the end, you should be able to do this: learners are able to situate the Earth in the solar system and describe its shape, size and main land and water areas.</a:t>
+              <a:t>Our topic is The Earth in the Universe, and the sub-topic is The Earth: A Planet of the Solar System. The key notions we shall use today are: universe, solar system, geographical coordinates, latitudes, longitudes. At the end, you should be able to do this: learners are able to situate the Earth in the solar system and describe its shape, size and main land and water areas.</a:t>
             </a:r>
             <a:endParaRPr lang="en-US" dirty="0"/>
           </a:p>
@@ -2578,7 +2587,7 @@
           <a:p>
             <a:r>
               <a:rPr lang="en-US" dirty="0"/>
-              <a:t>Activity 5. Look carefully at this diagram: water on the Earth. Observe every detail before I ask the question.</a:t>
+              <a:t>Activity 4. Look carefully at this diagram: the land and water of the Earth. Observe every detail before I ask the question.</a:t>
             </a:r>
             <a:endParaRPr lang="en-US" dirty="0"/>
           </a:p>
@@ -2666,7 +2675,7 @@
           <a:p>
             <a:r>
               <a:rPr lang="en-US" dirty="0"/>
-              <a:t>Here is the question for Activity 5: Which covers more of the Earth: land or water? Take one minute to think and write your answer in your rough notebook.</a:t>
+              <a:t>Here is the question for Activity 4: Name the continent on which Cameroon is found and two oceans around it. Take one minute to think and write your answer in your rough notebook.</a:t>
             </a:r>
             <a:endParaRPr lang="en-US" dirty="0"/>
           </a:p>
@@ -2754,7 +2763,7 @@
           <a:p>
             <a:r>
               <a:rPr lang="en-US" dirty="0"/>
-              <a:t>Let us check the answer together. Water covers about 71 % of the Earth; land covers only about 29 %.</a:t>
+              <a:t>Let us check the answer together. Africa; the Atlantic Ocean and the Indian Ocean.</a:t>
             </a:r>
             <a:endParaRPr lang="en-US" dirty="0"/>
           </a:p>
@@ -2842,7 +2851,7 @@
           <a:p>
             <a:r>
               <a:rPr lang="en-US" dirty="0"/>
-              <a:t>Now we are going to copy the board summary. Write the title and the headings neatly in your notebooks. I will give you enough time for each slide, so do not rush.</a:t>
+              <a:t>Activity 5. Look carefully at this diagram: water and land on the Earth. Observe every detail before I ask the question.</a:t>
             </a:r>
             <a:endParaRPr lang="en-US" dirty="0"/>
           </a:p>
@@ -2930,7 +2939,7 @@
           <a:p>
             <a:r>
               <a:rPr lang="en-US" dirty="0"/>
-              <a:t>Let us copy the definitions. The key terms of this lesson are defined as follows. On this slide we have Universe and Solar system. Write each point on a new line, with the key term first, and explain it in your own words when we revise.</a:t>
+              <a:t>Here is the question for Activity 5: Which covers more of the Earth: land or water? Take one minute to think and write your answer in your rough notebook.</a:t>
             </a:r>
             <a:endParaRPr lang="en-US" dirty="0"/>
           </a:p>
@@ -3018,7 +3027,7 @@
           <a:p>
             <a:r>
               <a:rPr lang="en-US" dirty="0"/>
-              <a:t>Let us copy The Earth in the Solar System. The Earth is situated as follows. On this slide we have A planet and Life. Write each point on a new line, with the key term first, and explain it in your own words when we revise.</a:t>
+              <a:t>Let us check the answer together. Water covers about 71 % of the Earth, and land covers only about 29 %.</a:t>
             </a:r>
             <a:endParaRPr lang="en-US" dirty="0"/>
           </a:p>
@@ -3106,7 +3115,7 @@
           <a:p>
             <a:r>
               <a:rPr lang="en-US" dirty="0"/>
-              <a:t>Now draw this illustration in your notebook: the solar system. Give it a title and label it clearly.</a:t>
+              <a:t>Now we are going to copy the board summary. Write the title and the headings neatly in your notebooks. I will give you enough time for each slide, so do not rush.</a:t>
             </a:r>
             <a:endParaRPr lang="en-US" dirty="0"/>
           </a:p>
@@ -3194,7 +3203,7 @@
           <a:p>
             <a:r>
               <a:rPr lang="en-US" dirty="0"/>
-              <a:t>Let us copy Shape, Dimensions and Locational References. The Earth has the following characteristics. On this slide we have Shape and Dimensions. Write each point on a new line, with the key term first, and explain it in your own words when we revise. When you finish, we go to the next slide.</a:t>
+              <a:t>Let us copy the definitions. The key terms of this lesson are defined as follows. On this slide we have Universe and Solar system. Write each point on a new line, with the key term first, and explain it in your own words when we revise. When you finish, we go to the next slide.</a:t>
             </a:r>
             <a:endParaRPr lang="en-US" dirty="0"/>
           </a:p>
@@ -3282,7 +3291,7 @@
           <a:p>
             <a:r>
               <a:rPr lang="en-US" dirty="0"/>
-              <a:t>We continue with Shape, Dimensions and Locational References. On this slide we have Locational references. Write each point on a new line, with the key term first, and explain it in your own words when we revise.</a:t>
+              <a:t>We continue with the definitions. On this slide we have Planet. Write each point on a new line, with the key term first, and explain it in your own words when we revise.</a:t>
             </a:r>
             <a:endParaRPr lang="en-US" dirty="0"/>
           </a:p>
@@ -3370,7 +3379,7 @@
           <a:p>
             <a:r>
               <a:rPr lang="en-US" dirty="0"/>
-              <a:t>Let us copy Landmasses and Water Bodies. The surface of the Earth is shared as follows. On this slide we have Continents and Oceans. Write each point on a new line, with the key term first, and explain it in your own words when we revise. When you finish, we go to the next slide.</a:t>
+              <a:t>Let us copy The Earth in the Solar System. The Earth is situated in the solar system as follows. Copy the point on The Sun on the left, then draw the diagram on the right: the Sun. Give it a title and label it clearly.</a:t>
             </a:r>
             <a:endParaRPr lang="en-US" dirty="0"/>
           </a:p>
@@ -3546,7 +3555,7 @@
           <a:p>
             <a:r>
               <a:rPr lang="en-US" dirty="0"/>
-              <a:t>We continue with Landmasses and Water Bodies. On this slide we have Distribution. Write each point on a new line, with the key term first, and explain it in your own words when we revise.</a:t>
+              <a:t>Copy the point on The planets on the left, then draw the diagram on the right: the solar system. Give it a title and label it clearly.</a:t>
             </a:r>
             <a:endParaRPr lang="en-US" dirty="0"/>
           </a:p>
@@ -3634,7 +3643,7 @@
           <a:p>
             <a:r>
               <a:rPr lang="en-US" dirty="0"/>
-              <a:t>Now draw this illustration in your notebook: the continents and oceans. Give it a title and label it clearly.</a:t>
+              <a:t>Copy the point on The Earth on the left, then draw the diagram on the right: the Earth seen from space. Give it a title and label it clearly.</a:t>
             </a:r>
             <a:endParaRPr lang="en-US" dirty="0"/>
           </a:p>
@@ -3722,7 +3731,7 @@
           <a:p>
             <a:r>
               <a:rPr lang="en-US" dirty="0"/>
-              <a:t>Now let us check what you have understood. Question 1: What is the position of the Earth in the solar system? Answer in your exercise book.</a:t>
+              <a:t>Let us copy Shape and Dimensions. Copy the point on Shape on the left, then draw the diagram on the right: the shape of the Earth. Give it a title and label it clearly.</a:t>
             </a:r>
             <a:endParaRPr lang="en-US" dirty="0"/>
           </a:p>
@@ -3810,7 +3819,7 @@
           <a:p>
             <a:r>
               <a:rPr lang="en-US" dirty="0"/>
-              <a:t>The expected answer is: it is the third planet from the Sun. If you got it right, well done.</a:t>
+              <a:t>We continue with Shape and Dimensions. On this slide we have Circumference, Diameter and Surface area. Write each point on a new line, with the key term first, and explain it in your own words when we revise.</a:t>
             </a:r>
             <a:endParaRPr lang="en-US" dirty="0"/>
           </a:p>
@@ -3898,7 +3907,7 @@
           <a:p>
             <a:r>
               <a:rPr lang="en-US" dirty="0"/>
-              <a:t>Now let us check what you have understood. Question 2: Name three continents and two oceans. Answer in your exercise book.</a:t>
+              <a:t>Let us copy Locational References. Copy the point on Lines of latitude on the left, then draw the diagram on the right: lines of latitude. Give it a title and label it clearly.</a:t>
             </a:r>
             <a:endParaRPr lang="en-US" dirty="0"/>
           </a:p>
@@ -3986,7 +3995,7 @@
           <a:p>
             <a:r>
               <a:rPr lang="en-US" dirty="0"/>
-              <a:t>The expected answer is: africa, Asia, Europe; the Atlantic and the Pacific Oceans. If you got it right, well done.</a:t>
+              <a:t>Copy the point on Lines of longitude on the left, then draw the diagram on the right: lines of longitude. Give it a title and label it clearly.</a:t>
             </a:r>
             <a:endParaRPr lang="en-US" dirty="0"/>
           </a:p>
@@ -4074,7 +4083,7 @@
           <a:p>
             <a:r>
               <a:rPr lang="en-US" dirty="0"/>
-              <a:t>For those who need more practice, fill in the blanks in your exercise book. The answers are: number 1, third; number 2, Pacific; number 3, Africa.</a:t>
+              <a:t>Copy the point on Geographical coordinates on the left, then draw the diagram on the right: the coordinates of a place. Give it a title and label it clearly.</a:t>
             </a:r>
             <a:endParaRPr lang="en-US" dirty="0"/>
           </a:p>
@@ -4162,7 +4171,7 @@
           <a:p>
             <a:r>
               <a:rPr lang="en-US" dirty="0"/>
-              <a:t>For your homework: On a map of the world in your atlas, find Cameroon, the Equator and the Greenwich Meridian. We shall correct it at the beginning of our next lesson.</a:t>
+              <a:t>Let us copy Distribution of Landmasses and Water Bodies. Land and water are distributed as follows. Copy the point on Continents on the left, then draw the diagram on the right: the continents and oceans. Give it a title and label it clearly.</a:t>
             </a:r>
             <a:endParaRPr lang="en-US" dirty="0"/>
           </a:p>
@@ -4250,7 +4259,7 @@
           <a:p>
             <a:r>
               <a:rPr lang="en-US" dirty="0"/>
-              <a:t>Our next lesson will be on Practical Work 1: Representation of the Earth's Shape and Size. Thank you for your attention, and see you next time.</a:t>
+              <a:t>We continue with Distribution of Landmasses and Water Bodies. On this slide we have Oceans. Write each point on a new line, with the key term first, and explain it in your own words when we revise.</a:t>
             </a:r>
             <a:endParaRPr lang="en-US" dirty="0"/>
           </a:p>
@@ -4338,7 +4347,7 @@
           <a:p>
             <a:r>
               <a:rPr lang="en-US" dirty="0"/>
-              <a:t>Let us play the bilingual game. I say a word in English, and you give me the French word. Then we do the reverse.</a:t>
+              <a:t>Copy the point on Share of land and water on the left, then draw the diagram on the right: water and land on the Earth. Give it a title and label it clearly.</a:t>
             </a:r>
             <a:endParaRPr lang="en-US" dirty="0"/>
           </a:p>
@@ -4514,7 +4523,7 @@
           <a:p>
             <a:r>
               <a:rPr lang="en-US" dirty="0"/>
-              <a:t>I record this information in the official logbook of the class after the lesson.</a:t>
+              <a:t>We continue with Distribution of Landmasses and Water Bodies. On this slide we have Hemispheres. Write each point on a new line, with the key term first, and explain it in your own words when we revise.</a:t>
             </a:r>
             <a:endParaRPr lang="en-US" dirty="0"/>
           </a:p>
@@ -4602,7 +4611,7 @@
           <a:p>
             <a:r>
               <a:rPr lang="en-US" dirty="0"/>
-              <a:t>I complete the second page of the logbook: the matter taught, the evaluation, the homework and the attendance.</a:t>
+              <a:t>Now let us check what you have understood. Question 1: What is the position of the Earth in the solar system? Answer in your exercise book.</a:t>
             </a:r>
             <a:endParaRPr lang="en-US" dirty="0"/>
           </a:p>
@@ -4690,7 +4699,7 @@
           <a:p>
             <a:r>
               <a:rPr lang="en-US" dirty="0"/>
-              <a:t>This slide is for me, the teacher: it gives the timing of the lesson and what to do if the projector is not available.</a:t>
+              <a:t>The expected answer is: it is the third planet from the Sun. If you got it right, well done.</a:t>
             </a:r>
             <a:endParaRPr lang="en-US" dirty="0"/>
           </a:p>
@@ -4778,7 +4787,7 @@
           <a:p>
             <a:r>
               <a:rPr lang="en-US" dirty="0"/>
-              <a:t>These are the references and picture credits used to prepare this lesson.</a:t>
+              <a:t>Now let us check what you have understood. Question 2: Name three continents and two oceans. Answer in your exercise book.</a:t>
             </a:r>
             <a:endParaRPr lang="en-US" dirty="0"/>
           </a:p>
@@ -4802,6 +4811,534 @@
             <a:fld id="{F7021451-1387-4CA6-816F-3879F97B5CBC}" type="slidenum">
               <a:rPr lang="en-US"/>
               <a:t>53</a:t>
+            </a:fld>
+            <a:endParaRPr lang="en-US"/>
+          </a:p>
+        </p:txBody>
+      </p:sp>
+    </p:spTree>
+    <p:extLst>
+      <p:ext uri="{BB962C8B-B14F-4D97-AF65-F5344CB8AC3E}">
+        <p14:creationId xmlns:p14="http://schemas.microsoft.com/office/powerpoint/2010/main" val="1024086991"/>
+      </p:ext>
+    </p:extLst>
+  </p:cSld>
+  <p:clrMapOvr>
+    <a:masterClrMapping/>
+  </p:clrMapOvr>
+</p:notes>
+</file>
+
+<file path=ppt/notesSlides/notesSlide54.xml><?xml version="1.0" encoding="utf-8"?>
+<p:notes xmlns:a="http://schemas.openxmlformats.org/drawingml/2006/main" xmlns:r="http://schemas.openxmlformats.org/officeDocument/2006/relationships" xmlns:p="http://schemas.openxmlformats.org/presentationml/2006/main">
+  <p:cSld>
+    <p:spTree>
+      <p:nvGrpSpPr>
+        <p:cNvPr id="1" name=""/>
+        <p:cNvGrpSpPr/>
+        <p:nvPr/>
+      </p:nvGrpSpPr>
+      <p:grpSpPr>
+        <a:xfrm>
+          <a:off x="0" y="0"/>
+          <a:ext cx="0" cy="0"/>
+          <a:chOff x="0" y="0"/>
+          <a:chExt cx="0" cy="0"/>
+        </a:xfrm>
+      </p:grpSpPr>
+      <p:sp>
+        <p:nvSpPr>
+          <p:cNvPr id="2" name="Slide Image Placeholder 1"/>
+          <p:cNvSpPr>
+            <a:spLocks noGrp="1" noRot="1" noChangeAspect="1"/>
+          </p:cNvSpPr>
+          <p:nvPr>
+            <p:ph type="sldImg"/>
+          </p:nvPr>
+        </p:nvSpPr>
+        <p:spPr/>
+      </p:sp>
+      <p:sp>
+        <p:nvSpPr>
+          <p:cNvPr id="3" name="Notes Placeholder 2"/>
+          <p:cNvSpPr>
+            <a:spLocks noGrp="1"/>
+          </p:cNvSpPr>
+          <p:nvPr>
+            <p:ph type="body" idx="1"/>
+          </p:nvPr>
+        </p:nvSpPr>
+        <p:spPr/>
+        <p:txBody>
+          <a:bodyPr/>
+          <a:lstStyle/>
+          <a:p>
+            <a:r>
+              <a:rPr lang="en-US" dirty="0"/>
+              <a:t>The expected answer is: africa, Asia, Europe; the Atlantic and the Pacific Oceans. If you got it right, well done.</a:t>
+            </a:r>
+            <a:endParaRPr lang="en-US" dirty="0"/>
+          </a:p>
+        </p:txBody>
+      </p:sp>
+      <p:sp>
+        <p:nvSpPr>
+          <p:cNvPr id="4" name="Slide Number Placeholder 3"/>
+          <p:cNvSpPr>
+            <a:spLocks noGrp="1"/>
+          </p:cNvSpPr>
+          <p:nvPr>
+            <p:ph type="sldNum" sz="quarter" idx="10"/>
+          </p:nvPr>
+        </p:nvSpPr>
+        <p:spPr/>
+        <p:txBody>
+          <a:bodyPr/>
+          <a:lstStyle/>
+          <a:p>
+            <a:fld id="{F7021451-1387-4CA6-816F-3879F97B5CBC}" type="slidenum">
+              <a:rPr lang="en-US"/>
+              <a:t>54</a:t>
+            </a:fld>
+            <a:endParaRPr lang="en-US"/>
+          </a:p>
+        </p:txBody>
+      </p:sp>
+    </p:spTree>
+    <p:extLst>
+      <p:ext uri="{BB962C8B-B14F-4D97-AF65-F5344CB8AC3E}">
+        <p14:creationId xmlns:p14="http://schemas.microsoft.com/office/powerpoint/2010/main" val="1024086991"/>
+      </p:ext>
+    </p:extLst>
+  </p:cSld>
+  <p:clrMapOvr>
+    <a:masterClrMapping/>
+  </p:clrMapOvr>
+</p:notes>
+</file>
+
+<file path=ppt/notesSlides/notesSlide55.xml><?xml version="1.0" encoding="utf-8"?>
+<p:notes xmlns:a="http://schemas.openxmlformats.org/drawingml/2006/main" xmlns:r="http://schemas.openxmlformats.org/officeDocument/2006/relationships" xmlns:p="http://schemas.openxmlformats.org/presentationml/2006/main">
+  <p:cSld>
+    <p:spTree>
+      <p:nvGrpSpPr>
+        <p:cNvPr id="1" name=""/>
+        <p:cNvGrpSpPr/>
+        <p:nvPr/>
+      </p:nvGrpSpPr>
+      <p:grpSpPr>
+        <a:xfrm>
+          <a:off x="0" y="0"/>
+          <a:ext cx="0" cy="0"/>
+          <a:chOff x="0" y="0"/>
+          <a:chExt cx="0" cy="0"/>
+        </a:xfrm>
+      </p:grpSpPr>
+      <p:sp>
+        <p:nvSpPr>
+          <p:cNvPr id="2" name="Slide Image Placeholder 1"/>
+          <p:cNvSpPr>
+            <a:spLocks noGrp="1" noRot="1" noChangeAspect="1"/>
+          </p:cNvSpPr>
+          <p:nvPr>
+            <p:ph type="sldImg"/>
+          </p:nvPr>
+        </p:nvSpPr>
+        <p:spPr/>
+      </p:sp>
+      <p:sp>
+        <p:nvSpPr>
+          <p:cNvPr id="3" name="Notes Placeholder 2"/>
+          <p:cNvSpPr>
+            <a:spLocks noGrp="1"/>
+          </p:cNvSpPr>
+          <p:nvPr>
+            <p:ph type="body" idx="1"/>
+          </p:nvPr>
+        </p:nvSpPr>
+        <p:spPr/>
+        <p:txBody>
+          <a:bodyPr/>
+          <a:lstStyle/>
+          <a:p>
+            <a:r>
+              <a:rPr lang="en-US" dirty="0"/>
+              <a:t>For those who need more practice, fill in the blanks in your exercise book. The answers are: number 1, third; number 2, Pacific; number 3, Africa.</a:t>
+            </a:r>
+            <a:endParaRPr lang="en-US" dirty="0"/>
+          </a:p>
+        </p:txBody>
+      </p:sp>
+      <p:sp>
+        <p:nvSpPr>
+          <p:cNvPr id="4" name="Slide Number Placeholder 3"/>
+          <p:cNvSpPr>
+            <a:spLocks noGrp="1"/>
+          </p:cNvSpPr>
+          <p:nvPr>
+            <p:ph type="sldNum" sz="quarter" idx="10"/>
+          </p:nvPr>
+        </p:nvSpPr>
+        <p:spPr/>
+        <p:txBody>
+          <a:bodyPr/>
+          <a:lstStyle/>
+          <a:p>
+            <a:fld id="{F7021451-1387-4CA6-816F-3879F97B5CBC}" type="slidenum">
+              <a:rPr lang="en-US"/>
+              <a:t>55</a:t>
+            </a:fld>
+            <a:endParaRPr lang="en-US"/>
+          </a:p>
+        </p:txBody>
+      </p:sp>
+    </p:spTree>
+    <p:extLst>
+      <p:ext uri="{BB962C8B-B14F-4D97-AF65-F5344CB8AC3E}">
+        <p14:creationId xmlns:p14="http://schemas.microsoft.com/office/powerpoint/2010/main" val="1024086991"/>
+      </p:ext>
+    </p:extLst>
+  </p:cSld>
+  <p:clrMapOvr>
+    <a:masterClrMapping/>
+  </p:clrMapOvr>
+</p:notes>
+</file>
+
+<file path=ppt/notesSlides/notesSlide56.xml><?xml version="1.0" encoding="utf-8"?>
+<p:notes xmlns:a="http://schemas.openxmlformats.org/drawingml/2006/main" xmlns:r="http://schemas.openxmlformats.org/officeDocument/2006/relationships" xmlns:p="http://schemas.openxmlformats.org/presentationml/2006/main">
+  <p:cSld>
+    <p:spTree>
+      <p:nvGrpSpPr>
+        <p:cNvPr id="1" name=""/>
+        <p:cNvGrpSpPr/>
+        <p:nvPr/>
+      </p:nvGrpSpPr>
+      <p:grpSpPr>
+        <a:xfrm>
+          <a:off x="0" y="0"/>
+          <a:ext cx="0" cy="0"/>
+          <a:chOff x="0" y="0"/>
+          <a:chExt cx="0" cy="0"/>
+        </a:xfrm>
+      </p:grpSpPr>
+      <p:sp>
+        <p:nvSpPr>
+          <p:cNvPr id="2" name="Slide Image Placeholder 1"/>
+          <p:cNvSpPr>
+            <a:spLocks noGrp="1" noRot="1" noChangeAspect="1"/>
+          </p:cNvSpPr>
+          <p:nvPr>
+            <p:ph type="sldImg"/>
+          </p:nvPr>
+        </p:nvSpPr>
+        <p:spPr/>
+      </p:sp>
+      <p:sp>
+        <p:nvSpPr>
+          <p:cNvPr id="3" name="Notes Placeholder 2"/>
+          <p:cNvSpPr>
+            <a:spLocks noGrp="1"/>
+          </p:cNvSpPr>
+          <p:nvPr>
+            <p:ph type="body" idx="1"/>
+          </p:nvPr>
+        </p:nvSpPr>
+        <p:spPr/>
+        <p:txBody>
+          <a:bodyPr/>
+          <a:lstStyle/>
+          <a:p>
+            <a:r>
+              <a:rPr lang="en-US" dirty="0"/>
+              <a:t>For your homework: On a map of the world in your atlas, find Cameroon, the Equator and the Greenwich Meridian. We shall correct it at the beginning of our next lesson.</a:t>
+            </a:r>
+            <a:endParaRPr lang="en-US" dirty="0"/>
+          </a:p>
+        </p:txBody>
+      </p:sp>
+      <p:sp>
+        <p:nvSpPr>
+          <p:cNvPr id="4" name="Slide Number Placeholder 3"/>
+          <p:cNvSpPr>
+            <a:spLocks noGrp="1"/>
+          </p:cNvSpPr>
+          <p:nvPr>
+            <p:ph type="sldNum" sz="quarter" idx="10"/>
+          </p:nvPr>
+        </p:nvSpPr>
+        <p:spPr/>
+        <p:txBody>
+          <a:bodyPr/>
+          <a:lstStyle/>
+          <a:p>
+            <a:fld id="{F7021451-1387-4CA6-816F-3879F97B5CBC}" type="slidenum">
+              <a:rPr lang="en-US"/>
+              <a:t>56</a:t>
+            </a:fld>
+            <a:endParaRPr lang="en-US"/>
+          </a:p>
+        </p:txBody>
+      </p:sp>
+    </p:spTree>
+    <p:extLst>
+      <p:ext uri="{BB962C8B-B14F-4D97-AF65-F5344CB8AC3E}">
+        <p14:creationId xmlns:p14="http://schemas.microsoft.com/office/powerpoint/2010/main" val="1024086991"/>
+      </p:ext>
+    </p:extLst>
+  </p:cSld>
+  <p:clrMapOvr>
+    <a:masterClrMapping/>
+  </p:clrMapOvr>
+</p:notes>
+</file>
+
+<file path=ppt/notesSlides/notesSlide57.xml><?xml version="1.0" encoding="utf-8"?>
+<p:notes xmlns:a="http://schemas.openxmlformats.org/drawingml/2006/main" xmlns:r="http://schemas.openxmlformats.org/officeDocument/2006/relationships" xmlns:p="http://schemas.openxmlformats.org/presentationml/2006/main">
+  <p:cSld>
+    <p:spTree>
+      <p:nvGrpSpPr>
+        <p:cNvPr id="1" name=""/>
+        <p:cNvGrpSpPr/>
+        <p:nvPr/>
+      </p:nvGrpSpPr>
+      <p:grpSpPr>
+        <a:xfrm>
+          <a:off x="0" y="0"/>
+          <a:ext cx="0" cy="0"/>
+          <a:chOff x="0" y="0"/>
+          <a:chExt cx="0" cy="0"/>
+        </a:xfrm>
+      </p:grpSpPr>
+      <p:sp>
+        <p:nvSpPr>
+          <p:cNvPr id="2" name="Slide Image Placeholder 1"/>
+          <p:cNvSpPr>
+            <a:spLocks noGrp="1" noRot="1" noChangeAspect="1"/>
+          </p:cNvSpPr>
+          <p:nvPr>
+            <p:ph type="sldImg"/>
+          </p:nvPr>
+        </p:nvSpPr>
+        <p:spPr/>
+      </p:sp>
+      <p:sp>
+        <p:nvSpPr>
+          <p:cNvPr id="3" name="Notes Placeholder 2"/>
+          <p:cNvSpPr>
+            <a:spLocks noGrp="1"/>
+          </p:cNvSpPr>
+          <p:nvPr>
+            <p:ph type="body" idx="1"/>
+          </p:nvPr>
+        </p:nvSpPr>
+        <p:spPr/>
+        <p:txBody>
+          <a:bodyPr/>
+          <a:lstStyle/>
+          <a:p>
+            <a:r>
+              <a:rPr lang="en-US" dirty="0"/>
+              <a:t>Our next lesson will be on Practical Work 1: Representation of the Earth's Shape and Size. Thank you for your attention, and see you next time.</a:t>
+            </a:r>
+            <a:endParaRPr lang="en-US" dirty="0"/>
+          </a:p>
+        </p:txBody>
+      </p:sp>
+      <p:sp>
+        <p:nvSpPr>
+          <p:cNvPr id="4" name="Slide Number Placeholder 3"/>
+          <p:cNvSpPr>
+            <a:spLocks noGrp="1"/>
+          </p:cNvSpPr>
+          <p:nvPr>
+            <p:ph type="sldNum" sz="quarter" idx="10"/>
+          </p:nvPr>
+        </p:nvSpPr>
+        <p:spPr/>
+        <p:txBody>
+          <a:bodyPr/>
+          <a:lstStyle/>
+          <a:p>
+            <a:fld id="{F7021451-1387-4CA6-816F-3879F97B5CBC}" type="slidenum">
+              <a:rPr lang="en-US"/>
+              <a:t>57</a:t>
+            </a:fld>
+            <a:endParaRPr lang="en-US"/>
+          </a:p>
+        </p:txBody>
+      </p:sp>
+    </p:spTree>
+    <p:extLst>
+      <p:ext uri="{BB962C8B-B14F-4D97-AF65-F5344CB8AC3E}">
+        <p14:creationId xmlns:p14="http://schemas.microsoft.com/office/powerpoint/2010/main" val="1024086991"/>
+      </p:ext>
+    </p:extLst>
+  </p:cSld>
+  <p:clrMapOvr>
+    <a:masterClrMapping/>
+  </p:clrMapOvr>
+</p:notes>
+</file>
+
+<file path=ppt/notesSlides/notesSlide58.xml><?xml version="1.0" encoding="utf-8"?>
+<p:notes xmlns:a="http://schemas.openxmlformats.org/drawingml/2006/main" xmlns:r="http://schemas.openxmlformats.org/officeDocument/2006/relationships" xmlns:p="http://schemas.openxmlformats.org/presentationml/2006/main">
+  <p:cSld>
+    <p:spTree>
+      <p:nvGrpSpPr>
+        <p:cNvPr id="1" name=""/>
+        <p:cNvGrpSpPr/>
+        <p:nvPr/>
+      </p:nvGrpSpPr>
+      <p:grpSpPr>
+        <a:xfrm>
+          <a:off x="0" y="0"/>
+          <a:ext cx="0" cy="0"/>
+          <a:chOff x="0" y="0"/>
+          <a:chExt cx="0" cy="0"/>
+        </a:xfrm>
+      </p:grpSpPr>
+      <p:sp>
+        <p:nvSpPr>
+          <p:cNvPr id="2" name="Slide Image Placeholder 1"/>
+          <p:cNvSpPr>
+            <a:spLocks noGrp="1" noRot="1" noChangeAspect="1"/>
+          </p:cNvSpPr>
+          <p:nvPr>
+            <p:ph type="sldImg"/>
+          </p:nvPr>
+        </p:nvSpPr>
+        <p:spPr/>
+      </p:sp>
+      <p:sp>
+        <p:nvSpPr>
+          <p:cNvPr id="3" name="Notes Placeholder 2"/>
+          <p:cNvSpPr>
+            <a:spLocks noGrp="1"/>
+          </p:cNvSpPr>
+          <p:nvPr>
+            <p:ph type="body" idx="1"/>
+          </p:nvPr>
+        </p:nvSpPr>
+        <p:spPr/>
+        <p:txBody>
+          <a:bodyPr/>
+          <a:lstStyle/>
+          <a:p>
+            <a:r>
+              <a:rPr lang="en-US" dirty="0"/>
+              <a:t>Let us play the bilingual game. I say a word in English, and you give me the French word. Then we do the reverse.</a:t>
+            </a:r>
+            <a:endParaRPr lang="en-US" dirty="0"/>
+          </a:p>
+        </p:txBody>
+      </p:sp>
+      <p:sp>
+        <p:nvSpPr>
+          <p:cNvPr id="4" name="Slide Number Placeholder 3"/>
+          <p:cNvSpPr>
+            <a:spLocks noGrp="1"/>
+          </p:cNvSpPr>
+          <p:nvPr>
+            <p:ph type="sldNum" sz="quarter" idx="10"/>
+          </p:nvPr>
+        </p:nvSpPr>
+        <p:spPr/>
+        <p:txBody>
+          <a:bodyPr/>
+          <a:lstStyle/>
+          <a:p>
+            <a:fld id="{F7021451-1387-4CA6-816F-3879F97B5CBC}" type="slidenum">
+              <a:rPr lang="en-US"/>
+              <a:t>58</a:t>
+            </a:fld>
+            <a:endParaRPr lang="en-US"/>
+          </a:p>
+        </p:txBody>
+      </p:sp>
+    </p:spTree>
+    <p:extLst>
+      <p:ext uri="{BB962C8B-B14F-4D97-AF65-F5344CB8AC3E}">
+        <p14:creationId xmlns:p14="http://schemas.microsoft.com/office/powerpoint/2010/main" val="1024086991"/>
+      </p:ext>
+    </p:extLst>
+  </p:cSld>
+  <p:clrMapOvr>
+    <a:masterClrMapping/>
+  </p:clrMapOvr>
+</p:notes>
+</file>
+
+<file path=ppt/notesSlides/notesSlide59.xml><?xml version="1.0" encoding="utf-8"?>
+<p:notes xmlns:a="http://schemas.openxmlformats.org/drawingml/2006/main" xmlns:r="http://schemas.openxmlformats.org/officeDocument/2006/relationships" xmlns:p="http://schemas.openxmlformats.org/presentationml/2006/main">
+  <p:cSld>
+    <p:spTree>
+      <p:nvGrpSpPr>
+        <p:cNvPr id="1" name=""/>
+        <p:cNvGrpSpPr/>
+        <p:nvPr/>
+      </p:nvGrpSpPr>
+      <p:grpSpPr>
+        <a:xfrm>
+          <a:off x="0" y="0"/>
+          <a:ext cx="0" cy="0"/>
+          <a:chOff x="0" y="0"/>
+          <a:chExt cx="0" cy="0"/>
+        </a:xfrm>
+      </p:grpSpPr>
+      <p:sp>
+        <p:nvSpPr>
+          <p:cNvPr id="2" name="Slide Image Placeholder 1"/>
+          <p:cNvSpPr>
+            <a:spLocks noGrp="1" noRot="1" noChangeAspect="1"/>
+          </p:cNvSpPr>
+          <p:nvPr>
+            <p:ph type="sldImg"/>
+          </p:nvPr>
+        </p:nvSpPr>
+        <p:spPr/>
+      </p:sp>
+      <p:sp>
+        <p:nvSpPr>
+          <p:cNvPr id="3" name="Notes Placeholder 2"/>
+          <p:cNvSpPr>
+            <a:spLocks noGrp="1"/>
+          </p:cNvSpPr>
+          <p:nvPr>
+            <p:ph type="body" idx="1"/>
+          </p:nvPr>
+        </p:nvSpPr>
+        <p:spPr/>
+        <p:txBody>
+          <a:bodyPr/>
+          <a:lstStyle/>
+          <a:p>
+            <a:r>
+              <a:rPr lang="en-US" dirty="0"/>
+              <a:t>I record this information in the official logbook of the class after the lesson.</a:t>
+            </a:r>
+            <a:endParaRPr lang="en-US" dirty="0"/>
+          </a:p>
+        </p:txBody>
+      </p:sp>
+      <p:sp>
+        <p:nvSpPr>
+          <p:cNvPr id="4" name="Slide Number Placeholder 3"/>
+          <p:cNvSpPr>
+            <a:spLocks noGrp="1"/>
+          </p:cNvSpPr>
+          <p:nvPr>
+            <p:ph type="sldNum" sz="quarter" idx="10"/>
+          </p:nvPr>
+        </p:nvSpPr>
+        <p:spPr/>
+        <p:txBody>
+          <a:bodyPr/>
+          <a:lstStyle/>
+          <a:p>
+            <a:fld id="{F7021451-1387-4CA6-816F-3879F97B5CBC}" type="slidenum">
+              <a:rPr lang="en-US"/>
+              <a:t>59</a:t>
             </a:fld>
             <a:endParaRPr lang="en-US"/>
           </a:p>
@@ -4908,6 +5445,270 @@
 </p:notes>
 </file>
 
+<file path=ppt/notesSlides/notesSlide60.xml><?xml version="1.0" encoding="utf-8"?>
+<p:notes xmlns:a="http://schemas.openxmlformats.org/drawingml/2006/main" xmlns:r="http://schemas.openxmlformats.org/officeDocument/2006/relationships" xmlns:p="http://schemas.openxmlformats.org/presentationml/2006/main">
+  <p:cSld>
+    <p:spTree>
+      <p:nvGrpSpPr>
+        <p:cNvPr id="1" name=""/>
+        <p:cNvGrpSpPr/>
+        <p:nvPr/>
+      </p:nvGrpSpPr>
+      <p:grpSpPr>
+        <a:xfrm>
+          <a:off x="0" y="0"/>
+          <a:ext cx="0" cy="0"/>
+          <a:chOff x="0" y="0"/>
+          <a:chExt cx="0" cy="0"/>
+        </a:xfrm>
+      </p:grpSpPr>
+      <p:sp>
+        <p:nvSpPr>
+          <p:cNvPr id="2" name="Slide Image Placeholder 1"/>
+          <p:cNvSpPr>
+            <a:spLocks noGrp="1" noRot="1" noChangeAspect="1"/>
+          </p:cNvSpPr>
+          <p:nvPr>
+            <p:ph type="sldImg"/>
+          </p:nvPr>
+        </p:nvSpPr>
+        <p:spPr/>
+      </p:sp>
+      <p:sp>
+        <p:nvSpPr>
+          <p:cNvPr id="3" name="Notes Placeholder 2"/>
+          <p:cNvSpPr>
+            <a:spLocks noGrp="1"/>
+          </p:cNvSpPr>
+          <p:nvPr>
+            <p:ph type="body" idx="1"/>
+          </p:nvPr>
+        </p:nvSpPr>
+        <p:spPr/>
+        <p:txBody>
+          <a:bodyPr/>
+          <a:lstStyle/>
+          <a:p>
+            <a:r>
+              <a:rPr lang="en-US" dirty="0"/>
+              <a:t>I complete the second page of the logbook: the matter taught, the evaluation, the homework and the attendance.</a:t>
+            </a:r>
+            <a:endParaRPr lang="en-US" dirty="0"/>
+          </a:p>
+        </p:txBody>
+      </p:sp>
+      <p:sp>
+        <p:nvSpPr>
+          <p:cNvPr id="4" name="Slide Number Placeholder 3"/>
+          <p:cNvSpPr>
+            <a:spLocks noGrp="1"/>
+          </p:cNvSpPr>
+          <p:nvPr>
+            <p:ph type="sldNum" sz="quarter" idx="10"/>
+          </p:nvPr>
+        </p:nvSpPr>
+        <p:spPr/>
+        <p:txBody>
+          <a:bodyPr/>
+          <a:lstStyle/>
+          <a:p>
+            <a:fld id="{F7021451-1387-4CA6-816F-3879F97B5CBC}" type="slidenum">
+              <a:rPr lang="en-US"/>
+              <a:t>60</a:t>
+            </a:fld>
+            <a:endParaRPr lang="en-US"/>
+          </a:p>
+        </p:txBody>
+      </p:sp>
+    </p:spTree>
+    <p:extLst>
+      <p:ext uri="{BB962C8B-B14F-4D97-AF65-F5344CB8AC3E}">
+        <p14:creationId xmlns:p14="http://schemas.microsoft.com/office/powerpoint/2010/main" val="1024086991"/>
+      </p:ext>
+    </p:extLst>
+  </p:cSld>
+  <p:clrMapOvr>
+    <a:masterClrMapping/>
+  </p:clrMapOvr>
+</p:notes>
+</file>
+
+<file path=ppt/notesSlides/notesSlide61.xml><?xml version="1.0" encoding="utf-8"?>
+<p:notes xmlns:a="http://schemas.openxmlformats.org/drawingml/2006/main" xmlns:r="http://schemas.openxmlformats.org/officeDocument/2006/relationships" xmlns:p="http://schemas.openxmlformats.org/presentationml/2006/main">
+  <p:cSld>
+    <p:spTree>
+      <p:nvGrpSpPr>
+        <p:cNvPr id="1" name=""/>
+        <p:cNvGrpSpPr/>
+        <p:nvPr/>
+      </p:nvGrpSpPr>
+      <p:grpSpPr>
+        <a:xfrm>
+          <a:off x="0" y="0"/>
+          <a:ext cx="0" cy="0"/>
+          <a:chOff x="0" y="0"/>
+          <a:chExt cx="0" cy="0"/>
+        </a:xfrm>
+      </p:grpSpPr>
+      <p:sp>
+        <p:nvSpPr>
+          <p:cNvPr id="2" name="Slide Image Placeholder 1"/>
+          <p:cNvSpPr>
+            <a:spLocks noGrp="1" noRot="1" noChangeAspect="1"/>
+          </p:cNvSpPr>
+          <p:nvPr>
+            <p:ph type="sldImg"/>
+          </p:nvPr>
+        </p:nvSpPr>
+        <p:spPr/>
+      </p:sp>
+      <p:sp>
+        <p:nvSpPr>
+          <p:cNvPr id="3" name="Notes Placeholder 2"/>
+          <p:cNvSpPr>
+            <a:spLocks noGrp="1"/>
+          </p:cNvSpPr>
+          <p:nvPr>
+            <p:ph type="body" idx="1"/>
+          </p:nvPr>
+        </p:nvSpPr>
+        <p:spPr/>
+        <p:txBody>
+          <a:bodyPr/>
+          <a:lstStyle/>
+          <a:p>
+            <a:r>
+              <a:rPr lang="en-US" dirty="0"/>
+              <a:t>This slide is for me, the teacher: it gives the timing of the lesson and what to do if the projector is not available.</a:t>
+            </a:r>
+            <a:endParaRPr lang="en-US" dirty="0"/>
+          </a:p>
+        </p:txBody>
+      </p:sp>
+      <p:sp>
+        <p:nvSpPr>
+          <p:cNvPr id="4" name="Slide Number Placeholder 3"/>
+          <p:cNvSpPr>
+            <a:spLocks noGrp="1"/>
+          </p:cNvSpPr>
+          <p:nvPr>
+            <p:ph type="sldNum" sz="quarter" idx="10"/>
+          </p:nvPr>
+        </p:nvSpPr>
+        <p:spPr/>
+        <p:txBody>
+          <a:bodyPr/>
+          <a:lstStyle/>
+          <a:p>
+            <a:fld id="{F7021451-1387-4CA6-816F-3879F97B5CBC}" type="slidenum">
+              <a:rPr lang="en-US"/>
+              <a:t>61</a:t>
+            </a:fld>
+            <a:endParaRPr lang="en-US"/>
+          </a:p>
+        </p:txBody>
+      </p:sp>
+    </p:spTree>
+    <p:extLst>
+      <p:ext uri="{BB962C8B-B14F-4D97-AF65-F5344CB8AC3E}">
+        <p14:creationId xmlns:p14="http://schemas.microsoft.com/office/powerpoint/2010/main" val="1024086991"/>
+      </p:ext>
+    </p:extLst>
+  </p:cSld>
+  <p:clrMapOvr>
+    <a:masterClrMapping/>
+  </p:clrMapOvr>
+</p:notes>
+</file>
+
+<file path=ppt/notesSlides/notesSlide62.xml><?xml version="1.0" encoding="utf-8"?>
+<p:notes xmlns:a="http://schemas.openxmlformats.org/drawingml/2006/main" xmlns:r="http://schemas.openxmlformats.org/officeDocument/2006/relationships" xmlns:p="http://schemas.openxmlformats.org/presentationml/2006/main">
+  <p:cSld>
+    <p:spTree>
+      <p:nvGrpSpPr>
+        <p:cNvPr id="1" name=""/>
+        <p:cNvGrpSpPr/>
+        <p:nvPr/>
+      </p:nvGrpSpPr>
+      <p:grpSpPr>
+        <a:xfrm>
+          <a:off x="0" y="0"/>
+          <a:ext cx="0" cy="0"/>
+          <a:chOff x="0" y="0"/>
+          <a:chExt cx="0" cy="0"/>
+        </a:xfrm>
+      </p:grpSpPr>
+      <p:sp>
+        <p:nvSpPr>
+          <p:cNvPr id="2" name="Slide Image Placeholder 1"/>
+          <p:cNvSpPr>
+            <a:spLocks noGrp="1" noRot="1" noChangeAspect="1"/>
+          </p:cNvSpPr>
+          <p:nvPr>
+            <p:ph type="sldImg"/>
+          </p:nvPr>
+        </p:nvSpPr>
+        <p:spPr/>
+      </p:sp>
+      <p:sp>
+        <p:nvSpPr>
+          <p:cNvPr id="3" name="Notes Placeholder 2"/>
+          <p:cNvSpPr>
+            <a:spLocks noGrp="1"/>
+          </p:cNvSpPr>
+          <p:nvPr>
+            <p:ph type="body" idx="1"/>
+          </p:nvPr>
+        </p:nvSpPr>
+        <p:spPr/>
+        <p:txBody>
+          <a:bodyPr/>
+          <a:lstStyle/>
+          <a:p>
+            <a:r>
+              <a:rPr lang="en-US" dirty="0"/>
+              <a:t>These are the references and picture credits used to prepare this lesson.</a:t>
+            </a:r>
+            <a:endParaRPr lang="en-US" dirty="0"/>
+          </a:p>
+        </p:txBody>
+      </p:sp>
+      <p:sp>
+        <p:nvSpPr>
+          <p:cNvPr id="4" name="Slide Number Placeholder 3"/>
+          <p:cNvSpPr>
+            <a:spLocks noGrp="1"/>
+          </p:cNvSpPr>
+          <p:nvPr>
+            <p:ph type="sldNum" sz="quarter" idx="10"/>
+          </p:nvPr>
+        </p:nvSpPr>
+        <p:spPr/>
+        <p:txBody>
+          <a:bodyPr/>
+          <a:lstStyle/>
+          <a:p>
+            <a:fld id="{F7021451-1387-4CA6-816F-3879F97B5CBC}" type="slidenum">
+              <a:rPr lang="en-US"/>
+              <a:t>62</a:t>
+            </a:fld>
+            <a:endParaRPr lang="en-US"/>
+          </a:p>
+        </p:txBody>
+      </p:sp>
+    </p:spTree>
+    <p:extLst>
+      <p:ext uri="{BB962C8B-B14F-4D97-AF65-F5344CB8AC3E}">
+        <p14:creationId xmlns:p14="http://schemas.microsoft.com/office/powerpoint/2010/main" val="1024086991"/>
+      </p:ext>
+    </p:extLst>
+  </p:cSld>
+  <p:clrMapOvr>
+    <a:masterClrMapping/>
+  </p:clrMapOvr>
+</p:notes>
+</file>
+
 <file path=ppt/notesSlides/notesSlide7.xml><?xml version="1.0" encoding="utf-8"?>
 <p:notes xmlns:a="http://schemas.openxmlformats.org/drawingml/2006/main" xmlns:r="http://schemas.openxmlformats.org/officeDocument/2006/relationships" xmlns:p="http://schemas.openxmlformats.org/presentationml/2006/main">
   <p:cSld>
@@ -4954,7 +5755,7 @@
           <a:p>
             <a:r>
               <a:rPr lang="en-US" dirty="0"/>
-              <a:t>By the end of this lesson, you should be able to do three things. Number 1: situate the Earth in the solar system. Number 2: describe the shape and the dimensions of the Earth and its locational references. Number 3: name the continents and the oceans.</a:t>
+              <a:t>Take your time to copy this part; we will continue together.</a:t>
             </a:r>
             <a:endParaRPr lang="en-US" dirty="0"/>
           </a:p>
@@ -5042,7 +5843,7 @@
           <a:p>
             <a:r>
               <a:rPr lang="en-US" dirty="0"/>
-              <a:t>Let us first remember what you already know. Geography studies the Earth and its people. The Sun gives us light and heat. Maps show land and water. Keep this in mind, because we shall build on it today.</a:t>
+              <a:t>By the end of this lesson, you should be able to do three things. Number 1: situate the Earth in the solar system. Number 2: describe the shape, the dimensions and the locational references of the Earth. Number 3: describe the distribution of the landmasses and water bodies.</a:t>
             </a:r>
             <a:endParaRPr lang="en-US" dirty="0"/>
           </a:p>
@@ -5130,7 +5931,7 @@
           <a:p>
             <a:r>
               <a:rPr lang="en-US" dirty="0"/>
-              <a:t>Listen carefully to this situation from real life. During a clear night in Garoua, Aminatou sees many stars and asks her brother if the Earth is also a star. Her brother shows her a globe and says that the Earth is a planet, mostly covered by water. Think about it, because I am going to ask you some questions.</a:t>
+              <a:t>Let us first remember what you already know. Geography studies the Earth and its people. The Sun gives us light and heat. Maps show land and water. Keep this in mind, because we shall build on it today.</a:t>
             </a:r>
             <a:endParaRPr lang="en-US" dirty="0"/>
           </a:p>
@@ -6510,7 +7311,7 @@
         <p:spPr>
           <a:xfrm>
             <a:off x="0" y="658368"/>
-            <a:ext cx="5120640" cy="5833872"/>
+            <a:ext cx="3840480" cy="5833872"/>
           </a:xfrm>
           <a:prstGeom prst="rect">
             <a:avLst/>
@@ -6525,8 +7326,8 @@
         </p:nvSpPr>
         <p:spPr>
           <a:xfrm>
-            <a:off x="5349240" y="1005840"/>
-            <a:ext cx="6522415" cy="731520"/>
+            <a:off x="4069080" y="1005840"/>
+            <a:ext cx="7802575" cy="731520"/>
           </a:xfrm>
           <a:prstGeom prst="rect">
             <a:avLst/>
@@ -6552,7 +7353,7 @@
                 <a:ea typeface="Times New Roman" pitchFamily="34" charset="-122"/>
                 <a:cs typeface="Times New Roman" pitchFamily="34" charset="-120"/>
               </a:rPr>
-              <a:t>Situation: Question 1</a:t>
+              <a:t>Situation in Real Life</a:t>
             </a:r>
             <a:endParaRPr lang="en-US" sz="3600" dirty="0"/>
           </a:p>
@@ -6566,8 +7367,8 @@
         </p:nvSpPr>
         <p:spPr>
           <a:xfrm>
-            <a:off x="5349240" y="1783080"/>
-            <a:ext cx="6522415" cy="4663440"/>
+            <a:off x="4069080" y="1783080"/>
+            <a:ext cx="7802575" cy="4663440"/>
           </a:xfrm>
           <a:prstGeom prst="rect">
             <a:avLst/>
@@ -6594,7 +7395,7 @@
                 <a:ea typeface="Times New Roman" pitchFamily="34" charset="-122"/>
                 <a:cs typeface="Times New Roman" pitchFamily="34" charset="-120"/>
               </a:rPr>
-              <a:t>What is the problem in the situation?</a:t>
+              <a:t>During a clear night in Garoua, Aminatou sees many stars in the sky. She asks her brother: "Is the Earth also a star, and what does it look like from space?" Her brother does not know how to answer her.</a:t>
             </a:r>
             <a:endParaRPr lang="en-US" sz="4000" dirty="0"/>
           </a:p>
@@ -6771,7 +7572,7 @@
                 <a:ea typeface="Times New Roman" pitchFamily="34" charset="-122"/>
                 <a:cs typeface="Times New Roman" pitchFamily="34" charset="-120"/>
               </a:rPr>
-              <a:t>Answer</a:t>
+              <a:t>Situation: Question 1</a:t>
             </a:r>
             <a:endParaRPr lang="en-US" sz="3600" dirty="0"/>
           </a:p>
@@ -6813,7 +7614,7 @@
                 <a:ea typeface="Times New Roman" pitchFamily="34" charset="-122"/>
                 <a:cs typeface="Times New Roman" pitchFamily="34" charset="-120"/>
               </a:rPr>
-              <a:t>Aminatou does not know what kind of body the Earth is.</a:t>
+              <a:t>What is the problem in the situation?</a:t>
             </a:r>
             <a:endParaRPr lang="en-US" sz="4000" dirty="0"/>
           </a:p>
@@ -6990,7 +7791,7 @@
                 <a:ea typeface="Times New Roman" pitchFamily="34" charset="-122"/>
                 <a:cs typeface="Times New Roman" pitchFamily="34" charset="-120"/>
               </a:rPr>
-              <a:t>Situation: Question 2</a:t>
+              <a:t>Answer</a:t>
             </a:r>
             <a:endParaRPr lang="en-US" sz="3600" dirty="0"/>
           </a:p>
@@ -7032,7 +7833,7 @@
                 <a:ea typeface="Times New Roman" pitchFamily="34" charset="-122"/>
                 <a:cs typeface="Times New Roman" pitchFamily="34" charset="-120"/>
               </a:rPr>
-              <a:t>Is the Earth a star?</a:t>
+              <a:t>Aminatou does not know what kind of body the Earth is and what it looks like.</a:t>
             </a:r>
             <a:endParaRPr lang="en-US" sz="4000" dirty="0"/>
           </a:p>
@@ -7209,7 +8010,7 @@
                 <a:ea typeface="Times New Roman" pitchFamily="34" charset="-122"/>
                 <a:cs typeface="Times New Roman" pitchFamily="34" charset="-120"/>
               </a:rPr>
-              <a:t>Answer</a:t>
+              <a:t>Situation: Question 2</a:t>
             </a:r>
             <a:endParaRPr lang="en-US" sz="3600" dirty="0"/>
           </a:p>
@@ -7251,7 +8052,7 @@
                 <a:ea typeface="Times New Roman" pitchFamily="34" charset="-122"/>
                 <a:cs typeface="Times New Roman" pitchFamily="34" charset="-120"/>
               </a:rPr>
-              <a:t>No, it is a planet that moves around the Sun.</a:t>
+              <a:t>Is the Earth a star?</a:t>
             </a:r>
             <a:endParaRPr lang="en-US" sz="4000" dirty="0"/>
           </a:p>
@@ -7428,7 +8229,7 @@
                 <a:ea typeface="Times New Roman" pitchFamily="34" charset="-122"/>
                 <a:cs typeface="Times New Roman" pitchFamily="34" charset="-120"/>
               </a:rPr>
-              <a:t>Situation: Question 3</a:t>
+              <a:t>Answer</a:t>
             </a:r>
             <a:endParaRPr lang="en-US" sz="3600" dirty="0"/>
           </a:p>
@@ -7470,7 +8271,7 @@
                 <a:ea typeface="Times New Roman" pitchFamily="34" charset="-122"/>
                 <a:cs typeface="Times New Roman" pitchFamily="34" charset="-120"/>
               </a:rPr>
-              <a:t>What covers most of the Earth?</a:t>
+              <a:t>No, it is a planet that moves around the Sun.</a:t>
             </a:r>
             <a:endParaRPr lang="en-US" sz="4000" dirty="0"/>
           </a:p>
@@ -7647,7 +8448,7 @@
                 <a:ea typeface="Times New Roman" pitchFamily="34" charset="-122"/>
                 <a:cs typeface="Times New Roman" pitchFamily="34" charset="-120"/>
               </a:rPr>
-              <a:t>Possible Answer</a:t>
+              <a:t>Situation: Question 3</a:t>
             </a:r>
             <a:endParaRPr lang="en-US" sz="3600" dirty="0"/>
           </a:p>
@@ -7689,7 +8490,7 @@
                 <a:ea typeface="Times New Roman" pitchFamily="34" charset="-122"/>
                 <a:cs typeface="Times New Roman" pitchFamily="34" charset="-120"/>
               </a:rPr>
-              <a:t>Water (oceans and seas).</a:t>
+              <a:t>What covers most of the Earth?</a:t>
             </a:r>
             <a:endParaRPr lang="en-US" sz="4000" dirty="0"/>
           </a:p>
@@ -7801,7 +8602,7 @@
                 <a:ea typeface="Calibri" pitchFamily="34" charset="-122"/>
                 <a:cs typeface="Calibri" pitchFamily="34" charset="-120"/>
               </a:rPr>
-              <a:t>ACTION TO TAKE</a:t>
+              <a:t>REAL-LIFE SITUATION</a:t>
             </a:r>
             <a:endParaRPr lang="en-US" sz="1400" dirty="0"/>
           </a:p>
@@ -7866,7 +8667,7 @@
                 <a:ea typeface="Times New Roman" pitchFamily="34" charset="-122"/>
                 <a:cs typeface="Times New Roman" pitchFamily="34" charset="-120"/>
               </a:rPr>
-              <a:t>Action to Take</a:t>
+              <a:t>Possible Answer</a:t>
             </a:r>
             <a:endParaRPr lang="en-US" sz="3600" dirty="0"/>
           </a:p>
@@ -7908,7 +8709,7 @@
                 <a:ea typeface="Times New Roman" pitchFamily="34" charset="-122"/>
                 <a:cs typeface="Times New Roman" pitchFamily="34" charset="-120"/>
               </a:rPr>
-              <a:t>Use a globe or a map to locate the continents and oceans of the world.</a:t>
+              <a:t>Water (oceans and seas).</a:t>
             </a:r>
             <a:endParaRPr lang="en-US" sz="4000" dirty="0"/>
           </a:p>
@@ -8020,7 +8821,7 @@
                 <a:ea typeface="Calibri" pitchFamily="34" charset="-122"/>
                 <a:cs typeface="Calibri" pitchFamily="34" charset="-120"/>
               </a:rPr>
-              <a:t>JUSTIFICATION</a:t>
+              <a:t>ACTION TO TAKE</a:t>
             </a:r>
             <a:endParaRPr lang="en-US" sz="1400" dirty="0"/>
           </a:p>
@@ -8085,7 +8886,7 @@
                 <a:ea typeface="Times New Roman" pitchFamily="34" charset="-122"/>
                 <a:cs typeface="Times New Roman" pitchFamily="34" charset="-120"/>
               </a:rPr>
-              <a:t>Justification of the Lesson</a:t>
+              <a:t>Action to Take</a:t>
             </a:r>
             <a:endParaRPr lang="en-US" sz="3600" dirty="0"/>
           </a:p>
@@ -8127,7 +8928,7 @@
                 <a:ea typeface="Times New Roman" pitchFamily="34" charset="-122"/>
                 <a:cs typeface="Times New Roman" pitchFamily="34" charset="-120"/>
               </a:rPr>
-              <a:t>This lesson helps us to know the place of our planet in the universe and its main land and water areas.</a:t>
+              <a:t>Use a globe or a map to locate the continents and oceans of the world.</a:t>
             </a:r>
             <a:endParaRPr lang="en-US" sz="4000" dirty="0"/>
           </a:p>
@@ -8239,54 +9040,15 @@
                 <a:ea typeface="Calibri" pitchFamily="34" charset="-122"/>
                 <a:cs typeface="Calibri" pitchFamily="34" charset="-120"/>
               </a:rPr>
-              <a:t>1. THE EARTH IN THE SOLAR SYSTEM</a:t>
+              <a:t>JUSTIFICATION</a:t>
             </a:r>
             <a:endParaRPr lang="en-US" sz="1400" dirty="0"/>
-          </a:p>
-        </p:txBody>
-      </p:sp>
-      <p:sp>
-        <p:nvSpPr>
-          <p:cNvPr id="3" name="Text 1"/>
-          <p:cNvSpPr/>
-          <p:nvPr/>
-        </p:nvSpPr>
-        <p:spPr>
-          <a:xfrm>
-            <a:off x="457200" y="1005840"/>
-            <a:ext cx="11277295" cy="731520"/>
-          </a:xfrm>
-          <a:prstGeom prst="rect">
-            <a:avLst/>
-          </a:prstGeom>
-          <a:noFill/>
-          <a:ln/>
-        </p:spPr>
-        <p:txBody>
-          <a:bodyPr wrap="square" lIns="0" tIns="0" rIns="0" bIns="0" rtlCol="0" anchor="ctr"/>
-          <a:lstStyle/>
-          <a:p>
-            <a:pPr algn="ctr" indent="0" marL="0">
-              <a:buNone/>
-            </a:pPr>
-            <a:r>
-              <a:rPr lang="en-US" sz="3600" b="1" dirty="0">
-                <a:solidFill>
-                  <a:srgbClr val="990011"/>
-                </a:solidFill>
-                <a:latin typeface="Times New Roman" pitchFamily="34" charset="0"/>
-                <a:ea typeface="Times New Roman" pitchFamily="34" charset="-122"/>
-                <a:cs typeface="Times New Roman" pitchFamily="34" charset="-120"/>
-              </a:rPr>
-              <a:t>Activity 1</a:t>
-            </a:r>
-            <a:endParaRPr lang="en-US" sz="3600" dirty="0"/>
           </a:p>
         </p:txBody>
       </p:sp>
       <p:pic>
         <p:nvPicPr>
-          <p:cNvPr id="4" name="Image 0" descr="/home/claude/f4/img/v2/solar_system_big.png">    </p:cNvPr>
+          <p:cNvPr id="3" name="Image 0" descr="/home/claude/f4/img/minesec_sheet.png">    </p:cNvPr>
           <p:cNvPicPr>
             <a:picLocks noChangeAspect="1"/>
           </p:cNvPicPr>
@@ -8300,8 +9062,8 @@
         </p:blipFill>
         <p:spPr>
           <a:xfrm>
-            <a:off x="629930" y="1783080"/>
-            <a:ext cx="10931835" cy="4270248"/>
+            <a:off x="0" y="658368"/>
+            <a:ext cx="5120640" cy="5833872"/>
           </a:xfrm>
           <a:prstGeom prst="rect">
             <a:avLst/>
@@ -8310,14 +9072,14 @@
       </p:pic>
       <p:sp>
         <p:nvSpPr>
-          <p:cNvPr id="5" name="Text 2"/>
+          <p:cNvPr id="4" name="Text 1"/>
           <p:cNvSpPr/>
           <p:nvPr/>
         </p:nvSpPr>
         <p:spPr>
           <a:xfrm>
-            <a:off x="457200" y="6089904"/>
-            <a:ext cx="11277295" cy="347472"/>
+            <a:off x="5349240" y="1005840"/>
+            <a:ext cx="6522415" cy="731520"/>
           </a:xfrm>
           <a:prstGeom prst="rect">
             <a:avLst/>
@@ -8326,24 +9088,68 @@
           <a:ln/>
         </p:spPr>
         <p:txBody>
-          <a:bodyPr wrap="square" lIns="0" tIns="0" rIns="0" bIns="0" rtlCol="0" anchor="ctr"/>
+          <a:bodyPr wrap="square" lIns="0" tIns="0" rIns="0" bIns="0" rtlCol="0" anchor="ctr">
+            <a:normAutofit/>
+          </a:bodyPr>
           <a:lstStyle/>
           <a:p>
             <a:pPr algn="ctr" indent="0" marL="0">
               <a:buNone/>
             </a:pPr>
             <a:r>
-              <a:rPr lang="en-US" sz="1800" i="1" dirty="0">
-                <a:solidFill>
-                  <a:srgbClr val="555555"/>
+              <a:rPr lang="en-US" sz="3600" b="1" dirty="0">
+                <a:solidFill>
+                  <a:srgbClr val="990011"/>
                 </a:solidFill>
                 <a:latin typeface="Times New Roman" pitchFamily="34" charset="0"/>
                 <a:ea typeface="Times New Roman" pitchFamily="34" charset="-122"/>
                 <a:cs typeface="Times New Roman" pitchFamily="34" charset="-120"/>
               </a:rPr>
-              <a:t>The Sun and the eight planets.</a:t>
-            </a:r>
-            <a:endParaRPr lang="en-US" sz="1800" dirty="0"/>
+              <a:t>Justification of the Lesson</a:t>
+            </a:r>
+            <a:endParaRPr lang="en-US" sz="3600" dirty="0"/>
+          </a:p>
+        </p:txBody>
+      </p:sp>
+      <p:sp>
+        <p:nvSpPr>
+          <p:cNvPr id="5" name="Text 2"/>
+          <p:cNvSpPr/>
+          <p:nvPr/>
+        </p:nvSpPr>
+        <p:spPr>
+          <a:xfrm>
+            <a:off x="5349240" y="1783080"/>
+            <a:ext cx="6522415" cy="4663440"/>
+          </a:xfrm>
+          <a:prstGeom prst="rect">
+            <a:avLst/>
+          </a:prstGeom>
+          <a:noFill/>
+          <a:ln/>
+        </p:spPr>
+        <p:txBody>
+          <a:bodyPr wrap="square" lIns="0" tIns="0" rIns="0" bIns="0" rtlCol="0" anchor="t"/>
+          <a:lstStyle/>
+          <a:p>
+            <a:pPr algn="l" indent="0" marL="0">
+              <a:spcAft>
+                <a:spcPts val="800"/>
+              </a:spcAft>
+              <a:buNone/>
+            </a:pPr>
+            <a:r>
+              <a:rPr lang="en-US" sz="4000" dirty="0">
+                <a:solidFill>
+                  <a:srgbClr val="111111"/>
+                </a:solidFill>
+                <a:latin typeface="Times New Roman" pitchFamily="34" charset="0"/>
+                <a:ea typeface="Times New Roman" pitchFamily="34" charset="-122"/>
+                <a:cs typeface="Times New Roman" pitchFamily="34" charset="-120"/>
+              </a:rPr>
+              <a:t>This lesson helps us to know the place of our planet in the universe and its main land and water areas.</a:t>
+            </a:r>
+            <a:endParaRPr lang="en-US" sz="4000" dirty="0"/>
           </a:p>
         </p:txBody>
       </p:sp>
@@ -8459,9 +9265,48 @@
           </a:p>
         </p:txBody>
       </p:sp>
+      <p:sp>
+        <p:nvSpPr>
+          <p:cNvPr id="3" name="Text 1"/>
+          <p:cNvSpPr/>
+          <p:nvPr/>
+        </p:nvSpPr>
+        <p:spPr>
+          <a:xfrm>
+            <a:off x="457200" y="1005840"/>
+            <a:ext cx="11277295" cy="731520"/>
+          </a:xfrm>
+          <a:prstGeom prst="rect">
+            <a:avLst/>
+          </a:prstGeom>
+          <a:noFill/>
+          <a:ln/>
+        </p:spPr>
+        <p:txBody>
+          <a:bodyPr wrap="square" lIns="0" tIns="0" rIns="0" bIns="0" rtlCol="0" anchor="ctr"/>
+          <a:lstStyle/>
+          <a:p>
+            <a:pPr algn="ctr" indent="0" marL="0">
+              <a:buNone/>
+            </a:pPr>
+            <a:r>
+              <a:rPr lang="en-US" sz="3600" b="1" dirty="0">
+                <a:solidFill>
+                  <a:srgbClr val="990011"/>
+                </a:solidFill>
+                <a:latin typeface="Times New Roman" pitchFamily="34" charset="0"/>
+                <a:ea typeface="Times New Roman" pitchFamily="34" charset="-122"/>
+                <a:cs typeface="Times New Roman" pitchFamily="34" charset="-120"/>
+              </a:rPr>
+              <a:t>Activity 1</a:t>
+            </a:r>
+            <a:endParaRPr lang="en-US" sz="3600" dirty="0"/>
+          </a:p>
+        </p:txBody>
+      </p:sp>
       <p:pic>
         <p:nvPicPr>
-          <p:cNvPr id="3" name="Image 0" descr="/home/claude/f4/img/minesec_sheet.png">    </p:cNvPr>
+          <p:cNvPr id="4" name="Image 0" descr="/home/claude/f4/img/v2/solar_system_big.png">    </p:cNvPr>
           <p:cNvPicPr>
             <a:picLocks noChangeAspect="1"/>
           </p:cNvPicPr>
@@ -8475,8 +9320,8 @@
         </p:blipFill>
         <p:spPr>
           <a:xfrm>
-            <a:off x="0" y="658368"/>
-            <a:ext cx="5120640" cy="5833872"/>
+            <a:off x="629930" y="1783080"/>
+            <a:ext cx="10931835" cy="4270248"/>
           </a:xfrm>
           <a:prstGeom prst="rect">
             <a:avLst/>
@@ -8485,14 +9330,14 @@
       </p:pic>
       <p:sp>
         <p:nvSpPr>
-          <p:cNvPr id="4" name="Text 1"/>
+          <p:cNvPr id="5" name="Text 2"/>
           <p:cNvSpPr/>
           <p:nvPr/>
         </p:nvSpPr>
         <p:spPr>
           <a:xfrm>
-            <a:off x="5349240" y="1005840"/>
-            <a:ext cx="6522415" cy="731520"/>
+            <a:off x="457200" y="6089904"/>
+            <a:ext cx="11277295" cy="347472"/>
           </a:xfrm>
           <a:prstGeom prst="rect">
             <a:avLst/>
@@ -8501,68 +9346,24 @@
           <a:ln/>
         </p:spPr>
         <p:txBody>
-          <a:bodyPr wrap="square" lIns="0" tIns="0" rIns="0" bIns="0" rtlCol="0" anchor="ctr">
-            <a:normAutofit/>
-          </a:bodyPr>
+          <a:bodyPr wrap="square" lIns="0" tIns="0" rIns="0" bIns="0" rtlCol="0" anchor="ctr"/>
           <a:lstStyle/>
           <a:p>
             <a:pPr algn="ctr" indent="0" marL="0">
               <a:buNone/>
             </a:pPr>
             <a:r>
-              <a:rPr lang="en-US" sz="3600" b="1" dirty="0">
-                <a:solidFill>
-                  <a:srgbClr val="990011"/>
+              <a:rPr lang="en-US" sz="1800" i="1" dirty="0">
+                <a:solidFill>
+                  <a:srgbClr val="555555"/>
                 </a:solidFill>
                 <a:latin typeface="Times New Roman" pitchFamily="34" charset="0"/>
                 <a:ea typeface="Times New Roman" pitchFamily="34" charset="-122"/>
                 <a:cs typeface="Times New Roman" pitchFamily="34" charset="-120"/>
               </a:rPr>
-              <a:t>Activity 1: Question</a:t>
-            </a:r>
-            <a:endParaRPr lang="en-US" sz="3600" dirty="0"/>
-          </a:p>
-        </p:txBody>
-      </p:sp>
-      <p:sp>
-        <p:nvSpPr>
-          <p:cNvPr id="5" name="Text 2"/>
-          <p:cNvSpPr/>
-          <p:nvPr/>
-        </p:nvSpPr>
-        <p:spPr>
-          <a:xfrm>
-            <a:off x="5349240" y="1783080"/>
-            <a:ext cx="6522415" cy="4663440"/>
-          </a:xfrm>
-          <a:prstGeom prst="rect">
-            <a:avLst/>
-          </a:prstGeom>
-          <a:noFill/>
-          <a:ln/>
-        </p:spPr>
-        <p:txBody>
-          <a:bodyPr wrap="square" lIns="0" tIns="0" rIns="0" bIns="0" rtlCol="0" anchor="t"/>
-          <a:lstStyle/>
-          <a:p>
-            <a:pPr algn="l" indent="0" marL="0">
-              <a:spcAft>
-                <a:spcPts val="800"/>
-              </a:spcAft>
-              <a:buNone/>
-            </a:pPr>
-            <a:r>
-              <a:rPr lang="en-US" sz="4000" dirty="0">
-                <a:solidFill>
-                  <a:srgbClr val="111111"/>
-                </a:solidFill>
-                <a:latin typeface="Times New Roman" pitchFamily="34" charset="0"/>
-                <a:ea typeface="Times New Roman" pitchFamily="34" charset="-122"/>
-                <a:cs typeface="Times New Roman" pitchFamily="34" charset="-120"/>
-              </a:rPr>
-              <a:t>What is the position of the Earth from the Sun? How many planets are there?</a:t>
-            </a:r>
-            <a:endParaRPr lang="en-US" sz="4000" dirty="0"/>
+              <a:t>The Sun and the planets.</a:t>
+            </a:r>
+            <a:endParaRPr lang="en-US" sz="1800" dirty="0"/>
           </a:p>
         </p:txBody>
       </p:sp>
@@ -9332,7 +10133,7 @@
                 <a:ea typeface="Times New Roman" pitchFamily="34" charset="-122"/>
                 <a:cs typeface="Times New Roman" pitchFamily="34" charset="-120"/>
               </a:rPr>
-              <a:t>Activity 1: Answer</a:t>
+              <a:t>Activity 1: Question 1</a:t>
             </a:r>
             <a:endParaRPr lang="en-US" sz="3600" dirty="0"/>
           </a:p>
@@ -9374,7 +10175,7 @@
                 <a:ea typeface="Times New Roman" pitchFamily="34" charset="-122"/>
                 <a:cs typeface="Times New Roman" pitchFamily="34" charset="-120"/>
               </a:rPr>
-              <a:t>The Earth is the third planet from the Sun. There are eight planets.</a:t>
+              <a:t>How many planets move around the Sun?</a:t>
             </a:r>
             <a:endParaRPr lang="en-US" sz="4000" dirty="0"/>
           </a:p>
@@ -9486,54 +10287,15 @@
                 <a:ea typeface="Calibri" pitchFamily="34" charset="-122"/>
                 <a:cs typeface="Calibri" pitchFamily="34" charset="-120"/>
               </a:rPr>
-              <a:t>2. SHAPE AND DIMENSIONS</a:t>
+              <a:t>1. THE EARTH IN THE SOLAR SYSTEM</a:t>
             </a:r>
             <a:endParaRPr lang="en-US" sz="1400" dirty="0"/>
-          </a:p>
-        </p:txBody>
-      </p:sp>
-      <p:sp>
-        <p:nvSpPr>
-          <p:cNvPr id="3" name="Text 1"/>
-          <p:cNvSpPr/>
-          <p:nvPr/>
-        </p:nvSpPr>
-        <p:spPr>
-          <a:xfrm>
-            <a:off x="457200" y="1005840"/>
-            <a:ext cx="11277295" cy="731520"/>
-          </a:xfrm>
-          <a:prstGeom prst="rect">
-            <a:avLst/>
-          </a:prstGeom>
-          <a:noFill/>
-          <a:ln/>
-        </p:spPr>
-        <p:txBody>
-          <a:bodyPr wrap="square" lIns="0" tIns="0" rIns="0" bIns="0" rtlCol="0" anchor="ctr"/>
-          <a:lstStyle/>
-          <a:p>
-            <a:pPr algn="ctr" indent="0" marL="0">
-              <a:buNone/>
-            </a:pPr>
-            <a:r>
-              <a:rPr lang="en-US" sz="3600" b="1" dirty="0">
-                <a:solidFill>
-                  <a:srgbClr val="990011"/>
-                </a:solidFill>
-                <a:latin typeface="Times New Roman" pitchFamily="34" charset="0"/>
-                <a:ea typeface="Times New Roman" pitchFamily="34" charset="-122"/>
-                <a:cs typeface="Times New Roman" pitchFamily="34" charset="-120"/>
-              </a:rPr>
-              <a:t>Activity 2</a:t>
-            </a:r>
-            <a:endParaRPr lang="en-US" sz="3600" dirty="0"/>
           </a:p>
         </p:txBody>
       </p:sp>
       <p:pic>
         <p:nvPicPr>
-          <p:cNvPr id="4" name="Image 0" descr="/home/claude/f4/img/v2/f4_earth_space.jpg">    </p:cNvPr>
+          <p:cNvPr id="3" name="Image 0" descr="/home/claude/f4/img/minesec_sheet.png">    </p:cNvPr>
           <p:cNvPicPr>
             <a:picLocks noChangeAspect="1"/>
           </p:cNvPicPr>
@@ -9547,8 +10309,8 @@
         </p:blipFill>
         <p:spPr>
           <a:xfrm>
-            <a:off x="2300072" y="1783080"/>
-            <a:ext cx="7591552" cy="4270248"/>
+            <a:off x="0" y="658368"/>
+            <a:ext cx="5120640" cy="5833872"/>
           </a:xfrm>
           <a:prstGeom prst="rect">
             <a:avLst/>
@@ -9557,14 +10319,14 @@
       </p:pic>
       <p:sp>
         <p:nvSpPr>
-          <p:cNvPr id="5" name="Text 2"/>
+          <p:cNvPr id="4" name="Text 1"/>
           <p:cNvSpPr/>
           <p:nvPr/>
         </p:nvSpPr>
         <p:spPr>
           <a:xfrm>
-            <a:off x="457200" y="6089904"/>
-            <a:ext cx="11277295" cy="347472"/>
+            <a:off x="5349240" y="1005840"/>
+            <a:ext cx="6522415" cy="731520"/>
           </a:xfrm>
           <a:prstGeom prst="rect">
             <a:avLst/>
@@ -9573,24 +10335,68 @@
           <a:ln/>
         </p:spPr>
         <p:txBody>
-          <a:bodyPr wrap="square" lIns="0" tIns="0" rIns="0" bIns="0" rtlCol="0" anchor="ctr"/>
+          <a:bodyPr wrap="square" lIns="0" tIns="0" rIns="0" bIns="0" rtlCol="0" anchor="ctr">
+            <a:normAutofit/>
+          </a:bodyPr>
           <a:lstStyle/>
           <a:p>
             <a:pPr algn="ctr" indent="0" marL="0">
               <a:buNone/>
             </a:pPr>
             <a:r>
-              <a:rPr lang="en-US" sz="1800" i="1" dirty="0">
-                <a:solidFill>
-                  <a:srgbClr val="555555"/>
+              <a:rPr lang="en-US" sz="3600" b="1" dirty="0">
+                <a:solidFill>
+                  <a:srgbClr val="990011"/>
                 </a:solidFill>
                 <a:latin typeface="Times New Roman" pitchFamily="34" charset="0"/>
                 <a:ea typeface="Times New Roman" pitchFamily="34" charset="-122"/>
                 <a:cs typeface="Times New Roman" pitchFamily="34" charset="-120"/>
               </a:rPr>
-              <a:t>The Earth seen from space.</a:t>
-            </a:r>
-            <a:endParaRPr lang="en-US" sz="1800" dirty="0"/>
+              <a:t>Activity 1: Answer 1</a:t>
+            </a:r>
+            <a:endParaRPr lang="en-US" sz="3600" dirty="0"/>
+          </a:p>
+        </p:txBody>
+      </p:sp>
+      <p:sp>
+        <p:nvSpPr>
+          <p:cNvPr id="5" name="Text 2"/>
+          <p:cNvSpPr/>
+          <p:nvPr/>
+        </p:nvSpPr>
+        <p:spPr>
+          <a:xfrm>
+            <a:off x="5349240" y="1783080"/>
+            <a:ext cx="6522415" cy="4663440"/>
+          </a:xfrm>
+          <a:prstGeom prst="rect">
+            <a:avLst/>
+          </a:prstGeom>
+          <a:noFill/>
+          <a:ln/>
+        </p:spPr>
+        <p:txBody>
+          <a:bodyPr wrap="square" lIns="0" tIns="0" rIns="0" bIns="0" rtlCol="0" anchor="t"/>
+          <a:lstStyle/>
+          <a:p>
+            <a:pPr algn="l" indent="0" marL="0">
+              <a:spcAft>
+                <a:spcPts val="800"/>
+              </a:spcAft>
+              <a:buNone/>
+            </a:pPr>
+            <a:r>
+              <a:rPr lang="en-US" sz="4000" dirty="0">
+                <a:solidFill>
+                  <a:srgbClr val="111111"/>
+                </a:solidFill>
+                <a:latin typeface="Times New Roman" pitchFamily="34" charset="0"/>
+                <a:ea typeface="Times New Roman" pitchFamily="34" charset="-122"/>
+                <a:cs typeface="Times New Roman" pitchFamily="34" charset="-120"/>
+              </a:rPr>
+              <a:t>Eight planets move around the Sun.</a:t>
+            </a:r>
+            <a:endParaRPr lang="en-US" sz="4000" dirty="0"/>
           </a:p>
         </p:txBody>
       </p:sp>
@@ -9700,7 +10506,7 @@
                 <a:ea typeface="Calibri" pitchFamily="34" charset="-122"/>
                 <a:cs typeface="Calibri" pitchFamily="34" charset="-120"/>
               </a:rPr>
-              <a:t>2. SHAPE AND DIMENSIONS</a:t>
+              <a:t>1. THE EARTH IN THE SOLAR SYSTEM</a:t>
             </a:r>
             <a:endParaRPr lang="en-US" sz="1400" dirty="0"/>
           </a:p>
@@ -9765,7 +10571,7 @@
                 <a:ea typeface="Times New Roman" pitchFamily="34" charset="-122"/>
                 <a:cs typeface="Times New Roman" pitchFamily="34" charset="-120"/>
               </a:rPr>
-              <a:t>Activity 2: Question</a:t>
+              <a:t>Activity 1: Question 2</a:t>
             </a:r>
             <a:endParaRPr lang="en-US" sz="3600" dirty="0"/>
           </a:p>
@@ -9807,7 +10613,7 @@
                 <a:ea typeface="Times New Roman" pitchFamily="34" charset="-122"/>
                 <a:cs typeface="Times New Roman" pitchFamily="34" charset="-120"/>
               </a:rPr>
-              <a:t>What is the shape of the Earth?</a:t>
+              <a:t>What is the position of the Earth from the Sun?</a:t>
             </a:r>
             <a:endParaRPr lang="en-US" sz="4000" dirty="0"/>
           </a:p>
@@ -9919,7 +10725,7 @@
                 <a:ea typeface="Calibri" pitchFamily="34" charset="-122"/>
                 <a:cs typeface="Calibri" pitchFamily="34" charset="-120"/>
               </a:rPr>
-              <a:t>2. SHAPE AND DIMENSIONS</a:t>
+              <a:t>1. THE EARTH IN THE SOLAR SYSTEM</a:t>
             </a:r>
             <a:endParaRPr lang="en-US" sz="1400" dirty="0"/>
           </a:p>
@@ -9984,7 +10790,7 @@
                 <a:ea typeface="Times New Roman" pitchFamily="34" charset="-122"/>
                 <a:cs typeface="Times New Roman" pitchFamily="34" charset="-120"/>
               </a:rPr>
-              <a:t>Activity 2: Answer</a:t>
+              <a:t>Activity 1: Answer 2</a:t>
             </a:r>
             <a:endParaRPr lang="en-US" sz="3600" dirty="0"/>
           </a:p>
@@ -10026,7 +10832,7 @@
                 <a:ea typeface="Times New Roman" pitchFamily="34" charset="-122"/>
                 <a:cs typeface="Times New Roman" pitchFamily="34" charset="-120"/>
               </a:rPr>
-              <a:t>It is round like a ball, slightly flat at the poles (a sphere).</a:t>
+              <a:t>The Earth is the third planet from the Sun.</a:t>
             </a:r>
             <a:endParaRPr lang="en-US" sz="4000" dirty="0"/>
           </a:p>
@@ -10138,7 +10944,7 @@
                 <a:ea typeface="Calibri" pitchFamily="34" charset="-122"/>
                 <a:cs typeface="Calibri" pitchFamily="34" charset="-120"/>
               </a:rPr>
-              <a:t>2. LOCATIONAL REFERENCES</a:t>
+              <a:t>2. SHAPE AND DIMENSIONS</a:t>
             </a:r>
             <a:endParaRPr lang="en-US" sz="1400" dirty="0"/>
           </a:p>
@@ -10177,7 +10983,7 @@
                 <a:ea typeface="Times New Roman" pitchFamily="34" charset="-122"/>
                 <a:cs typeface="Times New Roman" pitchFamily="34" charset="-120"/>
               </a:rPr>
-              <a:t>Activity 3</a:t>
+              <a:t>Activity 2</a:t>
             </a:r>
             <a:endParaRPr lang="en-US" sz="3600" dirty="0"/>
           </a:p>
@@ -10185,7 +10991,7 @@
       </p:sp>
       <p:pic>
         <p:nvPicPr>
-          <p:cNvPr id="4" name="Image 0" descr="/home/claude/f4/img/v2/latitudes_big.png">    </p:cNvPr>
+          <p:cNvPr id="4" name="Image 0" descr="/home/claude/f4/img/v2/f4_earth_space.jpg">    </p:cNvPr>
           <p:cNvPicPr>
             <a:picLocks noChangeAspect="1"/>
           </p:cNvPicPr>
@@ -10199,8 +11005,8 @@
         </p:blipFill>
         <p:spPr>
           <a:xfrm>
-            <a:off x="629930" y="1783080"/>
-            <a:ext cx="10931835" cy="4270248"/>
+            <a:off x="2300072" y="1783080"/>
+            <a:ext cx="7591552" cy="4270248"/>
           </a:xfrm>
           <a:prstGeom prst="rect">
             <a:avLst/>
@@ -10240,7 +11046,7 @@
                 <a:ea typeface="Times New Roman" pitchFamily="34" charset="-122"/>
                 <a:cs typeface="Times New Roman" pitchFamily="34" charset="-120"/>
               </a:rPr>
-              <a:t>The main lines of latitude.</a:t>
+              <a:t>The Earth seen from space.</a:t>
             </a:r>
             <a:endParaRPr lang="en-US" sz="1800" dirty="0"/>
           </a:p>
@@ -10352,7 +11158,7 @@
                 <a:ea typeface="Calibri" pitchFamily="34" charset="-122"/>
                 <a:cs typeface="Calibri" pitchFamily="34" charset="-120"/>
               </a:rPr>
-              <a:t>2. LOCATIONAL REFERENCES</a:t>
+              <a:t>2. SHAPE AND DIMENSIONS</a:t>
             </a:r>
             <a:endParaRPr lang="en-US" sz="1400" dirty="0"/>
           </a:p>
@@ -10417,7 +11223,7 @@
                 <a:ea typeface="Times New Roman" pitchFamily="34" charset="-122"/>
                 <a:cs typeface="Times New Roman" pitchFamily="34" charset="-120"/>
               </a:rPr>
-              <a:t>Activity 3: Question</a:t>
+              <a:t>Activity 2: Question</a:t>
             </a:r>
             <a:endParaRPr lang="en-US" sz="3600" dirty="0"/>
           </a:p>
@@ -10459,7 +11265,7 @@
                 <a:ea typeface="Times New Roman" pitchFamily="34" charset="-122"/>
                 <a:cs typeface="Times New Roman" pitchFamily="34" charset="-120"/>
               </a:rPr>
-              <a:t>Which imaginary line divides the Earth into a northern and a southern half?</a:t>
+              <a:t>What is the shape of the Earth?</a:t>
             </a:r>
             <a:endParaRPr lang="en-US" sz="4000" dirty="0"/>
           </a:p>
@@ -10571,7 +11377,7 @@
                 <a:ea typeface="Calibri" pitchFamily="34" charset="-122"/>
                 <a:cs typeface="Calibri" pitchFamily="34" charset="-120"/>
               </a:rPr>
-              <a:t>2. LOCATIONAL REFERENCES</a:t>
+              <a:t>2. SHAPE AND DIMENSIONS</a:t>
             </a:r>
             <a:endParaRPr lang="en-US" sz="1400" dirty="0"/>
           </a:p>
@@ -10636,7 +11442,7 @@
                 <a:ea typeface="Times New Roman" pitchFamily="34" charset="-122"/>
                 <a:cs typeface="Times New Roman" pitchFamily="34" charset="-120"/>
               </a:rPr>
-              <a:t>Activity 3: Answer</a:t>
+              <a:t>Activity 2: Answer</a:t>
             </a:r>
             <a:endParaRPr lang="en-US" sz="3600" dirty="0"/>
           </a:p>
@@ -10678,7 +11484,7 @@
                 <a:ea typeface="Times New Roman" pitchFamily="34" charset="-122"/>
                 <a:cs typeface="Times New Roman" pitchFamily="34" charset="-120"/>
               </a:rPr>
-              <a:t>The Equator (0° latitude).</a:t>
+              <a:t>It is round like a ball, slightly flat at the poles.</a:t>
             </a:r>
             <a:endParaRPr lang="en-US" sz="4000" dirty="0"/>
           </a:p>
@@ -10790,7 +11596,7 @@
                 <a:ea typeface="Calibri" pitchFamily="34" charset="-122"/>
                 <a:cs typeface="Calibri" pitchFamily="34" charset="-120"/>
               </a:rPr>
-              <a:t>3. LANDMASSES AND WATER BODIES</a:t>
+              <a:t>2. LOCATIONAL REFERENCES</a:t>
             </a:r>
             <a:endParaRPr lang="en-US" sz="1400" dirty="0"/>
           </a:p>
@@ -10829,7 +11635,7 @@
                 <a:ea typeface="Times New Roman" pitchFamily="34" charset="-122"/>
                 <a:cs typeface="Times New Roman" pitchFamily="34" charset="-120"/>
               </a:rPr>
-              <a:t>Activity 4</a:t>
+              <a:t>Activity 3</a:t>
             </a:r>
             <a:endParaRPr lang="en-US" sz="3600" dirty="0"/>
           </a:p>
@@ -10837,7 +11643,7 @@
       </p:sp>
       <p:pic>
         <p:nvPicPr>
-          <p:cNvPr id="4" name="Image 0" descr="/home/claude/f4/img/v2/continents_oceans_big.png">    </p:cNvPr>
+          <p:cNvPr id="4" name="Image 0" descr="/home/claude/f4/img/v2/latitudes_big.png">    </p:cNvPr>
           <p:cNvPicPr>
             <a:picLocks noChangeAspect="1"/>
           </p:cNvPicPr>
@@ -10851,8 +11657,8 @@
         </p:blipFill>
         <p:spPr>
           <a:xfrm>
-            <a:off x="1034813" y="1783080"/>
-            <a:ext cx="10122069" cy="4270248"/>
+            <a:off x="629930" y="1783080"/>
+            <a:ext cx="10931835" cy="4270248"/>
           </a:xfrm>
           <a:prstGeom prst="rect">
             <a:avLst/>
@@ -10892,7 +11698,7 @@
                 <a:ea typeface="Times New Roman" pitchFamily="34" charset="-122"/>
                 <a:cs typeface="Times New Roman" pitchFamily="34" charset="-120"/>
               </a:rPr>
-              <a:t>The continents and oceans.</a:t>
+              <a:t>Imaginary lines on the Earth.</a:t>
             </a:r>
             <a:endParaRPr lang="en-US" sz="1800" dirty="0"/>
           </a:p>
@@ -11004,7 +11810,7 @@
                 <a:ea typeface="Calibri" pitchFamily="34" charset="-122"/>
                 <a:cs typeface="Calibri" pitchFamily="34" charset="-120"/>
               </a:rPr>
-              <a:t>3. LANDMASSES AND WATER BODIES</a:t>
+              <a:t>2. LOCATIONAL REFERENCES</a:t>
             </a:r>
             <a:endParaRPr lang="en-US" sz="1400" dirty="0"/>
           </a:p>
@@ -11069,7 +11875,7 @@
                 <a:ea typeface="Times New Roman" pitchFamily="34" charset="-122"/>
                 <a:cs typeface="Times New Roman" pitchFamily="34" charset="-120"/>
               </a:rPr>
-              <a:t>Activity 4: Question</a:t>
+              <a:t>Activity 3: Question</a:t>
             </a:r>
             <a:endParaRPr lang="en-US" sz="3600" dirty="0"/>
           </a:p>
@@ -11111,7 +11917,7 @@
                 <a:ea typeface="Times New Roman" pitchFamily="34" charset="-122"/>
                 <a:cs typeface="Times New Roman" pitchFamily="34" charset="-120"/>
               </a:rPr>
-              <a:t>Name four continents and three oceans.</a:t>
+              <a:t>Which imaginary line divides the Earth into a northern half and a southern half?</a:t>
             </a:r>
             <a:endParaRPr lang="en-US" sz="4000" dirty="0"/>
           </a:p>
@@ -11223,7 +12029,7 @@
                 <a:ea typeface="Calibri" pitchFamily="34" charset="-122"/>
                 <a:cs typeface="Calibri" pitchFamily="34" charset="-120"/>
               </a:rPr>
-              <a:t>3. LANDMASSES AND WATER BODIES</a:t>
+              <a:t>2. LOCATIONAL REFERENCES</a:t>
             </a:r>
             <a:endParaRPr lang="en-US" sz="1400" dirty="0"/>
           </a:p>
@@ -11288,7 +12094,7 @@
                 <a:ea typeface="Times New Roman" pitchFamily="34" charset="-122"/>
                 <a:cs typeface="Times New Roman" pitchFamily="34" charset="-120"/>
               </a:rPr>
-              <a:t>Activity 4: Answer</a:t>
+              <a:t>Activity 3: Answer</a:t>
             </a:r>
             <a:endParaRPr lang="en-US" sz="3600" dirty="0"/>
           </a:p>
@@ -11330,7 +12136,7 @@
                 <a:ea typeface="Times New Roman" pitchFamily="34" charset="-122"/>
                 <a:cs typeface="Times New Roman" pitchFamily="34" charset="-120"/>
               </a:rPr>
-              <a:t>Africa, Asia, Europe, America (also Australia, Antarctica); the Pacific, the Atlantic and the Indian Ocean.</a:t>
+              <a:t>The Equator (latitude 0°).</a:t>
             </a:r>
             <a:endParaRPr lang="en-US" sz="4000" dirty="0"/>
           </a:p>
@@ -12013,7 +12819,7 @@
                           <a:ea typeface="Calibri" pitchFamily="34" charset="-122"/>
                           <a:cs typeface="Calibri" pitchFamily="34" charset="-120"/>
                         </a:rPr>
-                        <a:t>Universe, solar system, planet, latitude, longitude, continent, ocean.</a:t>
+                        <a:t>Universe, solar system, geographical coordinates, latitudes, longitudes.</a:t>
                       </a:r>
                       <a:endParaRPr lang="en-US" sz="1700" dirty="0">
                         <a:latin typeface="Calibri" charset="0"/>
@@ -12151,7 +12957,7 @@
                           <a:ea typeface="Calibri" pitchFamily="34" charset="-122"/>
                           <a:cs typeface="Calibri" pitchFamily="34" charset="-120"/>
                         </a:rPr>
-                        <a:t>The Earth in the solar system; shape, dimensions and locational references; distribution of landmasses and water bodies.</a:t>
+                        <a:t>The Earth in the solar system; shape, dimensions and locational references; distribution of the landmasses and water bodies.</a:t>
                       </a:r>
                       <a:endParaRPr lang="en-US" sz="1700" dirty="0">
                         <a:latin typeface="Calibri" charset="0"/>
@@ -12490,7 +13296,7 @@
                 <a:ea typeface="Times New Roman" pitchFamily="34" charset="-122"/>
                 <a:cs typeface="Times New Roman" pitchFamily="34" charset="-120"/>
               </a:rPr>
-              <a:t>Activity 5</a:t>
+              <a:t>Activity 4</a:t>
             </a:r>
             <a:endParaRPr lang="en-US" sz="3600" dirty="0"/>
           </a:p>
@@ -12498,7 +13304,7 @@
       </p:sp>
       <p:pic>
         <p:nvPicPr>
-          <p:cNvPr id="4" name="Image 0" descr="/home/claude/f4/img/v2/world_water_big.png">    </p:cNvPr>
+          <p:cNvPr id="4" name="Image 0" descr="/home/claude/f4/img/v2/continents_oceans_big.png">    </p:cNvPr>
           <p:cNvPicPr>
             <a:picLocks noChangeAspect="1"/>
           </p:cNvPicPr>
@@ -12512,8 +13318,8 @@
         </p:blipFill>
         <p:spPr>
           <a:xfrm>
-            <a:off x="629930" y="1783080"/>
-            <a:ext cx="10931835" cy="4270248"/>
+            <a:off x="1034813" y="1783080"/>
+            <a:ext cx="10122069" cy="4270248"/>
           </a:xfrm>
           <a:prstGeom prst="rect">
             <a:avLst/>
@@ -12553,7 +13359,7 @@
                 <a:ea typeface="Times New Roman" pitchFamily="34" charset="-122"/>
                 <a:cs typeface="Times New Roman" pitchFamily="34" charset="-120"/>
               </a:rPr>
-              <a:t>Water on the Earth.</a:t>
+              <a:t>The land and water of the Earth.</a:t>
             </a:r>
             <a:endParaRPr lang="en-US" sz="1800" dirty="0"/>
           </a:p>
@@ -12730,7 +13536,7 @@
                 <a:ea typeface="Times New Roman" pitchFamily="34" charset="-122"/>
                 <a:cs typeface="Times New Roman" pitchFamily="34" charset="-120"/>
               </a:rPr>
-              <a:t>Activity 5: Question</a:t>
+              <a:t>Activity 4: Question</a:t>
             </a:r>
             <a:endParaRPr lang="en-US" sz="3600" dirty="0"/>
           </a:p>
@@ -12772,7 +13578,7 @@
                 <a:ea typeface="Times New Roman" pitchFamily="34" charset="-122"/>
                 <a:cs typeface="Times New Roman" pitchFamily="34" charset="-120"/>
               </a:rPr>
-              <a:t>Which covers more of the Earth: land or water?</a:t>
+              <a:t>Name the continent on which Cameroon is found and two oceans around it.</a:t>
             </a:r>
             <a:endParaRPr lang="en-US" sz="4000" dirty="0"/>
           </a:p>
@@ -12949,7 +13755,7 @@
                 <a:ea typeface="Times New Roman" pitchFamily="34" charset="-122"/>
                 <a:cs typeface="Times New Roman" pitchFamily="34" charset="-120"/>
               </a:rPr>
-              <a:t>Activity 5: Answer</a:t>
+              <a:t>Activity 4: Answer</a:t>
             </a:r>
             <a:endParaRPr lang="en-US" sz="3600" dirty="0"/>
           </a:p>
@@ -12991,7 +13797,7 @@
                 <a:ea typeface="Times New Roman" pitchFamily="34" charset="-122"/>
                 <a:cs typeface="Times New Roman" pitchFamily="34" charset="-120"/>
               </a:rPr>
-              <a:t>Water covers about 71 % of the Earth; land covers only about 29 %.</a:t>
+              <a:t>Africa; the Atlantic Ocean and the Indian Ocean.</a:t>
             </a:r>
             <a:endParaRPr lang="en-US" sz="4000" dirty="0"/>
           </a:p>
@@ -13103,15 +13909,54 @@
                 <a:ea typeface="Calibri" pitchFamily="34" charset="-122"/>
                 <a:cs typeface="Calibri" pitchFamily="34" charset="-120"/>
               </a:rPr>
-              <a:t>BOARD SUMMARY</a:t>
+              <a:t>3. LANDMASSES AND WATER BODIES</a:t>
             </a:r>
             <a:endParaRPr lang="en-US" sz="1400" dirty="0"/>
+          </a:p>
+        </p:txBody>
+      </p:sp>
+      <p:sp>
+        <p:nvSpPr>
+          <p:cNvPr id="3" name="Text 1"/>
+          <p:cNvSpPr/>
+          <p:nvPr/>
+        </p:nvSpPr>
+        <p:spPr>
+          <a:xfrm>
+            <a:off x="457200" y="1005840"/>
+            <a:ext cx="11277295" cy="731520"/>
+          </a:xfrm>
+          <a:prstGeom prst="rect">
+            <a:avLst/>
+          </a:prstGeom>
+          <a:noFill/>
+          <a:ln/>
+        </p:spPr>
+        <p:txBody>
+          <a:bodyPr wrap="square" lIns="0" tIns="0" rIns="0" bIns="0" rtlCol="0" anchor="ctr"/>
+          <a:lstStyle/>
+          <a:p>
+            <a:pPr algn="ctr" indent="0" marL="0">
+              <a:buNone/>
+            </a:pPr>
+            <a:r>
+              <a:rPr lang="en-US" sz="3600" b="1" dirty="0">
+                <a:solidFill>
+                  <a:srgbClr val="990011"/>
+                </a:solidFill>
+                <a:latin typeface="Times New Roman" pitchFamily="34" charset="0"/>
+                <a:ea typeface="Times New Roman" pitchFamily="34" charset="-122"/>
+                <a:cs typeface="Times New Roman" pitchFamily="34" charset="-120"/>
+              </a:rPr>
+              <a:t>Activity 5</a:t>
+            </a:r>
+            <a:endParaRPr lang="en-US" sz="3600" dirty="0"/>
           </a:p>
         </p:txBody>
       </p:sp>
       <p:pic>
         <p:nvPicPr>
-          <p:cNvPr id="3" name="Image 0" descr="/home/claude/f4/img/minesec_sheet.png">    </p:cNvPr>
+          <p:cNvPr id="4" name="Image 0" descr="/home/claude/f4/img/v2/land_water_big.png">    </p:cNvPr>
           <p:cNvPicPr>
             <a:picLocks noChangeAspect="1"/>
           </p:cNvPicPr>
@@ -13125,8 +13970,8 @@
         </p:blipFill>
         <p:spPr>
           <a:xfrm>
-            <a:off x="0" y="658368"/>
-            <a:ext cx="5120640" cy="5833872"/>
+            <a:off x="840158" y="1783080"/>
+            <a:ext cx="10511380" cy="4270248"/>
           </a:xfrm>
           <a:prstGeom prst="rect">
             <a:avLst/>
@@ -13135,14 +13980,14 @@
       </p:pic>
       <p:sp>
         <p:nvSpPr>
-          <p:cNvPr id="4" name="Text 1"/>
+          <p:cNvPr id="5" name="Text 2"/>
           <p:cNvSpPr/>
           <p:nvPr/>
         </p:nvSpPr>
         <p:spPr>
           <a:xfrm>
-            <a:off x="5349240" y="1005840"/>
-            <a:ext cx="6522415" cy="731520"/>
+            <a:off x="457200" y="6089904"/>
+            <a:ext cx="11277295" cy="347472"/>
           </a:xfrm>
           <a:prstGeom prst="rect">
             <a:avLst/>
@@ -13151,108 +13996,24 @@
           <a:ln/>
         </p:spPr>
         <p:txBody>
-          <a:bodyPr wrap="square" lIns="0" tIns="0" rIns="0" bIns="0" rtlCol="0" anchor="ctr">
-            <a:normAutofit/>
-          </a:bodyPr>
+          <a:bodyPr wrap="square" lIns="0" tIns="0" rIns="0" bIns="0" rtlCol="0" anchor="ctr"/>
           <a:lstStyle/>
           <a:p>
             <a:pPr algn="ctr" indent="0" marL="0">
               <a:buNone/>
             </a:pPr>
             <a:r>
-              <a:rPr lang="en-US" sz="3600" b="1" dirty="0">
-                <a:solidFill>
-                  <a:srgbClr val="990011"/>
+              <a:rPr lang="en-US" sz="1800" i="1" dirty="0">
+                <a:solidFill>
+                  <a:srgbClr val="555555"/>
                 </a:solidFill>
                 <a:latin typeface="Times New Roman" pitchFamily="34" charset="0"/>
                 <a:ea typeface="Times New Roman" pitchFamily="34" charset="-122"/>
                 <a:cs typeface="Times New Roman" pitchFamily="34" charset="-120"/>
               </a:rPr>
-              <a:t>Board Summary</a:t>
-            </a:r>
-            <a:endParaRPr lang="en-US" sz="3600" dirty="0"/>
-          </a:p>
-        </p:txBody>
-      </p:sp>
-      <p:sp>
-        <p:nvSpPr>
-          <p:cNvPr id="5" name="Text 2"/>
-          <p:cNvSpPr/>
-          <p:nvPr/>
-        </p:nvSpPr>
-        <p:spPr>
-          <a:xfrm>
-            <a:off x="5349240" y="1783080"/>
-            <a:ext cx="6522415" cy="4663440"/>
-          </a:xfrm>
-          <a:prstGeom prst="rect">
-            <a:avLst/>
-          </a:prstGeom>
-          <a:noFill/>
-          <a:ln/>
-        </p:spPr>
-        <p:txBody>
-          <a:bodyPr wrap="square" lIns="0" tIns="0" rIns="0" bIns="0" rtlCol="0" anchor="t"/>
-          <a:lstStyle/>
-          <a:p>
-            <a:pPr algn="l" indent="0" marL="0">
-              <a:spcAft>
-                <a:spcPts val="800"/>
-              </a:spcAft>
-              <a:buNone/>
-            </a:pPr>
-            <a:r>
-              <a:rPr lang="en-US" sz="4000" b="1" dirty="0">
-                <a:solidFill>
-                  <a:srgbClr val="111111"/>
-                </a:solidFill>
-                <a:latin typeface="Times New Roman" pitchFamily="34" charset="0"/>
-                <a:ea typeface="Times New Roman" pitchFamily="34" charset="-122"/>
-                <a:cs typeface="Times New Roman" pitchFamily="34" charset="-120"/>
-              </a:rPr>
-              <a:t>Topic: The Earth in the Universe</a:t>
-            </a:r>
-            <a:endParaRPr lang="en-US" sz="4000" dirty="0"/>
-          </a:p>
-          <a:p>
-            <a:pPr algn="l" indent="0" marL="0">
-              <a:spcAft>
-                <a:spcPts val="800"/>
-              </a:spcAft>
-              <a:buNone/>
-            </a:pPr>
-            <a:r>
-              <a:rPr lang="en-US" sz="4000" b="1" dirty="0">
-                <a:solidFill>
-                  <a:srgbClr val="111111"/>
-                </a:solidFill>
-                <a:latin typeface="Times New Roman" pitchFamily="34" charset="0"/>
-                <a:ea typeface="Times New Roman" pitchFamily="34" charset="-122"/>
-                <a:cs typeface="Times New Roman" pitchFamily="34" charset="-120"/>
-              </a:rPr>
-              <a:t>Sub-topic: The Earth: A Planet of the Solar System</a:t>
-            </a:r>
-            <a:endParaRPr lang="en-US" sz="4000" dirty="0"/>
-          </a:p>
-          <a:p>
-            <a:pPr algn="l" indent="0" marL="0">
-              <a:spcAft>
-                <a:spcPts val="800"/>
-              </a:spcAft>
-              <a:buNone/>
-            </a:pPr>
-            <a:r>
-              <a:rPr lang="en-US" sz="4000" b="1" dirty="0">
-                <a:solidFill>
-                  <a:srgbClr val="990011"/>
-                </a:solidFill>
-                <a:latin typeface="Times New Roman" pitchFamily="34" charset="0"/>
-                <a:ea typeface="Times New Roman" pitchFamily="34" charset="-122"/>
-                <a:cs typeface="Times New Roman" pitchFamily="34" charset="-120"/>
-              </a:rPr>
-              <a:t>Lesson 2: Our Planet, the Earth</a:t>
-            </a:r>
-            <a:endParaRPr lang="en-US" sz="4000" dirty="0"/>
+              <a:t>Water and land on the Earth.</a:t>
+            </a:r>
+            <a:endParaRPr lang="en-US" sz="1800" dirty="0"/>
           </a:p>
         </p:txBody>
       </p:sp>
@@ -13362,7 +14123,7 @@
                 <a:ea typeface="Calibri" pitchFamily="34" charset="-122"/>
                 <a:cs typeface="Calibri" pitchFamily="34" charset="-120"/>
               </a:rPr>
-              <a:t>BOARD SUMMARY</a:t>
+              <a:t>3. LANDMASSES AND WATER BODIES</a:t>
             </a:r>
             <a:endParaRPr lang="en-US" sz="1400" dirty="0"/>
           </a:p>
@@ -13385,7 +14146,7 @@
         <p:spPr>
           <a:xfrm>
             <a:off x="0" y="658368"/>
-            <a:ext cx="2468880" cy="5833872"/>
+            <a:ext cx="5120640" cy="5833872"/>
           </a:xfrm>
           <a:prstGeom prst="rect">
             <a:avLst/>
@@ -13400,8 +14161,8 @@
         </p:nvSpPr>
         <p:spPr>
           <a:xfrm>
-            <a:off x="2697480" y="1005840"/>
-            <a:ext cx="9174175" cy="731520"/>
+            <a:off x="5349240" y="1005840"/>
+            <a:ext cx="6522415" cy="731520"/>
           </a:xfrm>
           <a:prstGeom prst="rect">
             <a:avLst/>
@@ -13427,7 +14188,7 @@
                 <a:ea typeface="Times New Roman" pitchFamily="34" charset="-122"/>
                 <a:cs typeface="Times New Roman" pitchFamily="34" charset="-120"/>
               </a:rPr>
-              <a:t>DEFINITIONS</a:t>
+              <a:t>Activity 5: Question</a:t>
             </a:r>
             <a:endParaRPr lang="en-US" sz="3600" dirty="0"/>
           </a:p>
@@ -13441,8 +14202,8 @@
         </p:nvSpPr>
         <p:spPr>
           <a:xfrm>
-            <a:off x="2697480" y="1783080"/>
-            <a:ext cx="9174175" cy="4663440"/>
+            <a:off x="5349240" y="1783080"/>
+            <a:ext cx="6522415" cy="4663440"/>
           </a:xfrm>
           <a:prstGeom prst="rect">
             <a:avLst/>
@@ -13461,7 +14222,7 @@
               <a:buNone/>
             </a:pPr>
             <a:r>
-              <a:rPr lang="en-US" sz="4000" i="1" dirty="0">
+              <a:rPr lang="en-US" sz="4000" dirty="0">
                 <a:solidFill>
                   <a:srgbClr val="111111"/>
                 </a:solidFill>
@@ -13469,81 +14230,7 @@
                 <a:ea typeface="Times New Roman" pitchFamily="34" charset="-122"/>
                 <a:cs typeface="Times New Roman" pitchFamily="34" charset="-120"/>
               </a:rPr>
-              <a:t>The key terms of this lesson are defined as follows:</a:t>
-            </a:r>
-            <a:endParaRPr lang="en-US" sz="4000" dirty="0"/>
-          </a:p>
-          <a:p>
-            <a:pPr algn="l" indent="0" marL="0">
-              <a:spcAft>
-                <a:spcPts val="800"/>
-              </a:spcAft>
-              <a:buNone/>
-            </a:pPr>
-            <a:r>
-              <a:rPr lang="en-US" sz="4000" b="1" dirty="0">
-                <a:solidFill>
-                  <a:srgbClr val="111111"/>
-                </a:solidFill>
-                <a:latin typeface="Times New Roman" pitchFamily="34" charset="0"/>
-                <a:ea typeface="Times New Roman" pitchFamily="34" charset="-122"/>
-                <a:cs typeface="Times New Roman" pitchFamily="34" charset="-120"/>
-              </a:rPr>
-              <a:t>Universe: </a:t>
-            </a:r>
-            <a:pPr algn="l" indent="0" marL="0">
-              <a:spcAft>
-                <a:spcPts val="800"/>
-              </a:spcAft>
-              <a:buNone/>
-            </a:pPr>
-            <a:r>
-              <a:rPr lang="en-US" sz="4000" dirty="0">
-                <a:solidFill>
-                  <a:srgbClr val="111111"/>
-                </a:solidFill>
-                <a:latin typeface="Times New Roman" pitchFamily="34" charset="0"/>
-                <a:ea typeface="Times New Roman" pitchFamily="34" charset="-122"/>
-                <a:cs typeface="Times New Roman" pitchFamily="34" charset="-120"/>
-              </a:rPr>
-              <a:t>It is all of space and everything in it: stars, planets and galaxies.</a:t>
-            </a:r>
-            <a:endParaRPr lang="en-US" sz="4000" dirty="0"/>
-          </a:p>
-          <a:p>
-            <a:pPr algn="l" indent="0" marL="0">
-              <a:spcAft>
-                <a:spcPts val="800"/>
-              </a:spcAft>
-              <a:buNone/>
-            </a:pPr>
-            <a:r>
-              <a:rPr lang="en-US" sz="4000" b="1" dirty="0">
-                <a:solidFill>
-                  <a:srgbClr val="111111"/>
-                </a:solidFill>
-                <a:latin typeface="Times New Roman" pitchFamily="34" charset="0"/>
-                <a:ea typeface="Times New Roman" pitchFamily="34" charset="-122"/>
-                <a:cs typeface="Times New Roman" pitchFamily="34" charset="-120"/>
-              </a:rPr>
-              <a:t>Solar system: </a:t>
-            </a:r>
-            <a:pPr algn="l" indent="0" marL="0">
-              <a:spcAft>
-                <a:spcPts val="800"/>
-              </a:spcAft>
-              <a:buNone/>
-            </a:pPr>
-            <a:r>
-              <a:rPr lang="en-US" sz="4000" dirty="0">
-                <a:solidFill>
-                  <a:srgbClr val="111111"/>
-                </a:solidFill>
-                <a:latin typeface="Times New Roman" pitchFamily="34" charset="0"/>
-                <a:ea typeface="Times New Roman" pitchFamily="34" charset="-122"/>
-                <a:cs typeface="Times New Roman" pitchFamily="34" charset="-120"/>
-              </a:rPr>
-              <a:t>It is the Sun and the eight planets that move around it.</a:t>
+              <a:t>Which covers more of the Earth: land or water?</a:t>
             </a:r>
             <a:endParaRPr lang="en-US" sz="4000" dirty="0"/>
           </a:p>
@@ -13655,7 +14342,7 @@
                 <a:ea typeface="Calibri" pitchFamily="34" charset="-122"/>
                 <a:cs typeface="Calibri" pitchFamily="34" charset="-120"/>
               </a:rPr>
-              <a:t>BOARD SUMMARY</a:t>
+              <a:t>3. LANDMASSES AND WATER BODIES</a:t>
             </a:r>
             <a:endParaRPr lang="en-US" sz="1400" dirty="0"/>
           </a:p>
@@ -13678,7 +14365,7 @@
         <p:spPr>
           <a:xfrm>
             <a:off x="0" y="658368"/>
-            <a:ext cx="3840480" cy="5833872"/>
+            <a:ext cx="5120640" cy="5833872"/>
           </a:xfrm>
           <a:prstGeom prst="rect">
             <a:avLst/>
@@ -13693,8 +14380,8 @@
         </p:nvSpPr>
         <p:spPr>
           <a:xfrm>
-            <a:off x="4069080" y="1005840"/>
-            <a:ext cx="7802575" cy="731520"/>
+            <a:off x="5349240" y="1005840"/>
+            <a:ext cx="6522415" cy="731520"/>
           </a:xfrm>
           <a:prstGeom prst="rect">
             <a:avLst/>
@@ -13720,7 +14407,7 @@
                 <a:ea typeface="Times New Roman" pitchFamily="34" charset="-122"/>
                 <a:cs typeface="Times New Roman" pitchFamily="34" charset="-120"/>
               </a:rPr>
-              <a:t>1. The Earth in the Solar System</a:t>
+              <a:t>Activity 5: Answer</a:t>
             </a:r>
             <a:endParaRPr lang="en-US" sz="3600" dirty="0"/>
           </a:p>
@@ -13734,8 +14421,8 @@
         </p:nvSpPr>
         <p:spPr>
           <a:xfrm>
-            <a:off x="4069080" y="1783080"/>
-            <a:ext cx="7802575" cy="4663440"/>
+            <a:off x="5349240" y="1783080"/>
+            <a:ext cx="6522415" cy="4663440"/>
           </a:xfrm>
           <a:prstGeom prst="rect">
             <a:avLst/>
@@ -13754,7 +14441,7 @@
               <a:buNone/>
             </a:pPr>
             <a:r>
-              <a:rPr lang="en-US" sz="4000" i="1" dirty="0">
+              <a:rPr lang="en-US" sz="4000" dirty="0">
                 <a:solidFill>
                   <a:srgbClr val="111111"/>
                 </a:solidFill>
@@ -13762,81 +14449,7 @@
                 <a:ea typeface="Times New Roman" pitchFamily="34" charset="-122"/>
                 <a:cs typeface="Times New Roman" pitchFamily="34" charset="-120"/>
               </a:rPr>
-              <a:t>The Earth is situated as follows:</a:t>
-            </a:r>
-            <a:endParaRPr lang="en-US" sz="4000" dirty="0"/>
-          </a:p>
-          <a:p>
-            <a:pPr algn="l" indent="0" marL="0">
-              <a:spcAft>
-                <a:spcPts val="800"/>
-              </a:spcAft>
-              <a:buNone/>
-            </a:pPr>
-            <a:r>
-              <a:rPr lang="en-US" sz="4000" b="1" dirty="0">
-                <a:solidFill>
-                  <a:srgbClr val="111111"/>
-                </a:solidFill>
-                <a:latin typeface="Times New Roman" pitchFamily="34" charset="0"/>
-                <a:ea typeface="Times New Roman" pitchFamily="34" charset="-122"/>
-                <a:cs typeface="Times New Roman" pitchFamily="34" charset="-120"/>
-              </a:rPr>
-              <a:t>A planet: </a:t>
-            </a:r>
-            <a:pPr algn="l" indent="0" marL="0">
-              <a:spcAft>
-                <a:spcPts val="800"/>
-              </a:spcAft>
-              <a:buNone/>
-            </a:pPr>
-            <a:r>
-              <a:rPr lang="en-US" sz="4000" dirty="0">
-                <a:solidFill>
-                  <a:srgbClr val="111111"/>
-                </a:solidFill>
-                <a:latin typeface="Times New Roman" pitchFamily="34" charset="0"/>
-                <a:ea typeface="Times New Roman" pitchFamily="34" charset="-122"/>
-                <a:cs typeface="Times New Roman" pitchFamily="34" charset="-120"/>
-              </a:rPr>
-              <a:t>The Earth is the third of eight planets that move around the Sun.</a:t>
-            </a:r>
-            <a:endParaRPr lang="en-US" sz="4000" dirty="0"/>
-          </a:p>
-          <a:p>
-            <a:pPr algn="l" indent="0" marL="0">
-              <a:spcAft>
-                <a:spcPts val="800"/>
-              </a:spcAft>
-              <a:buNone/>
-            </a:pPr>
-            <a:r>
-              <a:rPr lang="en-US" sz="4000" b="1" dirty="0">
-                <a:solidFill>
-                  <a:srgbClr val="111111"/>
-                </a:solidFill>
-                <a:latin typeface="Times New Roman" pitchFamily="34" charset="0"/>
-                <a:ea typeface="Times New Roman" pitchFamily="34" charset="-122"/>
-                <a:cs typeface="Times New Roman" pitchFamily="34" charset="-120"/>
-              </a:rPr>
-              <a:t>Life: </a:t>
-            </a:r>
-            <a:pPr algn="l" indent="0" marL="0">
-              <a:spcAft>
-                <a:spcPts val="800"/>
-              </a:spcAft>
-              <a:buNone/>
-            </a:pPr>
-            <a:r>
-              <a:rPr lang="en-US" sz="4000" dirty="0">
-                <a:solidFill>
-                  <a:srgbClr val="111111"/>
-                </a:solidFill>
-                <a:latin typeface="Times New Roman" pitchFamily="34" charset="0"/>
-                <a:ea typeface="Times New Roman" pitchFamily="34" charset="-122"/>
-                <a:cs typeface="Times New Roman" pitchFamily="34" charset="-120"/>
-              </a:rPr>
-              <a:t>The Earth is the only planet known to have life, water and air to breathe.</a:t>
+              <a:t>Water covers about 71 % of the Earth, and land covers only about 29 %.</a:t>
             </a:r>
             <a:endParaRPr lang="en-US" sz="4000" dirty="0"/>
           </a:p>
@@ -13954,48 +14567,9 @@
           </a:p>
         </p:txBody>
       </p:sp>
-      <p:sp>
-        <p:nvSpPr>
-          <p:cNvPr id="3" name="Text 1"/>
-          <p:cNvSpPr/>
-          <p:nvPr/>
-        </p:nvSpPr>
-        <p:spPr>
-          <a:xfrm>
-            <a:off x="457200" y="1005840"/>
-            <a:ext cx="11277295" cy="731520"/>
-          </a:xfrm>
-          <a:prstGeom prst="rect">
-            <a:avLst/>
-          </a:prstGeom>
-          <a:noFill/>
-          <a:ln/>
-        </p:spPr>
-        <p:txBody>
-          <a:bodyPr wrap="square" lIns="0" tIns="0" rIns="0" bIns="0" rtlCol="0" anchor="ctr"/>
-          <a:lstStyle/>
-          <a:p>
-            <a:pPr algn="ctr" indent="0" marL="0">
-              <a:buNone/>
-            </a:pPr>
-            <a:r>
-              <a:rPr lang="en-US" sz="3600" b="1" dirty="0">
-                <a:solidFill>
-                  <a:srgbClr val="990011"/>
-                </a:solidFill>
-                <a:latin typeface="Times New Roman" pitchFamily="34" charset="0"/>
-                <a:ea typeface="Times New Roman" pitchFamily="34" charset="-122"/>
-                <a:cs typeface="Times New Roman" pitchFamily="34" charset="-120"/>
-              </a:rPr>
-              <a:t>1. The Earth in the Solar System</a:t>
-            </a:r>
-            <a:endParaRPr lang="en-US" sz="3600" dirty="0"/>
-          </a:p>
-        </p:txBody>
-      </p:sp>
       <p:pic>
         <p:nvPicPr>
-          <p:cNvPr id="4" name="Image 0" descr="/home/claude/f4/img/v2/solar_system_big.png">    </p:cNvPr>
+          <p:cNvPr id="3" name="Image 0" descr="/home/claude/f4/img/minesec_sheet.png">    </p:cNvPr>
           <p:cNvPicPr>
             <a:picLocks noChangeAspect="1"/>
           </p:cNvPicPr>
@@ -14009,8 +14583,8 @@
         </p:blipFill>
         <p:spPr>
           <a:xfrm>
-            <a:off x="629930" y="1783080"/>
-            <a:ext cx="10931835" cy="4270248"/>
+            <a:off x="0" y="658368"/>
+            <a:ext cx="5120640" cy="5833872"/>
           </a:xfrm>
           <a:prstGeom prst="rect">
             <a:avLst/>
@@ -14019,14 +14593,14 @@
       </p:pic>
       <p:sp>
         <p:nvSpPr>
-          <p:cNvPr id="5" name="Text 2"/>
+          <p:cNvPr id="4" name="Text 1"/>
           <p:cNvSpPr/>
           <p:nvPr/>
         </p:nvSpPr>
         <p:spPr>
           <a:xfrm>
-            <a:off x="457200" y="6089904"/>
-            <a:ext cx="11277295" cy="347472"/>
+            <a:off x="5349240" y="1005840"/>
+            <a:ext cx="6522415" cy="731520"/>
           </a:xfrm>
           <a:prstGeom prst="rect">
             <a:avLst/>
@@ -14035,24 +14609,108 @@
           <a:ln/>
         </p:spPr>
         <p:txBody>
-          <a:bodyPr wrap="square" lIns="0" tIns="0" rIns="0" bIns="0" rtlCol="0" anchor="ctr"/>
+          <a:bodyPr wrap="square" lIns="0" tIns="0" rIns="0" bIns="0" rtlCol="0" anchor="ctr">
+            <a:normAutofit/>
+          </a:bodyPr>
           <a:lstStyle/>
           <a:p>
             <a:pPr algn="ctr" indent="0" marL="0">
               <a:buNone/>
             </a:pPr>
             <a:r>
-              <a:rPr lang="en-US" sz="1800" i="1" dirty="0">
-                <a:solidFill>
-                  <a:srgbClr val="555555"/>
+              <a:rPr lang="en-US" sz="3600" b="1" dirty="0">
+                <a:solidFill>
+                  <a:srgbClr val="990011"/>
                 </a:solidFill>
                 <a:latin typeface="Times New Roman" pitchFamily="34" charset="0"/>
                 <a:ea typeface="Times New Roman" pitchFamily="34" charset="-122"/>
                 <a:cs typeface="Times New Roman" pitchFamily="34" charset="-120"/>
               </a:rPr>
-              <a:t>Illustration: the solar system</a:t>
-            </a:r>
-            <a:endParaRPr lang="en-US" sz="1800" dirty="0"/>
+              <a:t>Board Summary</a:t>
+            </a:r>
+            <a:endParaRPr lang="en-US" sz="3600" dirty="0"/>
+          </a:p>
+        </p:txBody>
+      </p:sp>
+      <p:sp>
+        <p:nvSpPr>
+          <p:cNvPr id="5" name="Text 2"/>
+          <p:cNvSpPr/>
+          <p:nvPr/>
+        </p:nvSpPr>
+        <p:spPr>
+          <a:xfrm>
+            <a:off x="5349240" y="1783080"/>
+            <a:ext cx="6522415" cy="4663440"/>
+          </a:xfrm>
+          <a:prstGeom prst="rect">
+            <a:avLst/>
+          </a:prstGeom>
+          <a:noFill/>
+          <a:ln/>
+        </p:spPr>
+        <p:txBody>
+          <a:bodyPr wrap="square" lIns="0" tIns="0" rIns="0" bIns="0" rtlCol="0" anchor="t"/>
+          <a:lstStyle/>
+          <a:p>
+            <a:pPr algn="l" indent="0" marL="0">
+              <a:spcAft>
+                <a:spcPts val="800"/>
+              </a:spcAft>
+              <a:buNone/>
+            </a:pPr>
+            <a:r>
+              <a:rPr lang="en-US" sz="4000" b="1" dirty="0">
+                <a:solidFill>
+                  <a:srgbClr val="111111"/>
+                </a:solidFill>
+                <a:latin typeface="Times New Roman" pitchFamily="34" charset="0"/>
+                <a:ea typeface="Times New Roman" pitchFamily="34" charset="-122"/>
+                <a:cs typeface="Times New Roman" pitchFamily="34" charset="-120"/>
+              </a:rPr>
+              <a:t>Topic: The Earth in the Universe</a:t>
+            </a:r>
+            <a:endParaRPr lang="en-US" sz="4000" dirty="0"/>
+          </a:p>
+          <a:p>
+            <a:pPr algn="l" indent="0" marL="0">
+              <a:spcAft>
+                <a:spcPts val="800"/>
+              </a:spcAft>
+              <a:buNone/>
+            </a:pPr>
+            <a:r>
+              <a:rPr lang="en-US" sz="4000" b="1" dirty="0">
+                <a:solidFill>
+                  <a:srgbClr val="111111"/>
+                </a:solidFill>
+                <a:latin typeface="Times New Roman" pitchFamily="34" charset="0"/>
+                <a:ea typeface="Times New Roman" pitchFamily="34" charset="-122"/>
+                <a:cs typeface="Times New Roman" pitchFamily="34" charset="-120"/>
+              </a:rPr>
+              <a:t>Sub-topic: The Earth: A Planet of the Solar System</a:t>
+            </a:r>
+            <a:endParaRPr lang="en-US" sz="4000" dirty="0"/>
+          </a:p>
+          <a:p>
+            <a:pPr algn="l" indent="0" marL="0">
+              <a:spcAft>
+                <a:spcPts val="800"/>
+              </a:spcAft>
+              <a:buNone/>
+            </a:pPr>
+            <a:r>
+              <a:rPr lang="en-US" sz="4000" b="1" dirty="0">
+                <a:solidFill>
+                  <a:srgbClr val="990011"/>
+                </a:solidFill>
+                <a:latin typeface="Times New Roman" pitchFamily="34" charset="0"/>
+                <a:ea typeface="Times New Roman" pitchFamily="34" charset="-122"/>
+                <a:cs typeface="Times New Roman" pitchFamily="34" charset="-120"/>
+              </a:rPr>
+              <a:t>Lesson 2: Our Planet, the Earth</a:t>
+            </a:r>
+            <a:endParaRPr lang="en-US" sz="4000" dirty="0"/>
           </a:p>
         </p:txBody>
       </p:sp>
@@ -14185,7 +14843,7 @@
         <p:spPr>
           <a:xfrm>
             <a:off x="0" y="658368"/>
-            <a:ext cx="3840480" cy="5833872"/>
+            <a:ext cx="1463040" cy="5833872"/>
           </a:xfrm>
           <a:prstGeom prst="rect">
             <a:avLst/>
@@ -14200,8 +14858,8 @@
         </p:nvSpPr>
         <p:spPr>
           <a:xfrm>
-            <a:off x="4069080" y="1005840"/>
-            <a:ext cx="7802575" cy="731520"/>
+            <a:off x="1691640" y="1005840"/>
+            <a:ext cx="10180015" cy="731520"/>
           </a:xfrm>
           <a:prstGeom prst="rect">
             <a:avLst/>
@@ -14227,7 +14885,7 @@
                 <a:ea typeface="Times New Roman" pitchFamily="34" charset="-122"/>
                 <a:cs typeface="Times New Roman" pitchFamily="34" charset="-120"/>
               </a:rPr>
-              <a:t>2. Shape, Dimensions and Locational References</a:t>
+              <a:t>DEFINITIONS</a:t>
             </a:r>
             <a:endParaRPr lang="en-US" sz="3600" dirty="0"/>
           </a:p>
@@ -14241,8 +14899,8 @@
         </p:nvSpPr>
         <p:spPr>
           <a:xfrm>
-            <a:off x="4069080" y="1783080"/>
-            <a:ext cx="7802575" cy="4663440"/>
+            <a:off x="1691640" y="1783080"/>
+            <a:ext cx="10180015" cy="4663440"/>
           </a:xfrm>
           <a:prstGeom prst="rect">
             <a:avLst/>
@@ -14269,7 +14927,7 @@
                 <a:ea typeface="Times New Roman" pitchFamily="34" charset="-122"/>
                 <a:cs typeface="Times New Roman" pitchFamily="34" charset="-120"/>
               </a:rPr>
-              <a:t>The Earth has the following characteristics:</a:t>
+              <a:t>The key terms of this lesson are defined as follows:</a:t>
             </a:r>
             <a:endParaRPr lang="en-US" sz="4000" dirty="0"/>
           </a:p>
@@ -14289,7 +14947,7 @@
                 <a:ea typeface="Times New Roman" pitchFamily="34" charset="-122"/>
                 <a:cs typeface="Times New Roman" pitchFamily="34" charset="-120"/>
               </a:rPr>
-              <a:t>Shape: </a:t>
+              <a:t>Universe: </a:t>
             </a:r>
             <a:pPr algn="l" indent="0" marL="0">
               <a:spcAft>
@@ -14306,7 +14964,7 @@
                 <a:ea typeface="Times New Roman" pitchFamily="34" charset="-122"/>
                 <a:cs typeface="Times New Roman" pitchFamily="34" charset="-120"/>
               </a:rPr>
-              <a:t>The Earth is a sphere slightly flattened at the poles.</a:t>
+              <a:t>It is all of space and everything in it: stars, planets and galaxies.</a:t>
             </a:r>
             <a:endParaRPr lang="en-US" sz="4000" dirty="0"/>
           </a:p>
@@ -14326,7 +14984,7 @@
                 <a:ea typeface="Times New Roman" pitchFamily="34" charset="-122"/>
                 <a:cs typeface="Times New Roman" pitchFamily="34" charset="-120"/>
               </a:rPr>
-              <a:t>Dimensions: </a:t>
+              <a:t>Solar system: </a:t>
             </a:r>
             <a:pPr algn="l" indent="0" marL="0">
               <a:spcAft>
@@ -14343,7 +15001,7 @@
                 <a:ea typeface="Times New Roman" pitchFamily="34" charset="-122"/>
                 <a:cs typeface="Times New Roman" pitchFamily="34" charset="-120"/>
               </a:rPr>
-              <a:t>The distance around the Equator is about 40,000 km and the diameter is about 12,700 km.</a:t>
+              <a:t>It is the Sun and the planets and other bodies that move around it.</a:t>
             </a:r>
             <a:endParaRPr lang="en-US" sz="4000" dirty="0"/>
           </a:p>
@@ -14520,7 +15178,7 @@
                 <a:ea typeface="Times New Roman" pitchFamily="34" charset="-122"/>
                 <a:cs typeface="Times New Roman" pitchFamily="34" charset="-120"/>
               </a:rPr>
-              <a:t>2. Shape, Dimensions and Locational References (continued)</a:t>
+              <a:t>DEFINITIONS (continued)</a:t>
             </a:r>
             <a:endParaRPr lang="en-US" sz="3600" dirty="0"/>
           </a:p>
@@ -14562,7 +15220,7 @@
                 <a:ea typeface="Times New Roman" pitchFamily="34" charset="-122"/>
                 <a:cs typeface="Times New Roman" pitchFamily="34" charset="-120"/>
               </a:rPr>
-              <a:t>Locational references: </a:t>
+              <a:t>Planet: </a:t>
             </a:r>
             <a:pPr algn="l" indent="0" marL="0">
               <a:spcAft>
@@ -14579,7 +15237,7 @@
                 <a:ea typeface="Times New Roman" pitchFamily="34" charset="-122"/>
                 <a:cs typeface="Times New Roman" pitchFamily="34" charset="-120"/>
               </a:rPr>
-              <a:t>Lines of latitude and longitude help us to locate any place on the Earth.</a:t>
+              <a:t>It is a large round body that moves around the Sun.</a:t>
             </a:r>
             <a:endParaRPr lang="en-US" sz="4000" dirty="0"/>
           </a:p>
@@ -14697,9 +15355,129 @@
           </a:p>
         </p:txBody>
       </p:sp>
+      <p:sp>
+        <p:nvSpPr>
+          <p:cNvPr id="3" name="Text 1"/>
+          <p:cNvSpPr/>
+          <p:nvPr/>
+        </p:nvSpPr>
+        <p:spPr>
+          <a:xfrm>
+            <a:off x="365760" y="1005840"/>
+            <a:ext cx="11460175" cy="731520"/>
+          </a:xfrm>
+          <a:prstGeom prst="rect">
+            <a:avLst/>
+          </a:prstGeom>
+          <a:noFill/>
+          <a:ln/>
+        </p:spPr>
+        <p:txBody>
+          <a:bodyPr wrap="square" lIns="0" tIns="0" rIns="0" bIns="0" rtlCol="0" anchor="ctr">
+            <a:normAutofit/>
+          </a:bodyPr>
+          <a:lstStyle/>
+          <a:p>
+            <a:pPr algn="ctr" indent="0" marL="0">
+              <a:buNone/>
+            </a:pPr>
+            <a:r>
+              <a:rPr lang="en-US" sz="3600" b="1" dirty="0">
+                <a:solidFill>
+                  <a:srgbClr val="990011"/>
+                </a:solidFill>
+                <a:latin typeface="Times New Roman" pitchFamily="34" charset="0"/>
+                <a:ea typeface="Times New Roman" pitchFamily="34" charset="-122"/>
+                <a:cs typeface="Times New Roman" pitchFamily="34" charset="-120"/>
+              </a:rPr>
+              <a:t>1. The Earth in the Solar System</a:t>
+            </a:r>
+            <a:endParaRPr lang="en-US" sz="3600" dirty="0"/>
+          </a:p>
+        </p:txBody>
+      </p:sp>
+      <p:sp>
+        <p:nvSpPr>
+          <p:cNvPr id="4" name="Text 2"/>
+          <p:cNvSpPr/>
+          <p:nvPr/>
+        </p:nvSpPr>
+        <p:spPr>
+          <a:xfrm>
+            <a:off x="365760" y="1783080"/>
+            <a:ext cx="4846320" cy="4617720"/>
+          </a:xfrm>
+          <a:prstGeom prst="rect">
+            <a:avLst/>
+          </a:prstGeom>
+          <a:noFill/>
+          <a:ln/>
+        </p:spPr>
+        <p:txBody>
+          <a:bodyPr wrap="square" lIns="0" tIns="0" rIns="0" bIns="0" rtlCol="0" anchor="t"/>
+          <a:lstStyle/>
+          <a:p>
+            <a:pPr algn="l" indent="0" marL="0">
+              <a:spcAft>
+                <a:spcPts val="800"/>
+              </a:spcAft>
+              <a:buNone/>
+            </a:pPr>
+            <a:r>
+              <a:rPr lang="en-US" sz="3600" i="1" dirty="0">
+                <a:solidFill>
+                  <a:srgbClr val="111111"/>
+                </a:solidFill>
+                <a:latin typeface="Times New Roman" pitchFamily="34" charset="0"/>
+                <a:ea typeface="Times New Roman" pitchFamily="34" charset="-122"/>
+                <a:cs typeface="Times New Roman" pitchFamily="34" charset="-120"/>
+              </a:rPr>
+              <a:t>The Earth is situated in the solar system as follows:</a:t>
+            </a:r>
+            <a:endParaRPr lang="en-US" sz="3600" dirty="0"/>
+          </a:p>
+          <a:p>
+            <a:pPr algn="l" indent="0" marL="0">
+              <a:spcAft>
+                <a:spcPts val="800"/>
+              </a:spcAft>
+              <a:buNone/>
+            </a:pPr>
+            <a:r>
+              <a:rPr lang="en-US" sz="3600" b="1" dirty="0">
+                <a:solidFill>
+                  <a:srgbClr val="111111"/>
+                </a:solidFill>
+                <a:latin typeface="Times New Roman" pitchFamily="34" charset="0"/>
+                <a:ea typeface="Times New Roman" pitchFamily="34" charset="-122"/>
+                <a:cs typeface="Times New Roman" pitchFamily="34" charset="-120"/>
+              </a:rPr>
+              <a:t>The Sun: </a:t>
+            </a:r>
+            <a:pPr algn="l" indent="0" marL="0">
+              <a:spcAft>
+                <a:spcPts val="800"/>
+              </a:spcAft>
+              <a:buNone/>
+            </a:pPr>
+            <a:r>
+              <a:rPr lang="en-US" sz="3600" dirty="0">
+                <a:solidFill>
+                  <a:srgbClr val="111111"/>
+                </a:solidFill>
+                <a:latin typeface="Times New Roman" pitchFamily="34" charset="0"/>
+                <a:ea typeface="Times New Roman" pitchFamily="34" charset="-122"/>
+                <a:cs typeface="Times New Roman" pitchFamily="34" charset="-120"/>
+              </a:rPr>
+              <a:t>It is a star at the centre of the solar system. It gives light and heat to the planets.</a:t>
+            </a:r>
+            <a:endParaRPr lang="en-US" sz="3600" dirty="0"/>
+          </a:p>
+        </p:txBody>
+      </p:sp>
       <p:pic>
         <p:nvPicPr>
-          <p:cNvPr id="3" name="Image 0" descr="/home/claude/f4/img/minesec_sheet.png">    </p:cNvPr>
+          <p:cNvPr id="5" name="Image 0" descr="/home/claude/f4/img/v2/lsa_sun.jpg">    </p:cNvPr>
           <p:cNvPicPr>
             <a:picLocks noChangeAspect="1"/>
           </p:cNvPicPr>
@@ -14713,8 +15491,8 @@
         </p:blipFill>
         <p:spPr>
           <a:xfrm>
-            <a:off x="0" y="658368"/>
-            <a:ext cx="1463040" cy="5833872"/>
+            <a:off x="5349240" y="2071212"/>
+            <a:ext cx="6659575" cy="3693983"/>
           </a:xfrm>
           <a:prstGeom prst="rect">
             <a:avLst/>
@@ -14723,14 +15501,14 @@
       </p:pic>
       <p:sp>
         <p:nvSpPr>
-          <p:cNvPr id="4" name="Text 1"/>
+          <p:cNvPr id="6" name="Text 3"/>
           <p:cNvSpPr/>
           <p:nvPr/>
         </p:nvSpPr>
         <p:spPr>
           <a:xfrm>
-            <a:off x="1691640" y="1005840"/>
-            <a:ext cx="10180015" cy="731520"/>
+            <a:off x="5349240" y="6089904"/>
+            <a:ext cx="6659575" cy="347472"/>
           </a:xfrm>
           <a:prstGeom prst="rect">
             <a:avLst/>
@@ -14739,142 +15517,24 @@
           <a:ln/>
         </p:spPr>
         <p:txBody>
-          <a:bodyPr wrap="square" lIns="0" tIns="0" rIns="0" bIns="0" rtlCol="0" anchor="ctr">
-            <a:normAutofit/>
-          </a:bodyPr>
+          <a:bodyPr wrap="square" lIns="0" tIns="0" rIns="0" bIns="0" rtlCol="0" anchor="ctr"/>
           <a:lstStyle/>
           <a:p>
             <a:pPr algn="ctr" indent="0" marL="0">
               <a:buNone/>
             </a:pPr>
             <a:r>
-              <a:rPr lang="en-US" sz="3600" b="1" dirty="0">
-                <a:solidFill>
-                  <a:srgbClr val="990011"/>
+              <a:rPr lang="en-US" sz="1600" i="1" dirty="0">
+                <a:solidFill>
+                  <a:srgbClr val="555555"/>
                 </a:solidFill>
                 <a:latin typeface="Times New Roman" pitchFamily="34" charset="0"/>
                 <a:ea typeface="Times New Roman" pitchFamily="34" charset="-122"/>
                 <a:cs typeface="Times New Roman" pitchFamily="34" charset="-120"/>
               </a:rPr>
-              <a:t>3. Landmasses and Water Bodies</a:t>
-            </a:r>
-            <a:endParaRPr lang="en-US" sz="3600" dirty="0"/>
-          </a:p>
-        </p:txBody>
-      </p:sp>
-      <p:sp>
-        <p:nvSpPr>
-          <p:cNvPr id="5" name="Text 2"/>
-          <p:cNvSpPr/>
-          <p:nvPr/>
-        </p:nvSpPr>
-        <p:spPr>
-          <a:xfrm>
-            <a:off x="1691640" y="1783080"/>
-            <a:ext cx="10180015" cy="4663440"/>
-          </a:xfrm>
-          <a:prstGeom prst="rect">
-            <a:avLst/>
-          </a:prstGeom>
-          <a:noFill/>
-          <a:ln/>
-        </p:spPr>
-        <p:txBody>
-          <a:bodyPr wrap="square" lIns="0" tIns="0" rIns="0" bIns="0" rtlCol="0" anchor="t"/>
-          <a:lstStyle/>
-          <a:p>
-            <a:pPr algn="l" indent="0" marL="0">
-              <a:spcAft>
-                <a:spcPts val="800"/>
-              </a:spcAft>
-              <a:buNone/>
-            </a:pPr>
-            <a:r>
-              <a:rPr lang="en-US" sz="4000" i="1" dirty="0">
-                <a:solidFill>
-                  <a:srgbClr val="111111"/>
-                </a:solidFill>
-                <a:latin typeface="Times New Roman" pitchFamily="34" charset="0"/>
-                <a:ea typeface="Times New Roman" pitchFamily="34" charset="-122"/>
-                <a:cs typeface="Times New Roman" pitchFamily="34" charset="-120"/>
-              </a:rPr>
-              <a:t>The surface of the Earth is shared as follows:</a:t>
-            </a:r>
-            <a:endParaRPr lang="en-US" sz="4000" dirty="0"/>
-          </a:p>
-          <a:p>
-            <a:pPr algn="l" indent="0" marL="0">
-              <a:spcAft>
-                <a:spcPts val="800"/>
-              </a:spcAft>
-              <a:buNone/>
-            </a:pPr>
-            <a:r>
-              <a:rPr lang="en-US" sz="4000" b="1" dirty="0">
-                <a:solidFill>
-                  <a:srgbClr val="111111"/>
-                </a:solidFill>
-                <a:latin typeface="Times New Roman" pitchFamily="34" charset="0"/>
-                <a:ea typeface="Times New Roman" pitchFamily="34" charset="-122"/>
-                <a:cs typeface="Times New Roman" pitchFamily="34" charset="-120"/>
-              </a:rPr>
-              <a:t>Continents: </a:t>
-            </a:r>
-            <a:pPr algn="l" indent="0" marL="0">
-              <a:spcAft>
-                <a:spcPts val="800"/>
-              </a:spcAft>
-              <a:buNone/>
-            </a:pPr>
-            <a:r>
-              <a:rPr lang="en-US" sz="4000" dirty="0">
-                <a:solidFill>
-                  <a:srgbClr val="111111"/>
-                </a:solidFill>
-                <a:latin typeface="Times New Roman" pitchFamily="34" charset="0"/>
-                <a:ea typeface="Times New Roman" pitchFamily="34" charset="-122"/>
-                <a:cs typeface="Times New Roman" pitchFamily="34" charset="-120"/>
-              </a:rPr>
-              <a:t>The seven continents are Africa, Asia, Europe, North America, South America, Australia and Antarctica.</a:t>
-            </a:r>
-            <a:endParaRPr lang="en-US" sz="4000" dirty="0"/>
-          </a:p>
-          <a:p>
-            <a:pPr algn="l" indent="0" marL="0">
-              <a:spcAft>
-                <a:spcPts val="800"/>
-              </a:spcAft>
-              <a:buNone/>
-            </a:pPr>
-            <a:r>
-              <a:rPr lang="en-US" sz="4000" b="1" dirty="0">
-                <a:solidFill>
-                  <a:srgbClr val="111111"/>
-                </a:solidFill>
-                <a:latin typeface="Times New Roman" pitchFamily="34" charset="0"/>
-                <a:ea typeface="Times New Roman" pitchFamily="34" charset="-122"/>
-                <a:cs typeface="Times New Roman" pitchFamily="34" charset="-120"/>
-              </a:rPr>
-              <a:t>Oceans: </a:t>
-            </a:r>
-            <a:pPr algn="l" indent="0" marL="0">
-              <a:spcAft>
-                <a:spcPts val="800"/>
-              </a:spcAft>
-              <a:buNone/>
-            </a:pPr>
-            <a:r>
-              <a:rPr lang="en-US" sz="4000" dirty="0">
-                <a:solidFill>
-                  <a:srgbClr val="111111"/>
-                </a:solidFill>
-                <a:latin typeface="Times New Roman" pitchFamily="34" charset="0"/>
-                <a:ea typeface="Times New Roman" pitchFamily="34" charset="-122"/>
-                <a:cs typeface="Times New Roman" pitchFamily="34" charset="-120"/>
-              </a:rPr>
-              <a:t>The main oceans are the Pacific, the Atlantic, the Indian and the Arctic Oceans.</a:t>
-            </a:r>
-            <a:endParaRPr lang="en-US" sz="4000" dirty="0"/>
+              <a:t>Illustration: the Sun</a:t>
+            </a:r>
+            <a:endParaRPr lang="en-US" sz="1600" dirty="0"/>
           </a:p>
         </p:txBody>
       </p:sp>
@@ -15229,9 +15889,109 @@
           </a:p>
         </p:txBody>
       </p:sp>
+      <p:sp>
+        <p:nvSpPr>
+          <p:cNvPr id="3" name="Text 1"/>
+          <p:cNvSpPr/>
+          <p:nvPr/>
+        </p:nvSpPr>
+        <p:spPr>
+          <a:xfrm>
+            <a:off x="365760" y="1005840"/>
+            <a:ext cx="11460175" cy="731520"/>
+          </a:xfrm>
+          <a:prstGeom prst="rect">
+            <a:avLst/>
+          </a:prstGeom>
+          <a:noFill/>
+          <a:ln/>
+        </p:spPr>
+        <p:txBody>
+          <a:bodyPr wrap="square" lIns="0" tIns="0" rIns="0" bIns="0" rtlCol="0" anchor="ctr">
+            <a:normAutofit/>
+          </a:bodyPr>
+          <a:lstStyle/>
+          <a:p>
+            <a:pPr algn="ctr" indent="0" marL="0">
+              <a:buNone/>
+            </a:pPr>
+            <a:r>
+              <a:rPr lang="en-US" sz="3600" b="1" dirty="0">
+                <a:solidFill>
+                  <a:srgbClr val="990011"/>
+                </a:solidFill>
+                <a:latin typeface="Times New Roman" pitchFamily="34" charset="0"/>
+                <a:ea typeface="Times New Roman" pitchFamily="34" charset="-122"/>
+                <a:cs typeface="Times New Roman" pitchFamily="34" charset="-120"/>
+              </a:rPr>
+              <a:t>1. The Earth in the Solar System</a:t>
+            </a:r>
+            <a:endParaRPr lang="en-US" sz="3600" dirty="0"/>
+          </a:p>
+        </p:txBody>
+      </p:sp>
+      <p:sp>
+        <p:nvSpPr>
+          <p:cNvPr id="4" name="Text 2"/>
+          <p:cNvSpPr/>
+          <p:nvPr/>
+        </p:nvSpPr>
+        <p:spPr>
+          <a:xfrm>
+            <a:off x="365760" y="1783080"/>
+            <a:ext cx="4846320" cy="4617720"/>
+          </a:xfrm>
+          <a:prstGeom prst="rect">
+            <a:avLst/>
+          </a:prstGeom>
+          <a:noFill/>
+          <a:ln/>
+        </p:spPr>
+        <p:txBody>
+          <a:bodyPr wrap="square" lIns="0" tIns="0" rIns="0" bIns="0" rtlCol="0" anchor="t"/>
+          <a:lstStyle/>
+          <a:p>
+            <a:pPr algn="l" indent="0" marL="0">
+              <a:spcAft>
+                <a:spcPts val="800"/>
+              </a:spcAft>
+              <a:buNone/>
+            </a:pPr>
+            <a:r>
+              <a:rPr lang="en-US" sz="3600" b="1" dirty="0">
+                <a:solidFill>
+                  <a:srgbClr val="111111"/>
+                </a:solidFill>
+                <a:latin typeface="Times New Roman" pitchFamily="34" charset="0"/>
+                <a:ea typeface="Times New Roman" pitchFamily="34" charset="-122"/>
+                <a:cs typeface="Times New Roman" pitchFamily="34" charset="-120"/>
+              </a:rPr>
+              <a:t>The planets: </a:t>
+            </a:r>
+            <a:pPr algn="l" indent="0" marL="0">
+              <a:spcAft>
+                <a:spcPts val="800"/>
+              </a:spcAft>
+              <a:buNone/>
+            </a:pPr>
+            <a:r>
+              <a:rPr lang="en-US" sz="3600" dirty="0">
+                <a:solidFill>
+                  <a:srgbClr val="111111"/>
+                </a:solidFill>
+                <a:latin typeface="Times New Roman" pitchFamily="34" charset="0"/>
+                <a:ea typeface="Times New Roman" pitchFamily="34" charset="-122"/>
+                <a:cs typeface="Times New Roman" pitchFamily="34" charset="-120"/>
+              </a:rPr>
+              <a:t>Eight planets move around the Sun: Mercury, Venus, Earth, Mars, Jupiter, Saturn, Uranus and Neptune.</a:t>
+            </a:r>
+            <a:endParaRPr lang="en-US" sz="3600" dirty="0"/>
+          </a:p>
+        </p:txBody>
+      </p:sp>
       <p:pic>
         <p:nvPicPr>
-          <p:cNvPr id="3" name="Image 0" descr="/home/claude/f4/img/minesec_sheet.png">    </p:cNvPr>
+          <p:cNvPr id="5" name="Image 0" descr="/home/claude/f4/img/v2/solar_system_big.png">    </p:cNvPr>
           <p:cNvPicPr>
             <a:picLocks noChangeAspect="1"/>
           </p:cNvPicPr>
@@ -15245,8 +16005,8 @@
         </p:blipFill>
         <p:spPr>
           <a:xfrm>
-            <a:off x="0" y="658368"/>
-            <a:ext cx="5120640" cy="5833872"/>
+            <a:off x="5349240" y="2617506"/>
+            <a:ext cx="6659575" cy="2601397"/>
           </a:xfrm>
           <a:prstGeom prst="rect">
             <a:avLst/>
@@ -15255,14 +16015,14 @@
       </p:pic>
       <p:sp>
         <p:nvSpPr>
-          <p:cNvPr id="4" name="Text 1"/>
+          <p:cNvPr id="6" name="Text 3"/>
           <p:cNvSpPr/>
           <p:nvPr/>
         </p:nvSpPr>
         <p:spPr>
           <a:xfrm>
-            <a:off x="5349240" y="1005840"/>
-            <a:ext cx="6522415" cy="731520"/>
+            <a:off x="5349240" y="6089904"/>
+            <a:ext cx="6659575" cy="347472"/>
           </a:xfrm>
           <a:prstGeom prst="rect">
             <a:avLst/>
@@ -15271,85 +16031,24 @@
           <a:ln/>
         </p:spPr>
         <p:txBody>
-          <a:bodyPr wrap="square" lIns="0" tIns="0" rIns="0" bIns="0" rtlCol="0" anchor="ctr">
-            <a:normAutofit/>
-          </a:bodyPr>
+          <a:bodyPr wrap="square" lIns="0" tIns="0" rIns="0" bIns="0" rtlCol="0" anchor="ctr"/>
           <a:lstStyle/>
           <a:p>
             <a:pPr algn="ctr" indent="0" marL="0">
               <a:buNone/>
             </a:pPr>
             <a:r>
-              <a:rPr lang="en-US" sz="3600" b="1" dirty="0">
-                <a:solidFill>
-                  <a:srgbClr val="990011"/>
+              <a:rPr lang="en-US" sz="1600" i="1" dirty="0">
+                <a:solidFill>
+                  <a:srgbClr val="555555"/>
                 </a:solidFill>
                 <a:latin typeface="Times New Roman" pitchFamily="34" charset="0"/>
                 <a:ea typeface="Times New Roman" pitchFamily="34" charset="-122"/>
                 <a:cs typeface="Times New Roman" pitchFamily="34" charset="-120"/>
               </a:rPr>
-              <a:t>3. Landmasses and Water Bodies (continued)</a:t>
-            </a:r>
-            <a:endParaRPr lang="en-US" sz="3600" dirty="0"/>
-          </a:p>
-        </p:txBody>
-      </p:sp>
-      <p:sp>
-        <p:nvSpPr>
-          <p:cNvPr id="5" name="Text 2"/>
-          <p:cNvSpPr/>
-          <p:nvPr/>
-        </p:nvSpPr>
-        <p:spPr>
-          <a:xfrm>
-            <a:off x="5349240" y="1783080"/>
-            <a:ext cx="6522415" cy="4663440"/>
-          </a:xfrm>
-          <a:prstGeom prst="rect">
-            <a:avLst/>
-          </a:prstGeom>
-          <a:noFill/>
-          <a:ln/>
-        </p:spPr>
-        <p:txBody>
-          <a:bodyPr wrap="square" lIns="0" tIns="0" rIns="0" bIns="0" rtlCol="0" anchor="t"/>
-          <a:lstStyle/>
-          <a:p>
-            <a:pPr algn="l" indent="0" marL="0">
-              <a:spcAft>
-                <a:spcPts val="800"/>
-              </a:spcAft>
-              <a:buNone/>
-            </a:pPr>
-            <a:r>
-              <a:rPr lang="en-US" sz="4000" b="1" dirty="0">
-                <a:solidFill>
-                  <a:srgbClr val="111111"/>
-                </a:solidFill>
-                <a:latin typeface="Times New Roman" pitchFamily="34" charset="0"/>
-                <a:ea typeface="Times New Roman" pitchFamily="34" charset="-122"/>
-                <a:cs typeface="Times New Roman" pitchFamily="34" charset="-120"/>
-              </a:rPr>
-              <a:t>Distribution: </a:t>
-            </a:r>
-            <a:pPr algn="l" indent="0" marL="0">
-              <a:spcAft>
-                <a:spcPts val="800"/>
-              </a:spcAft>
-              <a:buNone/>
-            </a:pPr>
-            <a:r>
-              <a:rPr lang="en-US" sz="4000" dirty="0">
-                <a:solidFill>
-                  <a:srgbClr val="111111"/>
-                </a:solidFill>
-                <a:latin typeface="Times New Roman" pitchFamily="34" charset="0"/>
-                <a:ea typeface="Times New Roman" pitchFamily="34" charset="-122"/>
-                <a:cs typeface="Times New Roman" pitchFamily="34" charset="-120"/>
-              </a:rPr>
-              <a:t>Water covers about 71 % of the Earth and land covers about 29 %.</a:t>
-            </a:r>
-            <a:endParaRPr lang="en-US" sz="4000" dirty="0"/>
+              <a:t>Illustration: the solar system</a:t>
+            </a:r>
+            <a:endParaRPr lang="en-US" sz="1600" dirty="0"/>
           </a:p>
         </p:txBody>
       </p:sp>
@@ -15473,8 +16172,8 @@
         </p:nvSpPr>
         <p:spPr>
           <a:xfrm>
-            <a:off x="457200" y="1005840"/>
-            <a:ext cx="11277295" cy="731520"/>
+            <a:off x="365760" y="1005840"/>
+            <a:ext cx="11460175" cy="731520"/>
           </a:xfrm>
           <a:prstGeom prst="rect">
             <a:avLst/>
@@ -15483,7 +16182,9 @@
           <a:ln/>
         </p:spPr>
         <p:txBody>
-          <a:bodyPr wrap="square" lIns="0" tIns="0" rIns="0" bIns="0" rtlCol="0" anchor="ctr"/>
+          <a:bodyPr wrap="square" lIns="0" tIns="0" rIns="0" bIns="0" rtlCol="0" anchor="ctr">
+            <a:normAutofit/>
+          </a:bodyPr>
           <a:lstStyle/>
           <a:p>
             <a:pPr algn="ctr" indent="0" marL="0">
@@ -15498,7 +16199,66 @@
                 <a:ea typeface="Times New Roman" pitchFamily="34" charset="-122"/>
                 <a:cs typeface="Times New Roman" pitchFamily="34" charset="-120"/>
               </a:rPr>
-              <a:t>3. Landmasses and Water Bodies</a:t>
+              <a:t>1. The Earth in the Solar System</a:t>
+            </a:r>
+            <a:endParaRPr lang="en-US" sz="3600" dirty="0"/>
+          </a:p>
+        </p:txBody>
+      </p:sp>
+      <p:sp>
+        <p:nvSpPr>
+          <p:cNvPr id="4" name="Text 2"/>
+          <p:cNvSpPr/>
+          <p:nvPr/>
+        </p:nvSpPr>
+        <p:spPr>
+          <a:xfrm>
+            <a:off x="365760" y="1783080"/>
+            <a:ext cx="4846320" cy="4617720"/>
+          </a:xfrm>
+          <a:prstGeom prst="rect">
+            <a:avLst/>
+          </a:prstGeom>
+          <a:noFill/>
+          <a:ln/>
+        </p:spPr>
+        <p:txBody>
+          <a:bodyPr wrap="square" lIns="0" tIns="0" rIns="0" bIns="0" rtlCol="0" anchor="t"/>
+          <a:lstStyle/>
+          <a:p>
+            <a:pPr algn="l" indent="0" marL="0">
+              <a:spcAft>
+                <a:spcPts val="800"/>
+              </a:spcAft>
+              <a:buNone/>
+            </a:pPr>
+            <a:r>
+              <a:rPr lang="en-US" sz="3600" b="1" dirty="0">
+                <a:solidFill>
+                  <a:srgbClr val="111111"/>
+                </a:solidFill>
+                <a:latin typeface="Times New Roman" pitchFamily="34" charset="0"/>
+                <a:ea typeface="Times New Roman" pitchFamily="34" charset="-122"/>
+                <a:cs typeface="Times New Roman" pitchFamily="34" charset="-120"/>
+              </a:rPr>
+              <a:t>The Earth: </a:t>
+            </a:r>
+            <a:pPr algn="l" indent="0" marL="0">
+              <a:spcAft>
+                <a:spcPts val="800"/>
+              </a:spcAft>
+              <a:buNone/>
+            </a:pPr>
+            <a:r>
+              <a:rPr lang="en-US" sz="3600" dirty="0">
+                <a:solidFill>
+                  <a:srgbClr val="111111"/>
+                </a:solidFill>
+                <a:latin typeface="Times New Roman" pitchFamily="34" charset="0"/>
+                <a:ea typeface="Times New Roman" pitchFamily="34" charset="-122"/>
+                <a:cs typeface="Times New Roman" pitchFamily="34" charset="-120"/>
+              </a:rPr>
+              <a:t>It is the third planet from the Sun. It is the only planet known to have life, water and air.</a:t>
             </a:r>
             <a:endParaRPr lang="en-US" sz="3600" dirty="0"/>
           </a:p>
@@ -15506,7 +16266,7 @@
       </p:sp>
       <p:pic>
         <p:nvPicPr>
-          <p:cNvPr id="4" name="Image 0" descr="/home/claude/f4/img/v2/continents_oceans_big.png">    </p:cNvPr>
+          <p:cNvPr id="5" name="Image 0" descr="/home/claude/f4/img/v2/f4_earth_space.jpg">    </p:cNvPr>
           <p:cNvPicPr>
             <a:picLocks noChangeAspect="1"/>
           </p:cNvPicPr>
@@ -15520,8 +16280,8 @@
         </p:blipFill>
         <p:spPr>
           <a:xfrm>
-            <a:off x="1034813" y="1783080"/>
-            <a:ext cx="10122069" cy="4270248"/>
+            <a:off x="5349240" y="2045198"/>
+            <a:ext cx="6659575" cy="3746011"/>
           </a:xfrm>
           <a:prstGeom prst="rect">
             <a:avLst/>
@@ -15530,14 +16290,14 @@
       </p:pic>
       <p:sp>
         <p:nvSpPr>
-          <p:cNvPr id="5" name="Text 2"/>
+          <p:cNvPr id="6" name="Text 3"/>
           <p:cNvSpPr/>
           <p:nvPr/>
         </p:nvSpPr>
         <p:spPr>
           <a:xfrm>
-            <a:off x="457200" y="6089904"/>
-            <a:ext cx="11277295" cy="347472"/>
+            <a:off x="5349240" y="6089904"/>
+            <a:ext cx="6659575" cy="347472"/>
           </a:xfrm>
           <a:prstGeom prst="rect">
             <a:avLst/>
@@ -15553,7 +16313,7 @@
               <a:buNone/>
             </a:pPr>
             <a:r>
-              <a:rPr lang="en-US" sz="1800" i="1" dirty="0">
+              <a:rPr lang="en-US" sz="1600" i="1" dirty="0">
                 <a:solidFill>
                   <a:srgbClr val="555555"/>
                 </a:solidFill>
@@ -15561,9 +16321,9 @@
                 <a:ea typeface="Times New Roman" pitchFamily="34" charset="-122"/>
                 <a:cs typeface="Times New Roman" pitchFamily="34" charset="-120"/>
               </a:rPr>
-              <a:t>Illustration: the continents and oceans</a:t>
-            </a:r>
-            <a:endParaRPr lang="en-US" sz="1800" dirty="0"/>
+              <a:t>Illustration: the Earth seen from space</a:t>
+            </a:r>
+            <a:endParaRPr lang="en-US" sz="1600" dirty="0"/>
           </a:p>
         </p:txBody>
       </p:sp>
@@ -15673,15 +16433,156 @@
                 <a:ea typeface="Calibri" pitchFamily="34" charset="-122"/>
                 <a:cs typeface="Calibri" pitchFamily="34" charset="-120"/>
               </a:rPr>
-              <a:t>FORMATIVE EVALUATION</a:t>
+              <a:t>BOARD SUMMARY</a:t>
             </a:r>
             <a:endParaRPr lang="en-US" sz="1400" dirty="0"/>
+          </a:p>
+        </p:txBody>
+      </p:sp>
+      <p:sp>
+        <p:nvSpPr>
+          <p:cNvPr id="3" name="Text 1"/>
+          <p:cNvSpPr/>
+          <p:nvPr/>
+        </p:nvSpPr>
+        <p:spPr>
+          <a:xfrm>
+            <a:off x="365760" y="1005840"/>
+            <a:ext cx="11460175" cy="731520"/>
+          </a:xfrm>
+          <a:prstGeom prst="rect">
+            <a:avLst/>
+          </a:prstGeom>
+          <a:noFill/>
+          <a:ln/>
+        </p:spPr>
+        <p:txBody>
+          <a:bodyPr wrap="square" lIns="0" tIns="0" rIns="0" bIns="0" rtlCol="0" anchor="ctr">
+            <a:normAutofit/>
+          </a:bodyPr>
+          <a:lstStyle/>
+          <a:p>
+            <a:pPr algn="ctr" indent="0" marL="0">
+              <a:buNone/>
+            </a:pPr>
+            <a:r>
+              <a:rPr lang="en-US" sz="3600" b="1" dirty="0">
+                <a:solidFill>
+                  <a:srgbClr val="990011"/>
+                </a:solidFill>
+                <a:latin typeface="Times New Roman" pitchFamily="34" charset="0"/>
+                <a:ea typeface="Times New Roman" pitchFamily="34" charset="-122"/>
+                <a:cs typeface="Times New Roman" pitchFamily="34" charset="-120"/>
+              </a:rPr>
+              <a:t>2. Shape, Dimensions and Locational References</a:t>
+            </a:r>
+            <a:endParaRPr lang="en-US" sz="3600" dirty="0"/>
+          </a:p>
+        </p:txBody>
+      </p:sp>
+      <p:sp>
+        <p:nvSpPr>
+          <p:cNvPr id="4" name="Text 2"/>
+          <p:cNvSpPr/>
+          <p:nvPr/>
+        </p:nvSpPr>
+        <p:spPr>
+          <a:xfrm>
+            <a:off x="365760" y="1737360"/>
+            <a:ext cx="5120640" cy="457200"/>
+          </a:xfrm>
+          <a:prstGeom prst="rect">
+            <a:avLst/>
+          </a:prstGeom>
+          <a:noFill/>
+          <a:ln/>
+        </p:spPr>
+        <p:txBody>
+          <a:bodyPr wrap="square" lIns="0" tIns="0" rIns="0" bIns="0" rtlCol="0" anchor="ctr">
+            <a:normAutofit/>
+          </a:bodyPr>
+          <a:lstStyle/>
+          <a:p>
+            <a:pPr algn="l" indent="0" marL="0">
+              <a:buNone/>
+            </a:pPr>
+            <a:r>
+              <a:rPr lang="en-US" sz="3000" b="1" dirty="0">
+                <a:solidFill>
+                  <a:srgbClr val="990011"/>
+                </a:solidFill>
+                <a:latin typeface="Times New Roman" pitchFamily="34" charset="0"/>
+                <a:ea typeface="Times New Roman" pitchFamily="34" charset="-122"/>
+                <a:cs typeface="Times New Roman" pitchFamily="34" charset="-120"/>
+              </a:rPr>
+              <a:t>A) Shape and Dimensions</a:t>
+            </a:r>
+            <a:endParaRPr lang="en-US" sz="3000" dirty="0"/>
+          </a:p>
+        </p:txBody>
+      </p:sp>
+      <p:sp>
+        <p:nvSpPr>
+          <p:cNvPr id="5" name="Text 3"/>
+          <p:cNvSpPr/>
+          <p:nvPr/>
+        </p:nvSpPr>
+        <p:spPr>
+          <a:xfrm>
+            <a:off x="365760" y="2240280"/>
+            <a:ext cx="4846320" cy="4160520"/>
+          </a:xfrm>
+          <a:prstGeom prst="rect">
+            <a:avLst/>
+          </a:prstGeom>
+          <a:noFill/>
+          <a:ln/>
+        </p:spPr>
+        <p:txBody>
+          <a:bodyPr wrap="square" lIns="0" tIns="0" rIns="0" bIns="0" rtlCol="0" anchor="t"/>
+          <a:lstStyle/>
+          <a:p>
+            <a:pPr algn="l" indent="0" marL="0">
+              <a:spcAft>
+                <a:spcPts val="800"/>
+              </a:spcAft>
+              <a:buNone/>
+            </a:pPr>
+            <a:r>
+              <a:rPr lang="en-US" sz="3600" b="1" dirty="0">
+                <a:solidFill>
+                  <a:srgbClr val="111111"/>
+                </a:solidFill>
+                <a:latin typeface="Times New Roman" pitchFamily="34" charset="0"/>
+                <a:ea typeface="Times New Roman" pitchFamily="34" charset="-122"/>
+                <a:cs typeface="Times New Roman" pitchFamily="34" charset="-120"/>
+              </a:rPr>
+              <a:t>Shape: </a:t>
+            </a:r>
+            <a:pPr algn="l" indent="0" marL="0">
+              <a:spcAft>
+                <a:spcPts val="800"/>
+              </a:spcAft>
+              <a:buNone/>
+            </a:pPr>
+            <a:r>
+              <a:rPr lang="en-US" sz="3600" dirty="0">
+                <a:solidFill>
+                  <a:srgbClr val="111111"/>
+                </a:solidFill>
+                <a:latin typeface="Times New Roman" pitchFamily="34" charset="0"/>
+                <a:ea typeface="Times New Roman" pitchFamily="34" charset="-122"/>
+                <a:cs typeface="Times New Roman" pitchFamily="34" charset="-120"/>
+              </a:rPr>
+              <a:t>The Earth is a sphere, wider at the Equator and slightly flattened at the poles.</a:t>
+            </a:r>
+            <a:endParaRPr lang="en-US" sz="3600" dirty="0"/>
           </a:p>
         </p:txBody>
       </p:sp>
       <p:pic>
         <p:nvPicPr>
-          <p:cNvPr id="3" name="Image 0" descr="/home/claude/f4/img/minesec_sheet.png">    </p:cNvPr>
+          <p:cNvPr id="6" name="Image 0" descr="/home/claude/f4/img/v2/earth_shape_big.png">    </p:cNvPr>
           <p:cNvPicPr>
             <a:picLocks noChangeAspect="1"/>
           </p:cNvPicPr>
@@ -15695,8 +16596,8 @@
         </p:blipFill>
         <p:spPr>
           <a:xfrm>
-            <a:off x="0" y="658368"/>
-            <a:ext cx="5120640" cy="5833872"/>
+            <a:off x="5349240" y="2617506"/>
+            <a:ext cx="6659575" cy="2601397"/>
           </a:xfrm>
           <a:prstGeom prst="rect">
             <a:avLst/>
@@ -15705,14 +16606,14 @@
       </p:pic>
       <p:sp>
         <p:nvSpPr>
-          <p:cNvPr id="4" name="Text 1"/>
+          <p:cNvPr id="7" name="Text 4"/>
           <p:cNvSpPr/>
           <p:nvPr/>
         </p:nvSpPr>
         <p:spPr>
           <a:xfrm>
-            <a:off x="5349240" y="1005840"/>
-            <a:ext cx="6522415" cy="731520"/>
+            <a:off x="5349240" y="6089904"/>
+            <a:ext cx="6659575" cy="347472"/>
           </a:xfrm>
           <a:prstGeom prst="rect">
             <a:avLst/>
@@ -15721,68 +16622,24 @@
           <a:ln/>
         </p:spPr>
         <p:txBody>
-          <a:bodyPr wrap="square" lIns="0" tIns="0" rIns="0" bIns="0" rtlCol="0" anchor="ctr">
-            <a:normAutofit/>
-          </a:bodyPr>
+          <a:bodyPr wrap="square" lIns="0" tIns="0" rIns="0" bIns="0" rtlCol="0" anchor="ctr"/>
           <a:lstStyle/>
           <a:p>
             <a:pPr algn="ctr" indent="0" marL="0">
               <a:buNone/>
             </a:pPr>
             <a:r>
-              <a:rPr lang="en-US" sz="3600" b="1" dirty="0">
-                <a:solidFill>
-                  <a:srgbClr val="990011"/>
+              <a:rPr lang="en-US" sz="1600" i="1" dirty="0">
+                <a:solidFill>
+                  <a:srgbClr val="555555"/>
                 </a:solidFill>
                 <a:latin typeface="Times New Roman" pitchFamily="34" charset="0"/>
                 <a:ea typeface="Times New Roman" pitchFamily="34" charset="-122"/>
                 <a:cs typeface="Times New Roman" pitchFamily="34" charset="-120"/>
               </a:rPr>
-              <a:t>Evaluation 1</a:t>
-            </a:r>
-            <a:endParaRPr lang="en-US" sz="3600" dirty="0"/>
-          </a:p>
-        </p:txBody>
-      </p:sp>
-      <p:sp>
-        <p:nvSpPr>
-          <p:cNvPr id="5" name="Text 2"/>
-          <p:cNvSpPr/>
-          <p:nvPr/>
-        </p:nvSpPr>
-        <p:spPr>
-          <a:xfrm>
-            <a:off x="5349240" y="1783080"/>
-            <a:ext cx="6522415" cy="4663440"/>
-          </a:xfrm>
-          <a:prstGeom prst="rect">
-            <a:avLst/>
-          </a:prstGeom>
-          <a:noFill/>
-          <a:ln/>
-        </p:spPr>
-        <p:txBody>
-          <a:bodyPr wrap="square" lIns="0" tIns="0" rIns="0" bIns="0" rtlCol="0" anchor="t"/>
-          <a:lstStyle/>
-          <a:p>
-            <a:pPr algn="l" indent="0" marL="0">
-              <a:spcAft>
-                <a:spcPts val="800"/>
-              </a:spcAft>
-              <a:buNone/>
-            </a:pPr>
-            <a:r>
-              <a:rPr lang="en-US" sz="4000" dirty="0">
-                <a:solidFill>
-                  <a:srgbClr val="111111"/>
-                </a:solidFill>
-                <a:latin typeface="Times New Roman" pitchFamily="34" charset="0"/>
-                <a:ea typeface="Times New Roman" pitchFamily="34" charset="-122"/>
-                <a:cs typeface="Times New Roman" pitchFamily="34" charset="-120"/>
-              </a:rPr>
-              <a:t>What is the position of the Earth in the solar system?</a:t>
-            </a:r>
-            <a:endParaRPr lang="en-US" sz="4000" dirty="0"/>
+              <a:t>Illustration: the shape of the Earth</a:t>
+            </a:r>
+            <a:endParaRPr lang="en-US" sz="1600" dirty="0"/>
           </a:p>
         </p:txBody>
       </p:sp>
@@ -15892,7 +16749,7 @@
                 <a:ea typeface="Calibri" pitchFamily="34" charset="-122"/>
                 <a:cs typeface="Calibri" pitchFamily="34" charset="-120"/>
               </a:rPr>
-              <a:t>FORMATIVE EVALUATION</a:t>
+              <a:t>BOARD SUMMARY</a:t>
             </a:r>
             <a:endParaRPr lang="en-US" sz="1400" dirty="0"/>
           </a:p>
@@ -15915,7 +16772,7 @@
         <p:spPr>
           <a:xfrm>
             <a:off x="0" y="658368"/>
-            <a:ext cx="5120640" cy="5833872"/>
+            <a:ext cx="2468880" cy="5833872"/>
           </a:xfrm>
           <a:prstGeom prst="rect">
             <a:avLst/>
@@ -15930,8 +16787,8 @@
         </p:nvSpPr>
         <p:spPr>
           <a:xfrm>
-            <a:off x="5349240" y="1005840"/>
-            <a:ext cx="6522415" cy="731520"/>
+            <a:off x="2697480" y="1005840"/>
+            <a:ext cx="9174175" cy="731520"/>
           </a:xfrm>
           <a:prstGeom prst="rect">
             <a:avLst/>
@@ -15957,7 +16814,7 @@
                 <a:ea typeface="Times New Roman" pitchFamily="34" charset="-122"/>
                 <a:cs typeface="Times New Roman" pitchFamily="34" charset="-120"/>
               </a:rPr>
-              <a:t>Expected Answer</a:t>
+              <a:t>2. Shape, Dimensions and Locational References</a:t>
             </a:r>
             <a:endParaRPr lang="en-US" sz="3600" dirty="0"/>
           </a:p>
@@ -15971,8 +16828,47 @@
         </p:nvSpPr>
         <p:spPr>
           <a:xfrm>
-            <a:off x="5349240" y="1783080"/>
-            <a:ext cx="6522415" cy="4663440"/>
+            <a:off x="2697480" y="1737360"/>
+            <a:ext cx="9174175" cy="457200"/>
+          </a:xfrm>
+          <a:prstGeom prst="rect">
+            <a:avLst/>
+          </a:prstGeom>
+          <a:noFill/>
+          <a:ln/>
+        </p:spPr>
+        <p:txBody>
+          <a:bodyPr wrap="square" lIns="0" tIns="0" rIns="0" bIns="0" rtlCol="0" anchor="ctr"/>
+          <a:lstStyle/>
+          <a:p>
+            <a:pPr algn="l" indent="0" marL="0">
+              <a:buNone/>
+            </a:pPr>
+            <a:r>
+              <a:rPr lang="en-US" sz="3200" b="1" dirty="0">
+                <a:solidFill>
+                  <a:srgbClr val="990011"/>
+                </a:solidFill>
+                <a:latin typeface="Times New Roman" pitchFamily="34" charset="0"/>
+                <a:ea typeface="Times New Roman" pitchFamily="34" charset="-122"/>
+                <a:cs typeface="Times New Roman" pitchFamily="34" charset="-120"/>
+              </a:rPr>
+              <a:t>A) Shape and Dimensions</a:t>
+            </a:r>
+            <a:endParaRPr lang="en-US" sz="3200" dirty="0"/>
+          </a:p>
+        </p:txBody>
+      </p:sp>
+      <p:sp>
+        <p:nvSpPr>
+          <p:cNvPr id="6" name="Text 3"/>
+          <p:cNvSpPr/>
+          <p:nvPr/>
+        </p:nvSpPr>
+        <p:spPr>
+          <a:xfrm>
+            <a:off x="2697480" y="2240280"/>
+            <a:ext cx="9174175" cy="4206240"/>
           </a:xfrm>
           <a:prstGeom prst="rect">
             <a:avLst/>
@@ -15991,7 +16887,7 @@
               <a:buNone/>
             </a:pPr>
             <a:r>
-              <a:rPr lang="en-US" sz="4000" dirty="0">
+              <a:rPr lang="en-US" sz="4000" b="1" dirty="0">
                 <a:solidFill>
                   <a:srgbClr val="111111"/>
                 </a:solidFill>
@@ -15999,7 +16895,98 @@
                 <a:ea typeface="Times New Roman" pitchFamily="34" charset="-122"/>
                 <a:cs typeface="Times New Roman" pitchFamily="34" charset="-120"/>
               </a:rPr>
-              <a:t>It is the third planet from the Sun.</a:t>
+              <a:t>Circumference: </a:t>
+            </a:r>
+            <a:pPr algn="l" indent="0" marL="0">
+              <a:spcAft>
+                <a:spcPts val="800"/>
+              </a:spcAft>
+              <a:buNone/>
+            </a:pPr>
+            <a:r>
+              <a:rPr lang="en-US" sz="4000" dirty="0">
+                <a:solidFill>
+                  <a:srgbClr val="111111"/>
+                </a:solidFill>
+                <a:latin typeface="Times New Roman" pitchFamily="34" charset="0"/>
+                <a:ea typeface="Times New Roman" pitchFamily="34" charset="-122"/>
+                <a:cs typeface="Times New Roman" pitchFamily="34" charset="-120"/>
+              </a:rPr>
+              <a:t>The distance around the Earth at the Equator is about 40,000 km.</a:t>
+            </a:r>
+            <a:endParaRPr lang="en-US" sz="4000" dirty="0"/>
+          </a:p>
+          <a:p>
+            <a:pPr algn="l" indent="0" marL="0">
+              <a:spcAft>
+                <a:spcPts val="800"/>
+              </a:spcAft>
+              <a:buNone/>
+            </a:pPr>
+            <a:r>
+              <a:rPr lang="en-US" sz="4000" b="1" dirty="0">
+                <a:solidFill>
+                  <a:srgbClr val="111111"/>
+                </a:solidFill>
+                <a:latin typeface="Times New Roman" pitchFamily="34" charset="0"/>
+                <a:ea typeface="Times New Roman" pitchFamily="34" charset="-122"/>
+                <a:cs typeface="Times New Roman" pitchFamily="34" charset="-120"/>
+              </a:rPr>
+              <a:t>Diameter: </a:t>
+            </a:r>
+            <a:pPr algn="l" indent="0" marL="0">
+              <a:spcAft>
+                <a:spcPts val="800"/>
+              </a:spcAft>
+              <a:buNone/>
+            </a:pPr>
+            <a:r>
+              <a:rPr lang="en-US" sz="4000" dirty="0">
+                <a:solidFill>
+                  <a:srgbClr val="111111"/>
+                </a:solidFill>
+                <a:latin typeface="Times New Roman" pitchFamily="34" charset="0"/>
+                <a:ea typeface="Times New Roman" pitchFamily="34" charset="-122"/>
+                <a:cs typeface="Times New Roman" pitchFamily="34" charset="-120"/>
+              </a:rPr>
+              <a:t>The distance through the centre of the Earth is about 12,700 km.</a:t>
+            </a:r>
+            <a:endParaRPr lang="en-US" sz="4000" dirty="0"/>
+          </a:p>
+          <a:p>
+            <a:pPr algn="l" indent="0" marL="0">
+              <a:spcAft>
+                <a:spcPts val="800"/>
+              </a:spcAft>
+              <a:buNone/>
+            </a:pPr>
+            <a:r>
+              <a:rPr lang="en-US" sz="4000" b="1" dirty="0">
+                <a:solidFill>
+                  <a:srgbClr val="111111"/>
+                </a:solidFill>
+                <a:latin typeface="Times New Roman" pitchFamily="34" charset="0"/>
+                <a:ea typeface="Times New Roman" pitchFamily="34" charset="-122"/>
+                <a:cs typeface="Times New Roman" pitchFamily="34" charset="-120"/>
+              </a:rPr>
+              <a:t>Surface area: </a:t>
+            </a:r>
+            <a:pPr algn="l" indent="0" marL="0">
+              <a:spcAft>
+                <a:spcPts val="800"/>
+              </a:spcAft>
+              <a:buNone/>
+            </a:pPr>
+            <a:r>
+              <a:rPr lang="en-US" sz="4000" dirty="0">
+                <a:solidFill>
+                  <a:srgbClr val="111111"/>
+                </a:solidFill>
+                <a:latin typeface="Times New Roman" pitchFamily="34" charset="0"/>
+                <a:ea typeface="Times New Roman" pitchFamily="34" charset="-122"/>
+                <a:cs typeface="Times New Roman" pitchFamily="34" charset="-120"/>
+              </a:rPr>
+              <a:t>The surface of the Earth is about 510 million km².</a:t>
             </a:r>
             <a:endParaRPr lang="en-US" sz="4000" dirty="0"/>
           </a:p>
@@ -16111,15 +17098,156 @@
                 <a:ea typeface="Calibri" pitchFamily="34" charset="-122"/>
                 <a:cs typeface="Calibri" pitchFamily="34" charset="-120"/>
               </a:rPr>
-              <a:t>FORMATIVE EVALUATION</a:t>
+              <a:t>BOARD SUMMARY</a:t>
             </a:r>
             <a:endParaRPr lang="en-US" sz="1400" dirty="0"/>
+          </a:p>
+        </p:txBody>
+      </p:sp>
+      <p:sp>
+        <p:nvSpPr>
+          <p:cNvPr id="3" name="Text 1"/>
+          <p:cNvSpPr/>
+          <p:nvPr/>
+        </p:nvSpPr>
+        <p:spPr>
+          <a:xfrm>
+            <a:off x="365760" y="1005840"/>
+            <a:ext cx="11460175" cy="731520"/>
+          </a:xfrm>
+          <a:prstGeom prst="rect">
+            <a:avLst/>
+          </a:prstGeom>
+          <a:noFill/>
+          <a:ln/>
+        </p:spPr>
+        <p:txBody>
+          <a:bodyPr wrap="square" lIns="0" tIns="0" rIns="0" bIns="0" rtlCol="0" anchor="ctr">
+            <a:normAutofit/>
+          </a:bodyPr>
+          <a:lstStyle/>
+          <a:p>
+            <a:pPr algn="ctr" indent="0" marL="0">
+              <a:buNone/>
+            </a:pPr>
+            <a:r>
+              <a:rPr lang="en-US" sz="3600" b="1" dirty="0">
+                <a:solidFill>
+                  <a:srgbClr val="990011"/>
+                </a:solidFill>
+                <a:latin typeface="Times New Roman" pitchFamily="34" charset="0"/>
+                <a:ea typeface="Times New Roman" pitchFamily="34" charset="-122"/>
+                <a:cs typeface="Times New Roman" pitchFamily="34" charset="-120"/>
+              </a:rPr>
+              <a:t>2. Shape, Dimensions and Locational References</a:t>
+            </a:r>
+            <a:endParaRPr lang="en-US" sz="3600" dirty="0"/>
+          </a:p>
+        </p:txBody>
+      </p:sp>
+      <p:sp>
+        <p:nvSpPr>
+          <p:cNvPr id="4" name="Text 2"/>
+          <p:cNvSpPr/>
+          <p:nvPr/>
+        </p:nvSpPr>
+        <p:spPr>
+          <a:xfrm>
+            <a:off x="365760" y="1737360"/>
+            <a:ext cx="5120640" cy="457200"/>
+          </a:xfrm>
+          <a:prstGeom prst="rect">
+            <a:avLst/>
+          </a:prstGeom>
+          <a:noFill/>
+          <a:ln/>
+        </p:spPr>
+        <p:txBody>
+          <a:bodyPr wrap="square" lIns="0" tIns="0" rIns="0" bIns="0" rtlCol="0" anchor="ctr">
+            <a:normAutofit/>
+          </a:bodyPr>
+          <a:lstStyle/>
+          <a:p>
+            <a:pPr algn="l" indent="0" marL="0">
+              <a:buNone/>
+            </a:pPr>
+            <a:r>
+              <a:rPr lang="en-US" sz="3000" b="1" dirty="0">
+                <a:solidFill>
+                  <a:srgbClr val="990011"/>
+                </a:solidFill>
+                <a:latin typeface="Times New Roman" pitchFamily="34" charset="0"/>
+                <a:ea typeface="Times New Roman" pitchFamily="34" charset="-122"/>
+                <a:cs typeface="Times New Roman" pitchFamily="34" charset="-120"/>
+              </a:rPr>
+              <a:t>B) Locational References</a:t>
+            </a:r>
+            <a:endParaRPr lang="en-US" sz="3000" dirty="0"/>
+          </a:p>
+        </p:txBody>
+      </p:sp>
+      <p:sp>
+        <p:nvSpPr>
+          <p:cNvPr id="5" name="Text 3"/>
+          <p:cNvSpPr/>
+          <p:nvPr/>
+        </p:nvSpPr>
+        <p:spPr>
+          <a:xfrm>
+            <a:off x="365760" y="2240280"/>
+            <a:ext cx="4846320" cy="4160520"/>
+          </a:xfrm>
+          <a:prstGeom prst="rect">
+            <a:avLst/>
+          </a:prstGeom>
+          <a:noFill/>
+          <a:ln/>
+        </p:spPr>
+        <p:txBody>
+          <a:bodyPr wrap="square" lIns="0" tIns="0" rIns="0" bIns="0" rtlCol="0" anchor="t"/>
+          <a:lstStyle/>
+          <a:p>
+            <a:pPr algn="l" indent="0" marL="0">
+              <a:spcAft>
+                <a:spcPts val="800"/>
+              </a:spcAft>
+              <a:buNone/>
+            </a:pPr>
+            <a:r>
+              <a:rPr lang="en-US" sz="3600" b="1" dirty="0">
+                <a:solidFill>
+                  <a:srgbClr val="111111"/>
+                </a:solidFill>
+                <a:latin typeface="Times New Roman" pitchFamily="34" charset="0"/>
+                <a:ea typeface="Times New Roman" pitchFamily="34" charset="-122"/>
+                <a:cs typeface="Times New Roman" pitchFamily="34" charset="-120"/>
+              </a:rPr>
+              <a:t>Lines of latitude: </a:t>
+            </a:r>
+            <a:pPr algn="l" indent="0" marL="0">
+              <a:spcAft>
+                <a:spcPts val="800"/>
+              </a:spcAft>
+              <a:buNone/>
+            </a:pPr>
+            <a:r>
+              <a:rPr lang="en-US" sz="3600" dirty="0">
+                <a:solidFill>
+                  <a:srgbClr val="111111"/>
+                </a:solidFill>
+                <a:latin typeface="Times New Roman" pitchFamily="34" charset="0"/>
+                <a:ea typeface="Times New Roman" pitchFamily="34" charset="-122"/>
+                <a:cs typeface="Times New Roman" pitchFamily="34" charset="-120"/>
+              </a:rPr>
+              <a:t>They are imaginary circles drawn around the Earth parallel to the Equator. The Equator is latitude 0°.</a:t>
+            </a:r>
+            <a:endParaRPr lang="en-US" sz="3600" dirty="0"/>
           </a:p>
         </p:txBody>
       </p:sp>
       <p:pic>
         <p:nvPicPr>
-          <p:cNvPr id="3" name="Image 0" descr="/home/claude/f4/img/minesec_sheet.png">    </p:cNvPr>
+          <p:cNvPr id="6" name="Image 0" descr="/home/claude/f4/img/v2/latitudes_big.png">    </p:cNvPr>
           <p:cNvPicPr>
             <a:picLocks noChangeAspect="1"/>
           </p:cNvPicPr>
@@ -16133,8 +17261,8 @@
         </p:blipFill>
         <p:spPr>
           <a:xfrm>
-            <a:off x="0" y="658368"/>
-            <a:ext cx="5120640" cy="5833872"/>
+            <a:off x="5349240" y="2617506"/>
+            <a:ext cx="6659575" cy="2601397"/>
           </a:xfrm>
           <a:prstGeom prst="rect">
             <a:avLst/>
@@ -16143,14 +17271,14 @@
       </p:pic>
       <p:sp>
         <p:nvSpPr>
-          <p:cNvPr id="4" name="Text 1"/>
+          <p:cNvPr id="7" name="Text 4"/>
           <p:cNvSpPr/>
           <p:nvPr/>
         </p:nvSpPr>
         <p:spPr>
           <a:xfrm>
-            <a:off x="5349240" y="1005840"/>
-            <a:ext cx="6522415" cy="731520"/>
+            <a:off x="5349240" y="6089904"/>
+            <a:ext cx="6659575" cy="347472"/>
           </a:xfrm>
           <a:prstGeom prst="rect">
             <a:avLst/>
@@ -16159,68 +17287,24 @@
           <a:ln/>
         </p:spPr>
         <p:txBody>
-          <a:bodyPr wrap="square" lIns="0" tIns="0" rIns="0" bIns="0" rtlCol="0" anchor="ctr">
-            <a:normAutofit/>
-          </a:bodyPr>
+          <a:bodyPr wrap="square" lIns="0" tIns="0" rIns="0" bIns="0" rtlCol="0" anchor="ctr"/>
           <a:lstStyle/>
           <a:p>
             <a:pPr algn="ctr" indent="0" marL="0">
               <a:buNone/>
             </a:pPr>
             <a:r>
-              <a:rPr lang="en-US" sz="3600" b="1" dirty="0">
-                <a:solidFill>
-                  <a:srgbClr val="990011"/>
+              <a:rPr lang="en-US" sz="1600" i="1" dirty="0">
+                <a:solidFill>
+                  <a:srgbClr val="555555"/>
                 </a:solidFill>
                 <a:latin typeface="Times New Roman" pitchFamily="34" charset="0"/>
                 <a:ea typeface="Times New Roman" pitchFamily="34" charset="-122"/>
                 <a:cs typeface="Times New Roman" pitchFamily="34" charset="-120"/>
               </a:rPr>
-              <a:t>Evaluation 2</a:t>
-            </a:r>
-            <a:endParaRPr lang="en-US" sz="3600" dirty="0"/>
-          </a:p>
-        </p:txBody>
-      </p:sp>
-      <p:sp>
-        <p:nvSpPr>
-          <p:cNvPr id="5" name="Text 2"/>
-          <p:cNvSpPr/>
-          <p:nvPr/>
-        </p:nvSpPr>
-        <p:spPr>
-          <a:xfrm>
-            <a:off x="5349240" y="1783080"/>
-            <a:ext cx="6522415" cy="4663440"/>
-          </a:xfrm>
-          <a:prstGeom prst="rect">
-            <a:avLst/>
-          </a:prstGeom>
-          <a:noFill/>
-          <a:ln/>
-        </p:spPr>
-        <p:txBody>
-          <a:bodyPr wrap="square" lIns="0" tIns="0" rIns="0" bIns="0" rtlCol="0" anchor="t"/>
-          <a:lstStyle/>
-          <a:p>
-            <a:pPr algn="l" indent="0" marL="0">
-              <a:spcAft>
-                <a:spcPts val="800"/>
-              </a:spcAft>
-              <a:buNone/>
-            </a:pPr>
-            <a:r>
-              <a:rPr lang="en-US" sz="4000" dirty="0">
-                <a:solidFill>
-                  <a:srgbClr val="111111"/>
-                </a:solidFill>
-                <a:latin typeface="Times New Roman" pitchFamily="34" charset="0"/>
-                <a:ea typeface="Times New Roman" pitchFamily="34" charset="-122"/>
-                <a:cs typeface="Times New Roman" pitchFamily="34" charset="-120"/>
-              </a:rPr>
-              <a:t>Name three continents and two oceans.</a:t>
-            </a:r>
-            <a:endParaRPr lang="en-US" sz="4000" dirty="0"/>
+              <a:t>Illustration: lines of latitude</a:t>
+            </a:r>
+            <a:endParaRPr lang="en-US" sz="1600" dirty="0"/>
           </a:p>
         </p:txBody>
       </p:sp>
@@ -16330,15 +17414,156 @@
                 <a:ea typeface="Calibri" pitchFamily="34" charset="-122"/>
                 <a:cs typeface="Calibri" pitchFamily="34" charset="-120"/>
               </a:rPr>
-              <a:t>FORMATIVE EVALUATION</a:t>
+              <a:t>BOARD SUMMARY</a:t>
             </a:r>
             <a:endParaRPr lang="en-US" sz="1400" dirty="0"/>
+          </a:p>
+        </p:txBody>
+      </p:sp>
+      <p:sp>
+        <p:nvSpPr>
+          <p:cNvPr id="3" name="Text 1"/>
+          <p:cNvSpPr/>
+          <p:nvPr/>
+        </p:nvSpPr>
+        <p:spPr>
+          <a:xfrm>
+            <a:off x="365760" y="1005840"/>
+            <a:ext cx="11460175" cy="731520"/>
+          </a:xfrm>
+          <a:prstGeom prst="rect">
+            <a:avLst/>
+          </a:prstGeom>
+          <a:noFill/>
+          <a:ln/>
+        </p:spPr>
+        <p:txBody>
+          <a:bodyPr wrap="square" lIns="0" tIns="0" rIns="0" bIns="0" rtlCol="0" anchor="ctr">
+            <a:normAutofit/>
+          </a:bodyPr>
+          <a:lstStyle/>
+          <a:p>
+            <a:pPr algn="ctr" indent="0" marL="0">
+              <a:buNone/>
+            </a:pPr>
+            <a:r>
+              <a:rPr lang="en-US" sz="3600" b="1" dirty="0">
+                <a:solidFill>
+                  <a:srgbClr val="990011"/>
+                </a:solidFill>
+                <a:latin typeface="Times New Roman" pitchFamily="34" charset="0"/>
+                <a:ea typeface="Times New Roman" pitchFamily="34" charset="-122"/>
+                <a:cs typeface="Times New Roman" pitchFamily="34" charset="-120"/>
+              </a:rPr>
+              <a:t>2. Shape, Dimensions and Locational References</a:t>
+            </a:r>
+            <a:endParaRPr lang="en-US" sz="3600" dirty="0"/>
+          </a:p>
+        </p:txBody>
+      </p:sp>
+      <p:sp>
+        <p:nvSpPr>
+          <p:cNvPr id="4" name="Text 2"/>
+          <p:cNvSpPr/>
+          <p:nvPr/>
+        </p:nvSpPr>
+        <p:spPr>
+          <a:xfrm>
+            <a:off x="365760" y="1737360"/>
+            <a:ext cx="5120640" cy="457200"/>
+          </a:xfrm>
+          <a:prstGeom prst="rect">
+            <a:avLst/>
+          </a:prstGeom>
+          <a:noFill/>
+          <a:ln/>
+        </p:spPr>
+        <p:txBody>
+          <a:bodyPr wrap="square" lIns="0" tIns="0" rIns="0" bIns="0" rtlCol="0" anchor="ctr">
+            <a:normAutofit/>
+          </a:bodyPr>
+          <a:lstStyle/>
+          <a:p>
+            <a:pPr algn="l" indent="0" marL="0">
+              <a:buNone/>
+            </a:pPr>
+            <a:r>
+              <a:rPr lang="en-US" sz="3000" b="1" dirty="0">
+                <a:solidFill>
+                  <a:srgbClr val="990011"/>
+                </a:solidFill>
+                <a:latin typeface="Times New Roman" pitchFamily="34" charset="0"/>
+                <a:ea typeface="Times New Roman" pitchFamily="34" charset="-122"/>
+                <a:cs typeface="Times New Roman" pitchFamily="34" charset="-120"/>
+              </a:rPr>
+              <a:t>B) Locational References</a:t>
+            </a:r>
+            <a:endParaRPr lang="en-US" sz="3000" dirty="0"/>
+          </a:p>
+        </p:txBody>
+      </p:sp>
+      <p:sp>
+        <p:nvSpPr>
+          <p:cNvPr id="5" name="Text 3"/>
+          <p:cNvSpPr/>
+          <p:nvPr/>
+        </p:nvSpPr>
+        <p:spPr>
+          <a:xfrm>
+            <a:off x="365760" y="2240280"/>
+            <a:ext cx="4846320" cy="4160520"/>
+          </a:xfrm>
+          <a:prstGeom prst="rect">
+            <a:avLst/>
+          </a:prstGeom>
+          <a:noFill/>
+          <a:ln/>
+        </p:spPr>
+        <p:txBody>
+          <a:bodyPr wrap="square" lIns="0" tIns="0" rIns="0" bIns="0" rtlCol="0" anchor="t"/>
+          <a:lstStyle/>
+          <a:p>
+            <a:pPr algn="l" indent="0" marL="0">
+              <a:spcAft>
+                <a:spcPts val="800"/>
+              </a:spcAft>
+              <a:buNone/>
+            </a:pPr>
+            <a:r>
+              <a:rPr lang="en-US" sz="3600" b="1" dirty="0">
+                <a:solidFill>
+                  <a:srgbClr val="111111"/>
+                </a:solidFill>
+                <a:latin typeface="Times New Roman" pitchFamily="34" charset="0"/>
+                <a:ea typeface="Times New Roman" pitchFamily="34" charset="-122"/>
+                <a:cs typeface="Times New Roman" pitchFamily="34" charset="-120"/>
+              </a:rPr>
+              <a:t>Lines of longitude: </a:t>
+            </a:r>
+            <a:pPr algn="l" indent="0" marL="0">
+              <a:spcAft>
+                <a:spcPts val="800"/>
+              </a:spcAft>
+              <a:buNone/>
+            </a:pPr>
+            <a:r>
+              <a:rPr lang="en-US" sz="3600" dirty="0">
+                <a:solidFill>
+                  <a:srgbClr val="111111"/>
+                </a:solidFill>
+                <a:latin typeface="Times New Roman" pitchFamily="34" charset="0"/>
+                <a:ea typeface="Times New Roman" pitchFamily="34" charset="-122"/>
+                <a:cs typeface="Times New Roman" pitchFamily="34" charset="-120"/>
+              </a:rPr>
+              <a:t>They are imaginary lines drawn from the North Pole to the South Pole. The Greenwich Meridian is longitude 0°.</a:t>
+            </a:r>
+            <a:endParaRPr lang="en-US" sz="3600" dirty="0"/>
           </a:p>
         </p:txBody>
       </p:sp>
       <p:pic>
         <p:nvPicPr>
-          <p:cNvPr id="3" name="Image 0" descr="/home/claude/f4/img/minesec_sheet.png">    </p:cNvPr>
+          <p:cNvPr id="6" name="Image 0" descr="/home/claude/f4/img/v2/longitudes_big.png">    </p:cNvPr>
           <p:cNvPicPr>
             <a:picLocks noChangeAspect="1"/>
           </p:cNvPicPr>
@@ -16352,8 +17577,8 @@
         </p:blipFill>
         <p:spPr>
           <a:xfrm>
-            <a:off x="0" y="658368"/>
-            <a:ext cx="5120640" cy="5833872"/>
+            <a:off x="5349240" y="2617506"/>
+            <a:ext cx="6659575" cy="2601397"/>
           </a:xfrm>
           <a:prstGeom prst="rect">
             <a:avLst/>
@@ -16362,14 +17587,14 @@
       </p:pic>
       <p:sp>
         <p:nvSpPr>
-          <p:cNvPr id="4" name="Text 1"/>
+          <p:cNvPr id="7" name="Text 4"/>
           <p:cNvSpPr/>
           <p:nvPr/>
         </p:nvSpPr>
         <p:spPr>
           <a:xfrm>
-            <a:off x="5349240" y="1005840"/>
-            <a:ext cx="6522415" cy="731520"/>
+            <a:off x="5349240" y="6089904"/>
+            <a:ext cx="6659575" cy="347472"/>
           </a:xfrm>
           <a:prstGeom prst="rect">
             <a:avLst/>
@@ -16378,68 +17603,24 @@
           <a:ln/>
         </p:spPr>
         <p:txBody>
-          <a:bodyPr wrap="square" lIns="0" tIns="0" rIns="0" bIns="0" rtlCol="0" anchor="ctr">
-            <a:normAutofit/>
-          </a:bodyPr>
+          <a:bodyPr wrap="square" lIns="0" tIns="0" rIns="0" bIns="0" rtlCol="0" anchor="ctr"/>
           <a:lstStyle/>
           <a:p>
             <a:pPr algn="ctr" indent="0" marL="0">
               <a:buNone/>
             </a:pPr>
             <a:r>
-              <a:rPr lang="en-US" sz="3600" b="1" dirty="0">
-                <a:solidFill>
-                  <a:srgbClr val="990011"/>
+              <a:rPr lang="en-US" sz="1600" i="1" dirty="0">
+                <a:solidFill>
+                  <a:srgbClr val="555555"/>
                 </a:solidFill>
                 <a:latin typeface="Times New Roman" pitchFamily="34" charset="0"/>
                 <a:ea typeface="Times New Roman" pitchFamily="34" charset="-122"/>
                 <a:cs typeface="Times New Roman" pitchFamily="34" charset="-120"/>
               </a:rPr>
-              <a:t>Expected Answer</a:t>
-            </a:r>
-            <a:endParaRPr lang="en-US" sz="3600" dirty="0"/>
-          </a:p>
-        </p:txBody>
-      </p:sp>
-      <p:sp>
-        <p:nvSpPr>
-          <p:cNvPr id="5" name="Text 2"/>
-          <p:cNvSpPr/>
-          <p:nvPr/>
-        </p:nvSpPr>
-        <p:spPr>
-          <a:xfrm>
-            <a:off x="5349240" y="1783080"/>
-            <a:ext cx="6522415" cy="4663440"/>
-          </a:xfrm>
-          <a:prstGeom prst="rect">
-            <a:avLst/>
-          </a:prstGeom>
-          <a:noFill/>
-          <a:ln/>
-        </p:spPr>
-        <p:txBody>
-          <a:bodyPr wrap="square" lIns="0" tIns="0" rIns="0" bIns="0" rtlCol="0" anchor="t"/>
-          <a:lstStyle/>
-          <a:p>
-            <a:pPr algn="l" indent="0" marL="0">
-              <a:spcAft>
-                <a:spcPts val="800"/>
-              </a:spcAft>
-              <a:buNone/>
-            </a:pPr>
-            <a:r>
-              <a:rPr lang="en-US" sz="4000" dirty="0">
-                <a:solidFill>
-                  <a:srgbClr val="111111"/>
-                </a:solidFill>
-                <a:latin typeface="Times New Roman" pitchFamily="34" charset="0"/>
-                <a:ea typeface="Times New Roman" pitchFamily="34" charset="-122"/>
-                <a:cs typeface="Times New Roman" pitchFamily="34" charset="-120"/>
-              </a:rPr>
-              <a:t>Africa, Asia, Europe; the Atlantic and the Pacific Oceans.</a:t>
-            </a:r>
-            <a:endParaRPr lang="en-US" sz="4000" dirty="0"/>
+              <a:t>Illustration: lines of longitude</a:t>
+            </a:r>
+            <a:endParaRPr lang="en-US" sz="1600" dirty="0"/>
           </a:p>
         </p:txBody>
       </p:sp>
@@ -16549,15 +17730,156 @@
                 <a:ea typeface="Calibri" pitchFamily="34" charset="-122"/>
                 <a:cs typeface="Calibri" pitchFamily="34" charset="-120"/>
               </a:rPr>
-              <a:t>REMEDIATION</a:t>
+              <a:t>BOARD SUMMARY</a:t>
             </a:r>
             <a:endParaRPr lang="en-US" sz="1400" dirty="0"/>
+          </a:p>
+        </p:txBody>
+      </p:sp>
+      <p:sp>
+        <p:nvSpPr>
+          <p:cNvPr id="3" name="Text 1"/>
+          <p:cNvSpPr/>
+          <p:nvPr/>
+        </p:nvSpPr>
+        <p:spPr>
+          <a:xfrm>
+            <a:off x="365760" y="1005840"/>
+            <a:ext cx="11460175" cy="731520"/>
+          </a:xfrm>
+          <a:prstGeom prst="rect">
+            <a:avLst/>
+          </a:prstGeom>
+          <a:noFill/>
+          <a:ln/>
+        </p:spPr>
+        <p:txBody>
+          <a:bodyPr wrap="square" lIns="0" tIns="0" rIns="0" bIns="0" rtlCol="0" anchor="ctr">
+            <a:normAutofit/>
+          </a:bodyPr>
+          <a:lstStyle/>
+          <a:p>
+            <a:pPr algn="ctr" indent="0" marL="0">
+              <a:buNone/>
+            </a:pPr>
+            <a:r>
+              <a:rPr lang="en-US" sz="3600" b="1" dirty="0">
+                <a:solidFill>
+                  <a:srgbClr val="990011"/>
+                </a:solidFill>
+                <a:latin typeface="Times New Roman" pitchFamily="34" charset="0"/>
+                <a:ea typeface="Times New Roman" pitchFamily="34" charset="-122"/>
+                <a:cs typeface="Times New Roman" pitchFamily="34" charset="-120"/>
+              </a:rPr>
+              <a:t>2. Shape, Dimensions and Locational References</a:t>
+            </a:r>
+            <a:endParaRPr lang="en-US" sz="3600" dirty="0"/>
+          </a:p>
+        </p:txBody>
+      </p:sp>
+      <p:sp>
+        <p:nvSpPr>
+          <p:cNvPr id="4" name="Text 2"/>
+          <p:cNvSpPr/>
+          <p:nvPr/>
+        </p:nvSpPr>
+        <p:spPr>
+          <a:xfrm>
+            <a:off x="365760" y="1737360"/>
+            <a:ext cx="5120640" cy="457200"/>
+          </a:xfrm>
+          <a:prstGeom prst="rect">
+            <a:avLst/>
+          </a:prstGeom>
+          <a:noFill/>
+          <a:ln/>
+        </p:spPr>
+        <p:txBody>
+          <a:bodyPr wrap="square" lIns="0" tIns="0" rIns="0" bIns="0" rtlCol="0" anchor="ctr">
+            <a:normAutofit/>
+          </a:bodyPr>
+          <a:lstStyle/>
+          <a:p>
+            <a:pPr algn="l" indent="0" marL="0">
+              <a:buNone/>
+            </a:pPr>
+            <a:r>
+              <a:rPr lang="en-US" sz="3000" b="1" dirty="0">
+                <a:solidFill>
+                  <a:srgbClr val="990011"/>
+                </a:solidFill>
+                <a:latin typeface="Times New Roman" pitchFamily="34" charset="0"/>
+                <a:ea typeface="Times New Roman" pitchFamily="34" charset="-122"/>
+                <a:cs typeface="Times New Roman" pitchFamily="34" charset="-120"/>
+              </a:rPr>
+              <a:t>B) Locational References</a:t>
+            </a:r>
+            <a:endParaRPr lang="en-US" sz="3000" dirty="0"/>
+          </a:p>
+        </p:txBody>
+      </p:sp>
+      <p:sp>
+        <p:nvSpPr>
+          <p:cNvPr id="5" name="Text 3"/>
+          <p:cNvSpPr/>
+          <p:nvPr/>
+        </p:nvSpPr>
+        <p:spPr>
+          <a:xfrm>
+            <a:off x="365760" y="2240280"/>
+            <a:ext cx="4846320" cy="4160520"/>
+          </a:xfrm>
+          <a:prstGeom prst="rect">
+            <a:avLst/>
+          </a:prstGeom>
+          <a:noFill/>
+          <a:ln/>
+        </p:spPr>
+        <p:txBody>
+          <a:bodyPr wrap="square" lIns="0" tIns="0" rIns="0" bIns="0" rtlCol="0" anchor="t"/>
+          <a:lstStyle/>
+          <a:p>
+            <a:pPr algn="l" indent="0" marL="0">
+              <a:spcAft>
+                <a:spcPts val="800"/>
+              </a:spcAft>
+              <a:buNone/>
+            </a:pPr>
+            <a:r>
+              <a:rPr lang="en-US" sz="3600" b="1" dirty="0">
+                <a:solidFill>
+                  <a:srgbClr val="111111"/>
+                </a:solidFill>
+                <a:latin typeface="Times New Roman" pitchFamily="34" charset="0"/>
+                <a:ea typeface="Times New Roman" pitchFamily="34" charset="-122"/>
+                <a:cs typeface="Times New Roman" pitchFamily="34" charset="-120"/>
+              </a:rPr>
+              <a:t>Geographical coordinates: </a:t>
+            </a:r>
+            <a:pPr algn="l" indent="0" marL="0">
+              <a:spcAft>
+                <a:spcPts val="800"/>
+              </a:spcAft>
+              <a:buNone/>
+            </a:pPr>
+            <a:r>
+              <a:rPr lang="en-US" sz="3600" dirty="0">
+                <a:solidFill>
+                  <a:srgbClr val="111111"/>
+                </a:solidFill>
+                <a:latin typeface="Times New Roman" pitchFamily="34" charset="0"/>
+                <a:ea typeface="Times New Roman" pitchFamily="34" charset="-122"/>
+                <a:cs typeface="Times New Roman" pitchFamily="34" charset="-120"/>
+              </a:rPr>
+              <a:t>The latitude and the longitude of a place give its exact position on the Earth.</a:t>
+            </a:r>
+            <a:endParaRPr lang="en-US" sz="3600" dirty="0"/>
           </a:p>
         </p:txBody>
       </p:sp>
       <p:pic>
         <p:nvPicPr>
-          <p:cNvPr id="3" name="Image 0" descr="/home/claude/f4/img/minesec_sheet.png">    </p:cNvPr>
+          <p:cNvPr id="6" name="Image 0" descr="/home/claude/f4/img/v2/coordinates_last.png">    </p:cNvPr>
           <p:cNvPicPr>
             <a:picLocks noChangeAspect="1"/>
           </p:cNvPicPr>
@@ -16571,8 +17893,8 @@
         </p:blipFill>
         <p:spPr>
           <a:xfrm>
-            <a:off x="0" y="658368"/>
-            <a:ext cx="2468880" cy="5833872"/>
+            <a:off x="5349240" y="2045198"/>
+            <a:ext cx="6659575" cy="3746011"/>
           </a:xfrm>
           <a:prstGeom prst="rect">
             <a:avLst/>
@@ -16581,14 +17903,14 @@
       </p:pic>
       <p:sp>
         <p:nvSpPr>
-          <p:cNvPr id="4" name="Text 1"/>
+          <p:cNvPr id="7" name="Text 4"/>
           <p:cNvSpPr/>
           <p:nvPr/>
         </p:nvSpPr>
         <p:spPr>
           <a:xfrm>
-            <a:off x="2697480" y="1005840"/>
-            <a:ext cx="9174175" cy="731520"/>
+            <a:off x="5349240" y="6089904"/>
+            <a:ext cx="6659575" cy="347472"/>
           </a:xfrm>
           <a:prstGeom prst="rect">
             <a:avLst/>
@@ -16597,134 +17919,24 @@
           <a:ln/>
         </p:spPr>
         <p:txBody>
-          <a:bodyPr wrap="square" lIns="0" tIns="0" rIns="0" bIns="0" rtlCol="0" anchor="ctr">
-            <a:normAutofit/>
-          </a:bodyPr>
+          <a:bodyPr wrap="square" lIns="0" tIns="0" rIns="0" bIns="0" rtlCol="0" anchor="ctr"/>
           <a:lstStyle/>
           <a:p>
             <a:pPr algn="ctr" indent="0" marL="0">
               <a:buNone/>
             </a:pPr>
             <a:r>
-              <a:rPr lang="en-US" sz="3600" b="1" dirty="0">
-                <a:solidFill>
-                  <a:srgbClr val="990011"/>
+              <a:rPr lang="en-US" sz="1600" i="1" dirty="0">
+                <a:solidFill>
+                  <a:srgbClr val="555555"/>
                 </a:solidFill>
                 <a:latin typeface="Times New Roman" pitchFamily="34" charset="0"/>
                 <a:ea typeface="Times New Roman" pitchFamily="34" charset="-122"/>
                 <a:cs typeface="Times New Roman" pitchFamily="34" charset="-120"/>
               </a:rPr>
-              <a:t>Remediation</a:t>
-            </a:r>
-            <a:endParaRPr lang="en-US" sz="3600" dirty="0"/>
-          </a:p>
-        </p:txBody>
-      </p:sp>
-      <p:sp>
-        <p:nvSpPr>
-          <p:cNvPr id="5" name="Text 2"/>
-          <p:cNvSpPr/>
-          <p:nvPr/>
-        </p:nvSpPr>
-        <p:spPr>
-          <a:xfrm>
-            <a:off x="2697480" y="1783080"/>
-            <a:ext cx="9174175" cy="4663440"/>
-          </a:xfrm>
-          <a:prstGeom prst="rect">
-            <a:avLst/>
-          </a:prstGeom>
-          <a:noFill/>
-          <a:ln/>
-        </p:spPr>
-        <p:txBody>
-          <a:bodyPr wrap="square" lIns="0" tIns="0" rIns="0" bIns="0" rtlCol="0" anchor="t"/>
-          <a:lstStyle/>
-          <a:p>
-            <a:pPr algn="l" indent="0" marL="0">
-              <a:spcAft>
-                <a:spcPts val="800"/>
-              </a:spcAft>
-              <a:buNone/>
-            </a:pPr>
-            <a:r>
-              <a:rPr lang="en-US" sz="4000" b="1" dirty="0">
-                <a:solidFill>
-                  <a:srgbClr val="111111"/>
-                </a:solidFill>
-                <a:latin typeface="Times New Roman" pitchFamily="34" charset="0"/>
-                <a:ea typeface="Times New Roman" pitchFamily="34" charset="-122"/>
-                <a:cs typeface="Times New Roman" pitchFamily="34" charset="-120"/>
-              </a:rPr>
-              <a:t>Fill in the blanks:</a:t>
-            </a:r>
-            <a:endParaRPr lang="en-US" sz="4000" dirty="0"/>
-          </a:p>
-          <a:p>
-            <a:pPr algn="l" marL="342900" indent="-342900">
-              <a:spcAft>
-                <a:spcPts val="800"/>
-              </a:spcAft>
-              <a:buSzPct val="100000"/>
-              <a:buFont typeface="+mj-lt"/>
-              <a:buAutoNum type="arabicPeriod" startAt="1"/>
-            </a:pPr>
-            <a:r>
-              <a:rPr lang="en-US" sz="4000" dirty="0">
-                <a:solidFill>
-                  <a:srgbClr val="111111"/>
-                </a:solidFill>
-                <a:latin typeface="Times New Roman" pitchFamily="34" charset="0"/>
-                <a:ea typeface="Times New Roman" pitchFamily="34" charset="-122"/>
-                <a:cs typeface="Times New Roman" pitchFamily="34" charset="-120"/>
-              </a:rPr>
-              <a:t>The Earth is the ______ planet from the Sun.</a:t>
-            </a:r>
-            <a:endParaRPr lang="en-US" sz="4000" dirty="0"/>
-          </a:p>
-          <a:p>
-            <a:pPr algn="l" marL="342900" indent="-342900">
-              <a:spcAft>
-                <a:spcPts val="800"/>
-              </a:spcAft>
-              <a:buSzPct val="100000"/>
-              <a:buFont typeface="+mj-lt"/>
-              <a:buAutoNum type="arabicPeriod" startAt="1"/>
-            </a:pPr>
-            <a:r>
-              <a:rPr lang="en-US" sz="4000" dirty="0">
-                <a:solidFill>
-                  <a:srgbClr val="111111"/>
-                </a:solidFill>
-                <a:latin typeface="Times New Roman" pitchFamily="34" charset="0"/>
-                <a:ea typeface="Times New Roman" pitchFamily="34" charset="-122"/>
-                <a:cs typeface="Times New Roman" pitchFamily="34" charset="-120"/>
-              </a:rPr>
-              <a:t>The largest ocean is the ______ Ocean.</a:t>
-            </a:r>
-            <a:endParaRPr lang="en-US" sz="4000" dirty="0"/>
-          </a:p>
-          <a:p>
-            <a:pPr algn="l" marL="342900" indent="-342900">
-              <a:spcAft>
-                <a:spcPts val="800"/>
-              </a:spcAft>
-              <a:buSzPct val="100000"/>
-              <a:buFont typeface="+mj-lt"/>
-              <a:buAutoNum type="arabicPeriod" startAt="1"/>
-            </a:pPr>
-            <a:r>
-              <a:rPr lang="en-US" sz="4000" dirty="0">
-                <a:solidFill>
-                  <a:srgbClr val="111111"/>
-                </a:solidFill>
-                <a:latin typeface="Times New Roman" pitchFamily="34" charset="0"/>
-                <a:ea typeface="Times New Roman" pitchFamily="34" charset="-122"/>
-                <a:cs typeface="Times New Roman" pitchFamily="34" charset="-120"/>
-              </a:rPr>
-              <a:t>Cameroon is on the continent of ______.</a:t>
-            </a:r>
-            <a:endParaRPr lang="en-US" sz="4000" dirty="0"/>
+              <a:t>Illustration: the coordinates of a place</a:t>
+            </a:r>
+            <a:endParaRPr lang="en-US" sz="1600" dirty="0"/>
           </a:p>
         </p:txBody>
       </p:sp>
@@ -16834,15 +18046,135 @@
                 <a:ea typeface="Calibri" pitchFamily="34" charset="-122"/>
                 <a:cs typeface="Calibri" pitchFamily="34" charset="-120"/>
               </a:rPr>
-              <a:t>HOMEWORK</a:t>
+              <a:t>BOARD SUMMARY</a:t>
             </a:r>
             <a:endParaRPr lang="en-US" sz="1400" dirty="0"/>
+          </a:p>
+        </p:txBody>
+      </p:sp>
+      <p:sp>
+        <p:nvSpPr>
+          <p:cNvPr id="3" name="Text 1"/>
+          <p:cNvSpPr/>
+          <p:nvPr/>
+        </p:nvSpPr>
+        <p:spPr>
+          <a:xfrm>
+            <a:off x="365760" y="1005840"/>
+            <a:ext cx="11460175" cy="731520"/>
+          </a:xfrm>
+          <a:prstGeom prst="rect">
+            <a:avLst/>
+          </a:prstGeom>
+          <a:noFill/>
+          <a:ln/>
+        </p:spPr>
+        <p:txBody>
+          <a:bodyPr wrap="square" lIns="0" tIns="0" rIns="0" bIns="0" rtlCol="0" anchor="ctr">
+            <a:normAutofit/>
+          </a:bodyPr>
+          <a:lstStyle/>
+          <a:p>
+            <a:pPr algn="ctr" indent="0" marL="0">
+              <a:buNone/>
+            </a:pPr>
+            <a:r>
+              <a:rPr lang="en-US" sz="3600" b="1" dirty="0">
+                <a:solidFill>
+                  <a:srgbClr val="990011"/>
+                </a:solidFill>
+                <a:latin typeface="Times New Roman" pitchFamily="34" charset="0"/>
+                <a:ea typeface="Times New Roman" pitchFamily="34" charset="-122"/>
+                <a:cs typeface="Times New Roman" pitchFamily="34" charset="-120"/>
+              </a:rPr>
+              <a:t>3. Distribution of Landmasses and Water Bodies</a:t>
+            </a:r>
+            <a:endParaRPr lang="en-US" sz="3600" dirty="0"/>
+          </a:p>
+        </p:txBody>
+      </p:sp>
+      <p:sp>
+        <p:nvSpPr>
+          <p:cNvPr id="4" name="Text 2"/>
+          <p:cNvSpPr/>
+          <p:nvPr/>
+        </p:nvSpPr>
+        <p:spPr>
+          <a:xfrm>
+            <a:off x="365760" y="1783080"/>
+            <a:ext cx="4846320" cy="4617720"/>
+          </a:xfrm>
+          <a:prstGeom prst="rect">
+            <a:avLst/>
+          </a:prstGeom>
+          <a:noFill/>
+          <a:ln/>
+        </p:spPr>
+        <p:txBody>
+          <a:bodyPr wrap="square" lIns="0" tIns="0" rIns="0" bIns="0" rtlCol="0" anchor="t"/>
+          <a:lstStyle/>
+          <a:p>
+            <a:pPr algn="l" indent="0" marL="0">
+              <a:spcAft>
+                <a:spcPts val="800"/>
+              </a:spcAft>
+              <a:buNone/>
+            </a:pPr>
+            <a:r>
+              <a:rPr lang="en-US" sz="3600" i="1" dirty="0">
+                <a:solidFill>
+                  <a:srgbClr val="111111"/>
+                </a:solidFill>
+                <a:latin typeface="Times New Roman" pitchFamily="34" charset="0"/>
+                <a:ea typeface="Times New Roman" pitchFamily="34" charset="-122"/>
+                <a:cs typeface="Times New Roman" pitchFamily="34" charset="-120"/>
+              </a:rPr>
+              <a:t>Land and water are distributed as follows:</a:t>
+            </a:r>
+            <a:endParaRPr lang="en-US" sz="3600" dirty="0"/>
+          </a:p>
+          <a:p>
+            <a:pPr algn="l" indent="0" marL="0">
+              <a:spcAft>
+                <a:spcPts val="800"/>
+              </a:spcAft>
+              <a:buNone/>
+            </a:pPr>
+            <a:r>
+              <a:rPr lang="en-US" sz="3600" b="1" dirty="0">
+                <a:solidFill>
+                  <a:srgbClr val="111111"/>
+                </a:solidFill>
+                <a:latin typeface="Times New Roman" pitchFamily="34" charset="0"/>
+                <a:ea typeface="Times New Roman" pitchFamily="34" charset="-122"/>
+                <a:cs typeface="Times New Roman" pitchFamily="34" charset="-120"/>
+              </a:rPr>
+              <a:t>Continents: </a:t>
+            </a:r>
+            <a:pPr algn="l" indent="0" marL="0">
+              <a:spcAft>
+                <a:spcPts val="800"/>
+              </a:spcAft>
+              <a:buNone/>
+            </a:pPr>
+            <a:r>
+              <a:rPr lang="en-US" sz="3600" dirty="0">
+                <a:solidFill>
+                  <a:srgbClr val="111111"/>
+                </a:solidFill>
+                <a:latin typeface="Times New Roman" pitchFamily="34" charset="0"/>
+                <a:ea typeface="Times New Roman" pitchFamily="34" charset="-122"/>
+                <a:cs typeface="Times New Roman" pitchFamily="34" charset="-120"/>
+              </a:rPr>
+              <a:t>The seven continents are Asia, Africa, North America, South America, Antarctica, Europe and Australia.</a:t>
+            </a:r>
+            <a:endParaRPr lang="en-US" sz="3600" dirty="0"/>
           </a:p>
         </p:txBody>
       </p:sp>
       <p:pic>
         <p:nvPicPr>
-          <p:cNvPr id="3" name="Image 0" descr="/home/claude/f4/img/minesec_sheet.png">    </p:cNvPr>
+          <p:cNvPr id="5" name="Image 0" descr="/home/claude/f4/img/v2/continents_oceans_big.png">    </p:cNvPr>
           <p:cNvPicPr>
             <a:picLocks noChangeAspect="1"/>
           </p:cNvPicPr>
@@ -16856,8 +18188,8 @@
         </p:blipFill>
         <p:spPr>
           <a:xfrm>
-            <a:off x="0" y="658368"/>
-            <a:ext cx="5120640" cy="5833872"/>
+            <a:off x="5349240" y="2513450"/>
+            <a:ext cx="6659575" cy="2809508"/>
           </a:xfrm>
           <a:prstGeom prst="rect">
             <a:avLst/>
@@ -16866,14 +18198,14 @@
       </p:pic>
       <p:sp>
         <p:nvSpPr>
-          <p:cNvPr id="4" name="Text 1"/>
+          <p:cNvPr id="6" name="Text 3"/>
           <p:cNvSpPr/>
           <p:nvPr/>
         </p:nvSpPr>
         <p:spPr>
           <a:xfrm>
-            <a:off x="5349240" y="1005840"/>
-            <a:ext cx="6522415" cy="731520"/>
+            <a:off x="5349240" y="6089904"/>
+            <a:ext cx="6659575" cy="347472"/>
           </a:xfrm>
           <a:prstGeom prst="rect">
             <a:avLst/>
@@ -16882,68 +18214,24 @@
           <a:ln/>
         </p:spPr>
         <p:txBody>
-          <a:bodyPr wrap="square" lIns="0" tIns="0" rIns="0" bIns="0" rtlCol="0" anchor="ctr">
-            <a:normAutofit/>
-          </a:bodyPr>
+          <a:bodyPr wrap="square" lIns="0" tIns="0" rIns="0" bIns="0" rtlCol="0" anchor="ctr"/>
           <a:lstStyle/>
           <a:p>
             <a:pPr algn="ctr" indent="0" marL="0">
               <a:buNone/>
             </a:pPr>
             <a:r>
-              <a:rPr lang="en-US" sz="3600" b="1" dirty="0">
-                <a:solidFill>
-                  <a:srgbClr val="990011"/>
+              <a:rPr lang="en-US" sz="1600" i="1" dirty="0">
+                <a:solidFill>
+                  <a:srgbClr val="555555"/>
                 </a:solidFill>
                 <a:latin typeface="Times New Roman" pitchFamily="34" charset="0"/>
                 <a:ea typeface="Times New Roman" pitchFamily="34" charset="-122"/>
                 <a:cs typeface="Times New Roman" pitchFamily="34" charset="-120"/>
               </a:rPr>
-              <a:t>Homework</a:t>
-            </a:r>
-            <a:endParaRPr lang="en-US" sz="3600" dirty="0"/>
-          </a:p>
-        </p:txBody>
-      </p:sp>
-      <p:sp>
-        <p:nvSpPr>
-          <p:cNvPr id="5" name="Text 2"/>
-          <p:cNvSpPr/>
-          <p:nvPr/>
-        </p:nvSpPr>
-        <p:spPr>
-          <a:xfrm>
-            <a:off x="5349240" y="1783080"/>
-            <a:ext cx="6522415" cy="4663440"/>
-          </a:xfrm>
-          <a:prstGeom prst="rect">
-            <a:avLst/>
-          </a:prstGeom>
-          <a:noFill/>
-          <a:ln/>
-        </p:spPr>
-        <p:txBody>
-          <a:bodyPr wrap="square" lIns="0" tIns="0" rIns="0" bIns="0" rtlCol="0" anchor="t"/>
-          <a:lstStyle/>
-          <a:p>
-            <a:pPr algn="l" indent="0" marL="0">
-              <a:spcAft>
-                <a:spcPts val="800"/>
-              </a:spcAft>
-              <a:buNone/>
-            </a:pPr>
-            <a:r>
-              <a:rPr lang="en-US" sz="4000" dirty="0">
-                <a:solidFill>
-                  <a:srgbClr val="111111"/>
-                </a:solidFill>
-                <a:latin typeface="Times New Roman" pitchFamily="34" charset="0"/>
-                <a:ea typeface="Times New Roman" pitchFamily="34" charset="-122"/>
-                <a:cs typeface="Times New Roman" pitchFamily="34" charset="-120"/>
-              </a:rPr>
-              <a:t>On a map of the world in your atlas, find Cameroon, the Equator and the Greenwich Meridian.</a:t>
-            </a:r>
-            <a:endParaRPr lang="en-US" sz="4000" dirty="0"/>
+              <a:t>Illustration: the continents and oceans</a:t>
+            </a:r>
+            <a:endParaRPr lang="en-US" sz="1600" dirty="0"/>
           </a:p>
         </p:txBody>
       </p:sp>
@@ -17053,7 +18341,7 @@
                 <a:ea typeface="Calibri" pitchFamily="34" charset="-122"/>
                 <a:cs typeface="Calibri" pitchFamily="34" charset="-120"/>
               </a:rPr>
-              <a:t>NEXT LESSON</a:t>
+              <a:t>BOARD SUMMARY</a:t>
             </a:r>
             <a:endParaRPr lang="en-US" sz="1400" dirty="0"/>
           </a:p>
@@ -17118,7 +18406,7 @@
                 <a:ea typeface="Times New Roman" pitchFamily="34" charset="-122"/>
                 <a:cs typeface="Times New Roman" pitchFamily="34" charset="-120"/>
               </a:rPr>
-              <a:t>Next Lesson</a:t>
+              <a:t>3. Distribution of Landmasses and Water Bodies</a:t>
             </a:r>
             <a:endParaRPr lang="en-US" sz="3600" dirty="0"/>
           </a:p>
@@ -17142,10 +18430,10 @@
           <a:ln/>
         </p:spPr>
         <p:txBody>
-          <a:bodyPr wrap="square" lIns="0" tIns="0" rIns="0" bIns="0" rtlCol="0" anchor="ctr"/>
-          <a:lstStyle/>
-          <a:p>
-            <a:pPr algn="ctr" indent="0" marL="0">
+          <a:bodyPr wrap="square" lIns="0" tIns="0" rIns="0" bIns="0" rtlCol="0" anchor="t"/>
+          <a:lstStyle/>
+          <a:p>
+            <a:pPr algn="l" indent="0" marL="0">
               <a:spcAft>
                 <a:spcPts val="800"/>
               </a:spcAft>
@@ -17160,27 +18448,24 @@
                 <a:ea typeface="Times New Roman" pitchFamily="34" charset="-122"/>
                 <a:cs typeface="Times New Roman" pitchFamily="34" charset="-120"/>
               </a:rPr>
-              <a:t>Our next lesson will be on:</a:t>
-            </a:r>
-            <a:endParaRPr lang="en-US" sz="4000" dirty="0"/>
-          </a:p>
-          <a:p>
-            <a:pPr algn="ctr" indent="0" marL="0">
+              <a:t>Oceans: </a:t>
+            </a:r>
+            <a:pPr algn="l" indent="0" marL="0">
               <a:spcAft>
                 <a:spcPts val="800"/>
               </a:spcAft>
               <a:buNone/>
             </a:pPr>
             <a:r>
-              <a:rPr lang="en-US" sz="4000" b="1" dirty="0">
-                <a:solidFill>
-                  <a:srgbClr val="990011"/>
+              <a:rPr lang="en-US" sz="4000" dirty="0">
+                <a:solidFill>
+                  <a:srgbClr val="111111"/>
                 </a:solidFill>
                 <a:latin typeface="Times New Roman" pitchFamily="34" charset="0"/>
                 <a:ea typeface="Times New Roman" pitchFamily="34" charset="-122"/>
                 <a:cs typeface="Times New Roman" pitchFamily="34" charset="-120"/>
               </a:rPr>
-              <a:t>Practical Work 1: Representation of the Earth's Shape and Size</a:t>
+              <a:t>The five oceans are the Pacific, the Atlantic, the Indian, the Southern and the Arctic Oceans.</a:t>
             </a:r>
             <a:endParaRPr lang="en-US" sz="4000" dirty="0"/>
           </a:p>
@@ -17292,6 +18577,2355 @@
                 <a:ea typeface="Calibri" pitchFamily="34" charset="-122"/>
                 <a:cs typeface="Calibri" pitchFamily="34" charset="-120"/>
               </a:rPr>
+              <a:t>BOARD SUMMARY</a:t>
+            </a:r>
+            <a:endParaRPr lang="en-US" sz="1400" dirty="0"/>
+          </a:p>
+        </p:txBody>
+      </p:sp>
+      <p:sp>
+        <p:nvSpPr>
+          <p:cNvPr id="3" name="Text 1"/>
+          <p:cNvSpPr/>
+          <p:nvPr/>
+        </p:nvSpPr>
+        <p:spPr>
+          <a:xfrm>
+            <a:off x="365760" y="1005840"/>
+            <a:ext cx="11460175" cy="731520"/>
+          </a:xfrm>
+          <a:prstGeom prst="rect">
+            <a:avLst/>
+          </a:prstGeom>
+          <a:noFill/>
+          <a:ln/>
+        </p:spPr>
+        <p:txBody>
+          <a:bodyPr wrap="square" lIns="0" tIns="0" rIns="0" bIns="0" rtlCol="0" anchor="ctr">
+            <a:normAutofit/>
+          </a:bodyPr>
+          <a:lstStyle/>
+          <a:p>
+            <a:pPr algn="ctr" indent="0" marL="0">
+              <a:buNone/>
+            </a:pPr>
+            <a:r>
+              <a:rPr lang="en-US" sz="3600" b="1" dirty="0">
+                <a:solidFill>
+                  <a:srgbClr val="990011"/>
+                </a:solidFill>
+                <a:latin typeface="Times New Roman" pitchFamily="34" charset="0"/>
+                <a:ea typeface="Times New Roman" pitchFamily="34" charset="-122"/>
+                <a:cs typeface="Times New Roman" pitchFamily="34" charset="-120"/>
+              </a:rPr>
+              <a:t>3. Distribution of Landmasses and Water Bodies</a:t>
+            </a:r>
+            <a:endParaRPr lang="en-US" sz="3600" dirty="0"/>
+          </a:p>
+        </p:txBody>
+      </p:sp>
+      <p:sp>
+        <p:nvSpPr>
+          <p:cNvPr id="4" name="Text 2"/>
+          <p:cNvSpPr/>
+          <p:nvPr/>
+        </p:nvSpPr>
+        <p:spPr>
+          <a:xfrm>
+            <a:off x="365760" y="1783080"/>
+            <a:ext cx="4846320" cy="4617720"/>
+          </a:xfrm>
+          <a:prstGeom prst="rect">
+            <a:avLst/>
+          </a:prstGeom>
+          <a:noFill/>
+          <a:ln/>
+        </p:spPr>
+        <p:txBody>
+          <a:bodyPr wrap="square" lIns="0" tIns="0" rIns="0" bIns="0" rtlCol="0" anchor="t"/>
+          <a:lstStyle/>
+          <a:p>
+            <a:pPr algn="l" indent="0" marL="0">
+              <a:spcAft>
+                <a:spcPts val="800"/>
+              </a:spcAft>
+              <a:buNone/>
+            </a:pPr>
+            <a:r>
+              <a:rPr lang="en-US" sz="3600" b="1" dirty="0">
+                <a:solidFill>
+                  <a:srgbClr val="111111"/>
+                </a:solidFill>
+                <a:latin typeface="Times New Roman" pitchFamily="34" charset="0"/>
+                <a:ea typeface="Times New Roman" pitchFamily="34" charset="-122"/>
+                <a:cs typeface="Times New Roman" pitchFamily="34" charset="-120"/>
+              </a:rPr>
+              <a:t>Share of land and water: </a:t>
+            </a:r>
+            <a:pPr algn="l" indent="0" marL="0">
+              <a:spcAft>
+                <a:spcPts val="800"/>
+              </a:spcAft>
+              <a:buNone/>
+            </a:pPr>
+            <a:r>
+              <a:rPr lang="en-US" sz="3600" dirty="0">
+                <a:solidFill>
+                  <a:srgbClr val="111111"/>
+                </a:solidFill>
+                <a:latin typeface="Times New Roman" pitchFamily="34" charset="0"/>
+                <a:ea typeface="Times New Roman" pitchFamily="34" charset="-122"/>
+                <a:cs typeface="Times New Roman" pitchFamily="34" charset="-120"/>
+              </a:rPr>
+              <a:t>Water covers about 71 % of the Earth, and land covers about 29 %.</a:t>
+            </a:r>
+            <a:endParaRPr lang="en-US" sz="3600" dirty="0"/>
+          </a:p>
+        </p:txBody>
+      </p:sp>
+      <p:pic>
+        <p:nvPicPr>
+          <p:cNvPr id="5" name="Image 0" descr="/home/claude/f4/img/v2/land_water_big.png">    </p:cNvPr>
+          <p:cNvPicPr>
+            <a:picLocks noChangeAspect="1"/>
+          </p:cNvPicPr>
+          <p:nvPr/>
+        </p:nvPicPr>
+        <p:blipFill>
+          <a:blip r:embed="rId1"/>
+          <a:stretch>
+            <a:fillRect/>
+          </a:stretch>
+        </p:blipFill>
+        <p:spPr>
+          <a:xfrm>
+            <a:off x="5349240" y="2565478"/>
+            <a:ext cx="6659575" cy="2705452"/>
+          </a:xfrm>
+          <a:prstGeom prst="rect">
+            <a:avLst/>
+          </a:prstGeom>
+        </p:spPr>
+      </p:pic>
+      <p:sp>
+        <p:nvSpPr>
+          <p:cNvPr id="6" name="Text 3"/>
+          <p:cNvSpPr/>
+          <p:nvPr/>
+        </p:nvSpPr>
+        <p:spPr>
+          <a:xfrm>
+            <a:off x="5349240" y="6089904"/>
+            <a:ext cx="6659575" cy="347472"/>
+          </a:xfrm>
+          <a:prstGeom prst="rect">
+            <a:avLst/>
+          </a:prstGeom>
+          <a:noFill/>
+          <a:ln/>
+        </p:spPr>
+        <p:txBody>
+          <a:bodyPr wrap="square" lIns="0" tIns="0" rIns="0" bIns="0" rtlCol="0" anchor="ctr"/>
+          <a:lstStyle/>
+          <a:p>
+            <a:pPr algn="ctr" indent="0" marL="0">
+              <a:buNone/>
+            </a:pPr>
+            <a:r>
+              <a:rPr lang="en-US" sz="1600" i="1" dirty="0">
+                <a:solidFill>
+                  <a:srgbClr val="555555"/>
+                </a:solidFill>
+                <a:latin typeface="Times New Roman" pitchFamily="34" charset="0"/>
+                <a:ea typeface="Times New Roman" pitchFamily="34" charset="-122"/>
+                <a:cs typeface="Times New Roman" pitchFamily="34" charset="-120"/>
+              </a:rPr>
+              <a:t>Illustration: water and land on the Earth</a:t>
+            </a:r>
+            <a:endParaRPr lang="en-US" sz="1600" dirty="0"/>
+          </a:p>
+        </p:txBody>
+      </p:sp>
+      <p:sp>
+        <p:nvSpPr>
+          <p:cNvPr id="25" name="Slide Number Placeholder 0"/>
+          <p:cNvSpPr>
+            <a:spLocks noGrp="1"/>
+          </p:cNvSpPr>
+          <p:nvPr>
+            <p:ph type="sldNum" sz="quarter" idx="4294967295"/>
+          </p:nvPr>
+        </p:nvSpPr>
+        <p:spPr>
+          <a:xfrm>
+            <a:off x="27432" y="91440"/>
+            <a:ext cx="585216" cy="475488"/>
+          </a:xfrm>
+          <a:prstGeom prst="rect">
+            <a:avLst/>
+          </a:prstGeom>
+          <a:extLst>
+            <a:ext uri="{C572A759-6A51-4108-AA02-DFA0A04FC94B}">
+              <ma14:wrappingTextBoxFlag xmlns:ma14="http://schemas.microsoft.com/office/mac/drawingml/2011/main" val="0"/>
+            </a:ext>
+          </a:extLst>
+        </p:spPr>
+        <p:txBody>
+          <a:bodyPr/>
+          <a:lstStyle>
+            <a:lvl1pPr>
+              <a:defRPr sz="2000">
+                <a:solidFill>
+                  <a:srgbClr val="FFFFFF"/>
+                </a:solidFill>
+                <a:latin typeface="Calibri"/>
+                <a:ea typeface="Calibri"/>
+                <a:cs typeface="Calibri"/>
+              </a:defRPr>
+            </a:lvl1pPr>
+          </a:lstStyle>
+          <a:p>
+            <a:pPr algn="ctr"/>
+            <a:fld id="{F7021451-1387-4CA6-816F-3879F97B5CBC}" type="slidenum">
+              <a:rPr b="1" lang="en-US"/>
+              <a:t>49</a:t>
+            </a:fld>
+            <a:endParaRPr lang="en-US"/>
+          </a:p>
+        </p:txBody>
+      </p:sp>
+    </p:spTree>
+  </p:cSld>
+  <p:clrMapOvr>
+    <a:masterClrMapping/>
+  </p:clrMapOvr>
+</p:sld>
+</file>
+
+<file path=ppt/slides/slide5.xml><?xml version="1.0" encoding="utf-8"?>
+<p:sld xmlns:a="http://schemas.openxmlformats.org/drawingml/2006/main" xmlns:r="http://schemas.openxmlformats.org/officeDocument/2006/relationships" xmlns:p="http://schemas.openxmlformats.org/presentationml/2006/main">
+  <p:cSld name="Slide 5">
+    <p:spTree>
+      <p:nvGrpSpPr>
+        <p:cNvPr id="1" name=""/>
+        <p:cNvGrpSpPr/>
+        <p:nvPr/>
+      </p:nvGrpSpPr>
+      <p:grpSpPr>
+        <a:xfrm>
+          <a:off x="0" y="0"/>
+          <a:ext cx="0" cy="0"/>
+          <a:chOff x="0" y="0"/>
+          <a:chExt cx="0" cy="0"/>
+        </a:xfrm>
+      </p:grpSpPr>
+      <p:sp>
+        <p:nvSpPr>
+          <p:cNvPr id="2" name="Text 0"/>
+          <p:cNvSpPr/>
+          <p:nvPr/>
+        </p:nvSpPr>
+        <p:spPr>
+          <a:xfrm>
+            <a:off x="457200" y="713232"/>
+            <a:ext cx="11368735" cy="274320"/>
+          </a:xfrm>
+          <a:prstGeom prst="rect">
+            <a:avLst/>
+          </a:prstGeom>
+          <a:noFill/>
+          <a:ln/>
+        </p:spPr>
+        <p:txBody>
+          <a:bodyPr wrap="square" lIns="0" tIns="0" rIns="0" bIns="0" rtlCol="0" anchor="ctr"/>
+          <a:lstStyle/>
+          <a:p>
+            <a:pPr algn="r" indent="0" marL="0">
+              <a:buNone/>
+            </a:pPr>
+            <a:r>
+              <a:rPr lang="en-US" sz="1400" b="1" dirty="0">
+                <a:solidFill>
+                  <a:srgbClr val="1C3F6E"/>
+                </a:solidFill>
+                <a:latin typeface="Calibri" pitchFamily="34" charset="0"/>
+                <a:ea typeface="Calibri" pitchFamily="34" charset="-122"/>
+                <a:cs typeface="Calibri" pitchFamily="34" charset="-120"/>
+              </a:rPr>
+              <a:t>HOMEWORK CORRECTION</a:t>
+            </a:r>
+            <a:endParaRPr lang="en-US" sz="1400" dirty="0"/>
+          </a:p>
+        </p:txBody>
+      </p:sp>
+      <p:pic>
+        <p:nvPicPr>
+          <p:cNvPr id="3" name="Image 0" descr="/home/claude/f4/img/minesec_sheet.png">    </p:cNvPr>
+          <p:cNvPicPr>
+            <a:picLocks noChangeAspect="1"/>
+          </p:cNvPicPr>
+          <p:nvPr/>
+        </p:nvPicPr>
+        <p:blipFill>
+          <a:blip r:embed="rId1"/>
+          <a:stretch>
+            <a:fillRect/>
+          </a:stretch>
+        </p:blipFill>
+        <p:spPr>
+          <a:xfrm>
+            <a:off x="0" y="658368"/>
+            <a:ext cx="5120640" cy="5833872"/>
+          </a:xfrm>
+          <a:prstGeom prst="rect">
+            <a:avLst/>
+          </a:prstGeom>
+        </p:spPr>
+      </p:pic>
+      <p:sp>
+        <p:nvSpPr>
+          <p:cNvPr id="4" name="Text 1"/>
+          <p:cNvSpPr/>
+          <p:nvPr/>
+        </p:nvSpPr>
+        <p:spPr>
+          <a:xfrm>
+            <a:off x="5349240" y="1005840"/>
+            <a:ext cx="6522415" cy="731520"/>
+          </a:xfrm>
+          <a:prstGeom prst="rect">
+            <a:avLst/>
+          </a:prstGeom>
+          <a:noFill/>
+          <a:ln/>
+        </p:spPr>
+        <p:txBody>
+          <a:bodyPr wrap="square" lIns="0" tIns="0" rIns="0" bIns="0" rtlCol="0" anchor="ctr">
+            <a:normAutofit/>
+          </a:bodyPr>
+          <a:lstStyle/>
+          <a:p>
+            <a:pPr algn="ctr" indent="0" marL="0">
+              <a:buNone/>
+            </a:pPr>
+            <a:r>
+              <a:rPr lang="en-US" sz="3600" b="1" dirty="0">
+                <a:solidFill>
+                  <a:srgbClr val="990011"/>
+                </a:solidFill>
+                <a:latin typeface="Times New Roman" pitchFamily="34" charset="0"/>
+                <a:ea typeface="Times New Roman" pitchFamily="34" charset="-122"/>
+                <a:cs typeface="Times New Roman" pitchFamily="34" charset="-120"/>
+              </a:rPr>
+              <a:t>Correction: Possible Answer</a:t>
+            </a:r>
+            <a:endParaRPr lang="en-US" sz="3600" dirty="0"/>
+          </a:p>
+        </p:txBody>
+      </p:sp>
+      <p:sp>
+        <p:nvSpPr>
+          <p:cNvPr id="5" name="Text 2"/>
+          <p:cNvSpPr/>
+          <p:nvPr/>
+        </p:nvSpPr>
+        <p:spPr>
+          <a:xfrm>
+            <a:off x="5349240" y="1783080"/>
+            <a:ext cx="6522415" cy="4663440"/>
+          </a:xfrm>
+          <a:prstGeom prst="rect">
+            <a:avLst/>
+          </a:prstGeom>
+          <a:noFill/>
+          <a:ln/>
+        </p:spPr>
+        <p:txBody>
+          <a:bodyPr wrap="square" lIns="0" tIns="0" rIns="0" bIns="0" rtlCol="0" anchor="t"/>
+          <a:lstStyle/>
+          <a:p>
+            <a:pPr algn="l" indent="0" marL="0">
+              <a:spcAft>
+                <a:spcPts val="800"/>
+              </a:spcAft>
+              <a:buNone/>
+            </a:pPr>
+            <a:r>
+              <a:rPr lang="en-US" sz="4000" dirty="0">
+                <a:solidFill>
+                  <a:srgbClr val="111111"/>
+                </a:solidFill>
+                <a:latin typeface="Times New Roman" pitchFamily="34" charset="0"/>
+                <a:ea typeface="Times New Roman" pitchFamily="34" charset="-122"/>
+                <a:cs typeface="Times New Roman" pitchFamily="34" charset="-120"/>
+              </a:rPr>
+              <a:t>Physical features: a hill, the River Benue, trees and grass. Human activities: trading in the market, moto-taxi transport, farming.</a:t>
+            </a:r>
+            <a:endParaRPr lang="en-US" sz="4000" dirty="0"/>
+          </a:p>
+        </p:txBody>
+      </p:sp>
+      <p:sp>
+        <p:nvSpPr>
+          <p:cNvPr id="25" name="Slide Number Placeholder 0"/>
+          <p:cNvSpPr>
+            <a:spLocks noGrp="1"/>
+          </p:cNvSpPr>
+          <p:nvPr>
+            <p:ph type="sldNum" sz="quarter" idx="4294967295"/>
+          </p:nvPr>
+        </p:nvSpPr>
+        <p:spPr>
+          <a:xfrm>
+            <a:off x="27432" y="91440"/>
+            <a:ext cx="585216" cy="475488"/>
+          </a:xfrm>
+          <a:prstGeom prst="rect">
+            <a:avLst/>
+          </a:prstGeom>
+          <a:extLst>
+            <a:ext uri="{C572A759-6A51-4108-AA02-DFA0A04FC94B}">
+              <ma14:wrappingTextBoxFlag xmlns:ma14="http://schemas.microsoft.com/office/mac/drawingml/2011/main" val="0"/>
+            </a:ext>
+          </a:extLst>
+        </p:spPr>
+        <p:txBody>
+          <a:bodyPr/>
+          <a:lstStyle>
+            <a:lvl1pPr>
+              <a:defRPr sz="2000">
+                <a:solidFill>
+                  <a:srgbClr val="FFFFFF"/>
+                </a:solidFill>
+                <a:latin typeface="Calibri"/>
+                <a:ea typeface="Calibri"/>
+                <a:cs typeface="Calibri"/>
+              </a:defRPr>
+            </a:lvl1pPr>
+          </a:lstStyle>
+          <a:p>
+            <a:pPr algn="ctr"/>
+            <a:fld id="{F7021451-1387-4CA6-816F-3879F97B5CBC}" type="slidenum">
+              <a:rPr b="1" lang="en-US"/>
+              <a:t>5</a:t>
+            </a:fld>
+            <a:endParaRPr lang="en-US"/>
+          </a:p>
+        </p:txBody>
+      </p:sp>
+    </p:spTree>
+  </p:cSld>
+  <p:clrMapOvr>
+    <a:masterClrMapping/>
+  </p:clrMapOvr>
+</p:sld>
+</file>
+
+<file path=ppt/slides/slide50.xml><?xml version="1.0" encoding="utf-8"?>
+<p:sld xmlns:a="http://schemas.openxmlformats.org/drawingml/2006/main" xmlns:r="http://schemas.openxmlformats.org/officeDocument/2006/relationships" xmlns:p="http://schemas.openxmlformats.org/presentationml/2006/main">
+  <p:cSld name="Slide 50">
+    <p:spTree>
+      <p:nvGrpSpPr>
+        <p:cNvPr id="1" name=""/>
+        <p:cNvGrpSpPr/>
+        <p:nvPr/>
+      </p:nvGrpSpPr>
+      <p:grpSpPr>
+        <a:xfrm>
+          <a:off x="0" y="0"/>
+          <a:ext cx="0" cy="0"/>
+          <a:chOff x="0" y="0"/>
+          <a:chExt cx="0" cy="0"/>
+        </a:xfrm>
+      </p:grpSpPr>
+      <p:sp>
+        <p:nvSpPr>
+          <p:cNvPr id="2" name="Text 0"/>
+          <p:cNvSpPr/>
+          <p:nvPr/>
+        </p:nvSpPr>
+        <p:spPr>
+          <a:xfrm>
+            <a:off x="457200" y="713232"/>
+            <a:ext cx="11368735" cy="274320"/>
+          </a:xfrm>
+          <a:prstGeom prst="rect">
+            <a:avLst/>
+          </a:prstGeom>
+          <a:noFill/>
+          <a:ln/>
+        </p:spPr>
+        <p:txBody>
+          <a:bodyPr wrap="square" lIns="0" tIns="0" rIns="0" bIns="0" rtlCol="0" anchor="ctr"/>
+          <a:lstStyle/>
+          <a:p>
+            <a:pPr algn="r" indent="0" marL="0">
+              <a:buNone/>
+            </a:pPr>
+            <a:r>
+              <a:rPr lang="en-US" sz="1400" b="1" dirty="0">
+                <a:solidFill>
+                  <a:srgbClr val="1C3F6E"/>
+                </a:solidFill>
+                <a:latin typeface="Calibri" pitchFamily="34" charset="0"/>
+                <a:ea typeface="Calibri" pitchFamily="34" charset="-122"/>
+                <a:cs typeface="Calibri" pitchFamily="34" charset="-120"/>
+              </a:rPr>
+              <a:t>BOARD SUMMARY</a:t>
+            </a:r>
+            <a:endParaRPr lang="en-US" sz="1400" dirty="0"/>
+          </a:p>
+        </p:txBody>
+      </p:sp>
+      <p:pic>
+        <p:nvPicPr>
+          <p:cNvPr id="3" name="Image 0" descr="/home/claude/f4/img/minesec_sheet.png">    </p:cNvPr>
+          <p:cNvPicPr>
+            <a:picLocks noChangeAspect="1"/>
+          </p:cNvPicPr>
+          <p:nvPr/>
+        </p:nvPicPr>
+        <p:blipFill>
+          <a:blip r:embed="rId1"/>
+          <a:stretch>
+            <a:fillRect/>
+          </a:stretch>
+        </p:blipFill>
+        <p:spPr>
+          <a:xfrm>
+            <a:off x="0" y="658368"/>
+            <a:ext cx="5120640" cy="5833872"/>
+          </a:xfrm>
+          <a:prstGeom prst="rect">
+            <a:avLst/>
+          </a:prstGeom>
+        </p:spPr>
+      </p:pic>
+      <p:sp>
+        <p:nvSpPr>
+          <p:cNvPr id="4" name="Text 1"/>
+          <p:cNvSpPr/>
+          <p:nvPr/>
+        </p:nvSpPr>
+        <p:spPr>
+          <a:xfrm>
+            <a:off x="5349240" y="1005840"/>
+            <a:ext cx="6522415" cy="731520"/>
+          </a:xfrm>
+          <a:prstGeom prst="rect">
+            <a:avLst/>
+          </a:prstGeom>
+          <a:noFill/>
+          <a:ln/>
+        </p:spPr>
+        <p:txBody>
+          <a:bodyPr wrap="square" lIns="0" tIns="0" rIns="0" bIns="0" rtlCol="0" anchor="ctr">
+            <a:normAutofit/>
+          </a:bodyPr>
+          <a:lstStyle/>
+          <a:p>
+            <a:pPr algn="ctr" indent="0" marL="0">
+              <a:buNone/>
+            </a:pPr>
+            <a:r>
+              <a:rPr lang="en-US" sz="3600" b="1" dirty="0">
+                <a:solidFill>
+                  <a:srgbClr val="990011"/>
+                </a:solidFill>
+                <a:latin typeface="Times New Roman" pitchFamily="34" charset="0"/>
+                <a:ea typeface="Times New Roman" pitchFamily="34" charset="-122"/>
+                <a:cs typeface="Times New Roman" pitchFamily="34" charset="-120"/>
+              </a:rPr>
+              <a:t>3. Distribution of Landmasses and Water Bodies</a:t>
+            </a:r>
+            <a:endParaRPr lang="en-US" sz="3600" dirty="0"/>
+          </a:p>
+        </p:txBody>
+      </p:sp>
+      <p:sp>
+        <p:nvSpPr>
+          <p:cNvPr id="5" name="Text 2"/>
+          <p:cNvSpPr/>
+          <p:nvPr/>
+        </p:nvSpPr>
+        <p:spPr>
+          <a:xfrm>
+            <a:off x="5349240" y="1783080"/>
+            <a:ext cx="6522415" cy="4663440"/>
+          </a:xfrm>
+          <a:prstGeom prst="rect">
+            <a:avLst/>
+          </a:prstGeom>
+          <a:noFill/>
+          <a:ln/>
+        </p:spPr>
+        <p:txBody>
+          <a:bodyPr wrap="square" lIns="0" tIns="0" rIns="0" bIns="0" rtlCol="0" anchor="t"/>
+          <a:lstStyle/>
+          <a:p>
+            <a:pPr algn="l" indent="0" marL="0">
+              <a:spcAft>
+                <a:spcPts val="800"/>
+              </a:spcAft>
+              <a:buNone/>
+            </a:pPr>
+            <a:r>
+              <a:rPr lang="en-US" sz="4000" b="1" dirty="0">
+                <a:solidFill>
+                  <a:srgbClr val="111111"/>
+                </a:solidFill>
+                <a:latin typeface="Times New Roman" pitchFamily="34" charset="0"/>
+                <a:ea typeface="Times New Roman" pitchFamily="34" charset="-122"/>
+                <a:cs typeface="Times New Roman" pitchFamily="34" charset="-120"/>
+              </a:rPr>
+              <a:t>Hemispheres: </a:t>
+            </a:r>
+            <a:pPr algn="l" indent="0" marL="0">
+              <a:spcAft>
+                <a:spcPts val="800"/>
+              </a:spcAft>
+              <a:buNone/>
+            </a:pPr>
+            <a:r>
+              <a:rPr lang="en-US" sz="4000" dirty="0">
+                <a:solidFill>
+                  <a:srgbClr val="111111"/>
+                </a:solidFill>
+                <a:latin typeface="Times New Roman" pitchFamily="34" charset="0"/>
+                <a:ea typeface="Times New Roman" pitchFamily="34" charset="-122"/>
+                <a:cs typeface="Times New Roman" pitchFamily="34" charset="-120"/>
+              </a:rPr>
+              <a:t>Most of the land is in the Northern Hemisphere, and most of the water is in the Southern Hemisphere.</a:t>
+            </a:r>
+            <a:endParaRPr lang="en-US" sz="4000" dirty="0"/>
+          </a:p>
+        </p:txBody>
+      </p:sp>
+      <p:sp>
+        <p:nvSpPr>
+          <p:cNvPr id="25" name="Slide Number Placeholder 0"/>
+          <p:cNvSpPr>
+            <a:spLocks noGrp="1"/>
+          </p:cNvSpPr>
+          <p:nvPr>
+            <p:ph type="sldNum" sz="quarter" idx="4294967295"/>
+          </p:nvPr>
+        </p:nvSpPr>
+        <p:spPr>
+          <a:xfrm>
+            <a:off x="27432" y="91440"/>
+            <a:ext cx="585216" cy="475488"/>
+          </a:xfrm>
+          <a:prstGeom prst="rect">
+            <a:avLst/>
+          </a:prstGeom>
+          <a:extLst>
+            <a:ext uri="{C572A759-6A51-4108-AA02-DFA0A04FC94B}">
+              <ma14:wrappingTextBoxFlag xmlns:ma14="http://schemas.microsoft.com/office/mac/drawingml/2011/main" val="0"/>
+            </a:ext>
+          </a:extLst>
+        </p:spPr>
+        <p:txBody>
+          <a:bodyPr/>
+          <a:lstStyle>
+            <a:lvl1pPr>
+              <a:defRPr sz="2000">
+                <a:solidFill>
+                  <a:srgbClr val="FFFFFF"/>
+                </a:solidFill>
+                <a:latin typeface="Calibri"/>
+                <a:ea typeface="Calibri"/>
+                <a:cs typeface="Calibri"/>
+              </a:defRPr>
+            </a:lvl1pPr>
+          </a:lstStyle>
+          <a:p>
+            <a:pPr algn="ctr"/>
+            <a:fld id="{F7021451-1387-4CA6-816F-3879F97B5CBC}" type="slidenum">
+              <a:rPr b="1" lang="en-US"/>
+              <a:t>50</a:t>
+            </a:fld>
+            <a:endParaRPr lang="en-US"/>
+          </a:p>
+        </p:txBody>
+      </p:sp>
+    </p:spTree>
+  </p:cSld>
+  <p:clrMapOvr>
+    <a:masterClrMapping/>
+  </p:clrMapOvr>
+</p:sld>
+</file>
+
+<file path=ppt/slides/slide51.xml><?xml version="1.0" encoding="utf-8"?>
+<p:sld xmlns:a="http://schemas.openxmlformats.org/drawingml/2006/main" xmlns:r="http://schemas.openxmlformats.org/officeDocument/2006/relationships" xmlns:p="http://schemas.openxmlformats.org/presentationml/2006/main">
+  <p:cSld name="Slide 51">
+    <p:spTree>
+      <p:nvGrpSpPr>
+        <p:cNvPr id="1" name=""/>
+        <p:cNvGrpSpPr/>
+        <p:nvPr/>
+      </p:nvGrpSpPr>
+      <p:grpSpPr>
+        <a:xfrm>
+          <a:off x="0" y="0"/>
+          <a:ext cx="0" cy="0"/>
+          <a:chOff x="0" y="0"/>
+          <a:chExt cx="0" cy="0"/>
+        </a:xfrm>
+      </p:grpSpPr>
+      <p:sp>
+        <p:nvSpPr>
+          <p:cNvPr id="2" name="Text 0"/>
+          <p:cNvSpPr/>
+          <p:nvPr/>
+        </p:nvSpPr>
+        <p:spPr>
+          <a:xfrm>
+            <a:off x="457200" y="713232"/>
+            <a:ext cx="11368735" cy="274320"/>
+          </a:xfrm>
+          <a:prstGeom prst="rect">
+            <a:avLst/>
+          </a:prstGeom>
+          <a:noFill/>
+          <a:ln/>
+        </p:spPr>
+        <p:txBody>
+          <a:bodyPr wrap="square" lIns="0" tIns="0" rIns="0" bIns="0" rtlCol="0" anchor="ctr"/>
+          <a:lstStyle/>
+          <a:p>
+            <a:pPr algn="r" indent="0" marL="0">
+              <a:buNone/>
+            </a:pPr>
+            <a:r>
+              <a:rPr lang="en-US" sz="1400" b="1" dirty="0">
+                <a:solidFill>
+                  <a:srgbClr val="1C3F6E"/>
+                </a:solidFill>
+                <a:latin typeface="Calibri" pitchFamily="34" charset="0"/>
+                <a:ea typeface="Calibri" pitchFamily="34" charset="-122"/>
+                <a:cs typeface="Calibri" pitchFamily="34" charset="-120"/>
+              </a:rPr>
+              <a:t>FORMATIVE EVALUATION</a:t>
+            </a:r>
+            <a:endParaRPr lang="en-US" sz="1400" dirty="0"/>
+          </a:p>
+        </p:txBody>
+      </p:sp>
+      <p:pic>
+        <p:nvPicPr>
+          <p:cNvPr id="3" name="Image 0" descr="/home/claude/f4/img/minesec_sheet.png">    </p:cNvPr>
+          <p:cNvPicPr>
+            <a:picLocks noChangeAspect="1"/>
+          </p:cNvPicPr>
+          <p:nvPr/>
+        </p:nvPicPr>
+        <p:blipFill>
+          <a:blip r:embed="rId1"/>
+          <a:stretch>
+            <a:fillRect/>
+          </a:stretch>
+        </p:blipFill>
+        <p:spPr>
+          <a:xfrm>
+            <a:off x="0" y="658368"/>
+            <a:ext cx="5120640" cy="5833872"/>
+          </a:xfrm>
+          <a:prstGeom prst="rect">
+            <a:avLst/>
+          </a:prstGeom>
+        </p:spPr>
+      </p:pic>
+      <p:sp>
+        <p:nvSpPr>
+          <p:cNvPr id="4" name="Text 1"/>
+          <p:cNvSpPr/>
+          <p:nvPr/>
+        </p:nvSpPr>
+        <p:spPr>
+          <a:xfrm>
+            <a:off x="5349240" y="1005840"/>
+            <a:ext cx="6522415" cy="731520"/>
+          </a:xfrm>
+          <a:prstGeom prst="rect">
+            <a:avLst/>
+          </a:prstGeom>
+          <a:noFill/>
+          <a:ln/>
+        </p:spPr>
+        <p:txBody>
+          <a:bodyPr wrap="square" lIns="0" tIns="0" rIns="0" bIns="0" rtlCol="0" anchor="ctr">
+            <a:normAutofit/>
+          </a:bodyPr>
+          <a:lstStyle/>
+          <a:p>
+            <a:pPr algn="ctr" indent="0" marL="0">
+              <a:buNone/>
+            </a:pPr>
+            <a:r>
+              <a:rPr lang="en-US" sz="3600" b="1" dirty="0">
+                <a:solidFill>
+                  <a:srgbClr val="990011"/>
+                </a:solidFill>
+                <a:latin typeface="Times New Roman" pitchFamily="34" charset="0"/>
+                <a:ea typeface="Times New Roman" pitchFamily="34" charset="-122"/>
+                <a:cs typeface="Times New Roman" pitchFamily="34" charset="-120"/>
+              </a:rPr>
+              <a:t>Evaluation 1</a:t>
+            </a:r>
+            <a:endParaRPr lang="en-US" sz="3600" dirty="0"/>
+          </a:p>
+        </p:txBody>
+      </p:sp>
+      <p:sp>
+        <p:nvSpPr>
+          <p:cNvPr id="5" name="Text 2"/>
+          <p:cNvSpPr/>
+          <p:nvPr/>
+        </p:nvSpPr>
+        <p:spPr>
+          <a:xfrm>
+            <a:off x="5349240" y="1783080"/>
+            <a:ext cx="6522415" cy="4663440"/>
+          </a:xfrm>
+          <a:prstGeom prst="rect">
+            <a:avLst/>
+          </a:prstGeom>
+          <a:noFill/>
+          <a:ln/>
+        </p:spPr>
+        <p:txBody>
+          <a:bodyPr wrap="square" lIns="0" tIns="0" rIns="0" bIns="0" rtlCol="0" anchor="t"/>
+          <a:lstStyle/>
+          <a:p>
+            <a:pPr algn="l" indent="0" marL="0">
+              <a:spcAft>
+                <a:spcPts val="800"/>
+              </a:spcAft>
+              <a:buNone/>
+            </a:pPr>
+            <a:r>
+              <a:rPr lang="en-US" sz="4000" dirty="0">
+                <a:solidFill>
+                  <a:srgbClr val="111111"/>
+                </a:solidFill>
+                <a:latin typeface="Times New Roman" pitchFamily="34" charset="0"/>
+                <a:ea typeface="Times New Roman" pitchFamily="34" charset="-122"/>
+                <a:cs typeface="Times New Roman" pitchFamily="34" charset="-120"/>
+              </a:rPr>
+              <a:t>What is the position of the Earth in the solar system?</a:t>
+            </a:r>
+            <a:endParaRPr lang="en-US" sz="4000" dirty="0"/>
+          </a:p>
+        </p:txBody>
+      </p:sp>
+      <p:sp>
+        <p:nvSpPr>
+          <p:cNvPr id="25" name="Slide Number Placeholder 0"/>
+          <p:cNvSpPr>
+            <a:spLocks noGrp="1"/>
+          </p:cNvSpPr>
+          <p:nvPr>
+            <p:ph type="sldNum" sz="quarter" idx="4294967295"/>
+          </p:nvPr>
+        </p:nvSpPr>
+        <p:spPr>
+          <a:xfrm>
+            <a:off x="27432" y="91440"/>
+            <a:ext cx="585216" cy="475488"/>
+          </a:xfrm>
+          <a:prstGeom prst="rect">
+            <a:avLst/>
+          </a:prstGeom>
+          <a:extLst>
+            <a:ext uri="{C572A759-6A51-4108-AA02-DFA0A04FC94B}">
+              <ma14:wrappingTextBoxFlag xmlns:ma14="http://schemas.microsoft.com/office/mac/drawingml/2011/main" val="0"/>
+            </a:ext>
+          </a:extLst>
+        </p:spPr>
+        <p:txBody>
+          <a:bodyPr/>
+          <a:lstStyle>
+            <a:lvl1pPr>
+              <a:defRPr sz="2000">
+                <a:solidFill>
+                  <a:srgbClr val="FFFFFF"/>
+                </a:solidFill>
+                <a:latin typeface="Calibri"/>
+                <a:ea typeface="Calibri"/>
+                <a:cs typeface="Calibri"/>
+              </a:defRPr>
+            </a:lvl1pPr>
+          </a:lstStyle>
+          <a:p>
+            <a:pPr algn="ctr"/>
+            <a:fld id="{F7021451-1387-4CA6-816F-3879F97B5CBC}" type="slidenum">
+              <a:rPr b="1" lang="en-US"/>
+              <a:t>51</a:t>
+            </a:fld>
+            <a:endParaRPr lang="en-US"/>
+          </a:p>
+        </p:txBody>
+      </p:sp>
+    </p:spTree>
+  </p:cSld>
+  <p:clrMapOvr>
+    <a:masterClrMapping/>
+  </p:clrMapOvr>
+</p:sld>
+</file>
+
+<file path=ppt/slides/slide52.xml><?xml version="1.0" encoding="utf-8"?>
+<p:sld xmlns:a="http://schemas.openxmlformats.org/drawingml/2006/main" xmlns:r="http://schemas.openxmlformats.org/officeDocument/2006/relationships" xmlns:p="http://schemas.openxmlformats.org/presentationml/2006/main">
+  <p:cSld name="Slide 52">
+    <p:spTree>
+      <p:nvGrpSpPr>
+        <p:cNvPr id="1" name=""/>
+        <p:cNvGrpSpPr/>
+        <p:nvPr/>
+      </p:nvGrpSpPr>
+      <p:grpSpPr>
+        <a:xfrm>
+          <a:off x="0" y="0"/>
+          <a:ext cx="0" cy="0"/>
+          <a:chOff x="0" y="0"/>
+          <a:chExt cx="0" cy="0"/>
+        </a:xfrm>
+      </p:grpSpPr>
+      <p:sp>
+        <p:nvSpPr>
+          <p:cNvPr id="2" name="Text 0"/>
+          <p:cNvSpPr/>
+          <p:nvPr/>
+        </p:nvSpPr>
+        <p:spPr>
+          <a:xfrm>
+            <a:off x="457200" y="713232"/>
+            <a:ext cx="11368735" cy="274320"/>
+          </a:xfrm>
+          <a:prstGeom prst="rect">
+            <a:avLst/>
+          </a:prstGeom>
+          <a:noFill/>
+          <a:ln/>
+        </p:spPr>
+        <p:txBody>
+          <a:bodyPr wrap="square" lIns="0" tIns="0" rIns="0" bIns="0" rtlCol="0" anchor="ctr"/>
+          <a:lstStyle/>
+          <a:p>
+            <a:pPr algn="r" indent="0" marL="0">
+              <a:buNone/>
+            </a:pPr>
+            <a:r>
+              <a:rPr lang="en-US" sz="1400" b="1" dirty="0">
+                <a:solidFill>
+                  <a:srgbClr val="1C3F6E"/>
+                </a:solidFill>
+                <a:latin typeface="Calibri" pitchFamily="34" charset="0"/>
+                <a:ea typeface="Calibri" pitchFamily="34" charset="-122"/>
+                <a:cs typeface="Calibri" pitchFamily="34" charset="-120"/>
+              </a:rPr>
+              <a:t>FORMATIVE EVALUATION</a:t>
+            </a:r>
+            <a:endParaRPr lang="en-US" sz="1400" dirty="0"/>
+          </a:p>
+        </p:txBody>
+      </p:sp>
+      <p:pic>
+        <p:nvPicPr>
+          <p:cNvPr id="3" name="Image 0" descr="/home/claude/f4/img/minesec_sheet.png">    </p:cNvPr>
+          <p:cNvPicPr>
+            <a:picLocks noChangeAspect="1"/>
+          </p:cNvPicPr>
+          <p:nvPr/>
+        </p:nvPicPr>
+        <p:blipFill>
+          <a:blip r:embed="rId1"/>
+          <a:stretch>
+            <a:fillRect/>
+          </a:stretch>
+        </p:blipFill>
+        <p:spPr>
+          <a:xfrm>
+            <a:off x="0" y="658368"/>
+            <a:ext cx="5120640" cy="5833872"/>
+          </a:xfrm>
+          <a:prstGeom prst="rect">
+            <a:avLst/>
+          </a:prstGeom>
+        </p:spPr>
+      </p:pic>
+      <p:sp>
+        <p:nvSpPr>
+          <p:cNvPr id="4" name="Text 1"/>
+          <p:cNvSpPr/>
+          <p:nvPr/>
+        </p:nvSpPr>
+        <p:spPr>
+          <a:xfrm>
+            <a:off x="5349240" y="1005840"/>
+            <a:ext cx="6522415" cy="731520"/>
+          </a:xfrm>
+          <a:prstGeom prst="rect">
+            <a:avLst/>
+          </a:prstGeom>
+          <a:noFill/>
+          <a:ln/>
+        </p:spPr>
+        <p:txBody>
+          <a:bodyPr wrap="square" lIns="0" tIns="0" rIns="0" bIns="0" rtlCol="0" anchor="ctr">
+            <a:normAutofit/>
+          </a:bodyPr>
+          <a:lstStyle/>
+          <a:p>
+            <a:pPr algn="ctr" indent="0" marL="0">
+              <a:buNone/>
+            </a:pPr>
+            <a:r>
+              <a:rPr lang="en-US" sz="3600" b="1" dirty="0">
+                <a:solidFill>
+                  <a:srgbClr val="990011"/>
+                </a:solidFill>
+                <a:latin typeface="Times New Roman" pitchFamily="34" charset="0"/>
+                <a:ea typeface="Times New Roman" pitchFamily="34" charset="-122"/>
+                <a:cs typeface="Times New Roman" pitchFamily="34" charset="-120"/>
+              </a:rPr>
+              <a:t>Expected Answer</a:t>
+            </a:r>
+            <a:endParaRPr lang="en-US" sz="3600" dirty="0"/>
+          </a:p>
+        </p:txBody>
+      </p:sp>
+      <p:sp>
+        <p:nvSpPr>
+          <p:cNvPr id="5" name="Text 2"/>
+          <p:cNvSpPr/>
+          <p:nvPr/>
+        </p:nvSpPr>
+        <p:spPr>
+          <a:xfrm>
+            <a:off x="5349240" y="1783080"/>
+            <a:ext cx="6522415" cy="4663440"/>
+          </a:xfrm>
+          <a:prstGeom prst="rect">
+            <a:avLst/>
+          </a:prstGeom>
+          <a:noFill/>
+          <a:ln/>
+        </p:spPr>
+        <p:txBody>
+          <a:bodyPr wrap="square" lIns="0" tIns="0" rIns="0" bIns="0" rtlCol="0" anchor="t"/>
+          <a:lstStyle/>
+          <a:p>
+            <a:pPr algn="l" indent="0" marL="0">
+              <a:spcAft>
+                <a:spcPts val="800"/>
+              </a:spcAft>
+              <a:buNone/>
+            </a:pPr>
+            <a:r>
+              <a:rPr lang="en-US" sz="4000" dirty="0">
+                <a:solidFill>
+                  <a:srgbClr val="111111"/>
+                </a:solidFill>
+                <a:latin typeface="Times New Roman" pitchFamily="34" charset="0"/>
+                <a:ea typeface="Times New Roman" pitchFamily="34" charset="-122"/>
+                <a:cs typeface="Times New Roman" pitchFamily="34" charset="-120"/>
+              </a:rPr>
+              <a:t>It is the third planet from the Sun.</a:t>
+            </a:r>
+            <a:endParaRPr lang="en-US" sz="4000" dirty="0"/>
+          </a:p>
+        </p:txBody>
+      </p:sp>
+      <p:sp>
+        <p:nvSpPr>
+          <p:cNvPr id="25" name="Slide Number Placeholder 0"/>
+          <p:cNvSpPr>
+            <a:spLocks noGrp="1"/>
+          </p:cNvSpPr>
+          <p:nvPr>
+            <p:ph type="sldNum" sz="quarter" idx="4294967295"/>
+          </p:nvPr>
+        </p:nvSpPr>
+        <p:spPr>
+          <a:xfrm>
+            <a:off x="27432" y="91440"/>
+            <a:ext cx="585216" cy="475488"/>
+          </a:xfrm>
+          <a:prstGeom prst="rect">
+            <a:avLst/>
+          </a:prstGeom>
+          <a:extLst>
+            <a:ext uri="{C572A759-6A51-4108-AA02-DFA0A04FC94B}">
+              <ma14:wrappingTextBoxFlag xmlns:ma14="http://schemas.microsoft.com/office/mac/drawingml/2011/main" val="0"/>
+            </a:ext>
+          </a:extLst>
+        </p:spPr>
+        <p:txBody>
+          <a:bodyPr/>
+          <a:lstStyle>
+            <a:lvl1pPr>
+              <a:defRPr sz="2000">
+                <a:solidFill>
+                  <a:srgbClr val="FFFFFF"/>
+                </a:solidFill>
+                <a:latin typeface="Calibri"/>
+                <a:ea typeface="Calibri"/>
+                <a:cs typeface="Calibri"/>
+              </a:defRPr>
+            </a:lvl1pPr>
+          </a:lstStyle>
+          <a:p>
+            <a:pPr algn="ctr"/>
+            <a:fld id="{F7021451-1387-4CA6-816F-3879F97B5CBC}" type="slidenum">
+              <a:rPr b="1" lang="en-US"/>
+              <a:t>52</a:t>
+            </a:fld>
+            <a:endParaRPr lang="en-US"/>
+          </a:p>
+        </p:txBody>
+      </p:sp>
+    </p:spTree>
+  </p:cSld>
+  <p:clrMapOvr>
+    <a:masterClrMapping/>
+  </p:clrMapOvr>
+</p:sld>
+</file>
+
+<file path=ppt/slides/slide53.xml><?xml version="1.0" encoding="utf-8"?>
+<p:sld xmlns:a="http://schemas.openxmlformats.org/drawingml/2006/main" xmlns:r="http://schemas.openxmlformats.org/officeDocument/2006/relationships" xmlns:p="http://schemas.openxmlformats.org/presentationml/2006/main">
+  <p:cSld name="Slide 53">
+    <p:spTree>
+      <p:nvGrpSpPr>
+        <p:cNvPr id="1" name=""/>
+        <p:cNvGrpSpPr/>
+        <p:nvPr/>
+      </p:nvGrpSpPr>
+      <p:grpSpPr>
+        <a:xfrm>
+          <a:off x="0" y="0"/>
+          <a:ext cx="0" cy="0"/>
+          <a:chOff x="0" y="0"/>
+          <a:chExt cx="0" cy="0"/>
+        </a:xfrm>
+      </p:grpSpPr>
+      <p:sp>
+        <p:nvSpPr>
+          <p:cNvPr id="2" name="Text 0"/>
+          <p:cNvSpPr/>
+          <p:nvPr/>
+        </p:nvSpPr>
+        <p:spPr>
+          <a:xfrm>
+            <a:off x="457200" y="713232"/>
+            <a:ext cx="11368735" cy="274320"/>
+          </a:xfrm>
+          <a:prstGeom prst="rect">
+            <a:avLst/>
+          </a:prstGeom>
+          <a:noFill/>
+          <a:ln/>
+        </p:spPr>
+        <p:txBody>
+          <a:bodyPr wrap="square" lIns="0" tIns="0" rIns="0" bIns="0" rtlCol="0" anchor="ctr"/>
+          <a:lstStyle/>
+          <a:p>
+            <a:pPr algn="r" indent="0" marL="0">
+              <a:buNone/>
+            </a:pPr>
+            <a:r>
+              <a:rPr lang="en-US" sz="1400" b="1" dirty="0">
+                <a:solidFill>
+                  <a:srgbClr val="1C3F6E"/>
+                </a:solidFill>
+                <a:latin typeface="Calibri" pitchFamily="34" charset="0"/>
+                <a:ea typeface="Calibri" pitchFamily="34" charset="-122"/>
+                <a:cs typeface="Calibri" pitchFamily="34" charset="-120"/>
+              </a:rPr>
+              <a:t>FORMATIVE EVALUATION</a:t>
+            </a:r>
+            <a:endParaRPr lang="en-US" sz="1400" dirty="0"/>
+          </a:p>
+        </p:txBody>
+      </p:sp>
+      <p:pic>
+        <p:nvPicPr>
+          <p:cNvPr id="3" name="Image 0" descr="/home/claude/f4/img/minesec_sheet.png">    </p:cNvPr>
+          <p:cNvPicPr>
+            <a:picLocks noChangeAspect="1"/>
+          </p:cNvPicPr>
+          <p:nvPr/>
+        </p:nvPicPr>
+        <p:blipFill>
+          <a:blip r:embed="rId1"/>
+          <a:stretch>
+            <a:fillRect/>
+          </a:stretch>
+        </p:blipFill>
+        <p:spPr>
+          <a:xfrm>
+            <a:off x="0" y="658368"/>
+            <a:ext cx="5120640" cy="5833872"/>
+          </a:xfrm>
+          <a:prstGeom prst="rect">
+            <a:avLst/>
+          </a:prstGeom>
+        </p:spPr>
+      </p:pic>
+      <p:sp>
+        <p:nvSpPr>
+          <p:cNvPr id="4" name="Text 1"/>
+          <p:cNvSpPr/>
+          <p:nvPr/>
+        </p:nvSpPr>
+        <p:spPr>
+          <a:xfrm>
+            <a:off x="5349240" y="1005840"/>
+            <a:ext cx="6522415" cy="731520"/>
+          </a:xfrm>
+          <a:prstGeom prst="rect">
+            <a:avLst/>
+          </a:prstGeom>
+          <a:noFill/>
+          <a:ln/>
+        </p:spPr>
+        <p:txBody>
+          <a:bodyPr wrap="square" lIns="0" tIns="0" rIns="0" bIns="0" rtlCol="0" anchor="ctr">
+            <a:normAutofit/>
+          </a:bodyPr>
+          <a:lstStyle/>
+          <a:p>
+            <a:pPr algn="ctr" indent="0" marL="0">
+              <a:buNone/>
+            </a:pPr>
+            <a:r>
+              <a:rPr lang="en-US" sz="3600" b="1" dirty="0">
+                <a:solidFill>
+                  <a:srgbClr val="990011"/>
+                </a:solidFill>
+                <a:latin typeface="Times New Roman" pitchFamily="34" charset="0"/>
+                <a:ea typeface="Times New Roman" pitchFamily="34" charset="-122"/>
+                <a:cs typeface="Times New Roman" pitchFamily="34" charset="-120"/>
+              </a:rPr>
+              <a:t>Evaluation 2</a:t>
+            </a:r>
+            <a:endParaRPr lang="en-US" sz="3600" dirty="0"/>
+          </a:p>
+        </p:txBody>
+      </p:sp>
+      <p:sp>
+        <p:nvSpPr>
+          <p:cNvPr id="5" name="Text 2"/>
+          <p:cNvSpPr/>
+          <p:nvPr/>
+        </p:nvSpPr>
+        <p:spPr>
+          <a:xfrm>
+            <a:off x="5349240" y="1783080"/>
+            <a:ext cx="6522415" cy="4663440"/>
+          </a:xfrm>
+          <a:prstGeom prst="rect">
+            <a:avLst/>
+          </a:prstGeom>
+          <a:noFill/>
+          <a:ln/>
+        </p:spPr>
+        <p:txBody>
+          <a:bodyPr wrap="square" lIns="0" tIns="0" rIns="0" bIns="0" rtlCol="0" anchor="t"/>
+          <a:lstStyle/>
+          <a:p>
+            <a:pPr algn="l" indent="0" marL="0">
+              <a:spcAft>
+                <a:spcPts val="800"/>
+              </a:spcAft>
+              <a:buNone/>
+            </a:pPr>
+            <a:r>
+              <a:rPr lang="en-US" sz="4000" dirty="0">
+                <a:solidFill>
+                  <a:srgbClr val="111111"/>
+                </a:solidFill>
+                <a:latin typeface="Times New Roman" pitchFamily="34" charset="0"/>
+                <a:ea typeface="Times New Roman" pitchFamily="34" charset="-122"/>
+                <a:cs typeface="Times New Roman" pitchFamily="34" charset="-120"/>
+              </a:rPr>
+              <a:t>Name three continents and two oceans.</a:t>
+            </a:r>
+            <a:endParaRPr lang="en-US" sz="4000" dirty="0"/>
+          </a:p>
+        </p:txBody>
+      </p:sp>
+      <p:sp>
+        <p:nvSpPr>
+          <p:cNvPr id="25" name="Slide Number Placeholder 0"/>
+          <p:cNvSpPr>
+            <a:spLocks noGrp="1"/>
+          </p:cNvSpPr>
+          <p:nvPr>
+            <p:ph type="sldNum" sz="quarter" idx="4294967295"/>
+          </p:nvPr>
+        </p:nvSpPr>
+        <p:spPr>
+          <a:xfrm>
+            <a:off x="27432" y="91440"/>
+            <a:ext cx="585216" cy="475488"/>
+          </a:xfrm>
+          <a:prstGeom prst="rect">
+            <a:avLst/>
+          </a:prstGeom>
+          <a:extLst>
+            <a:ext uri="{C572A759-6A51-4108-AA02-DFA0A04FC94B}">
+              <ma14:wrappingTextBoxFlag xmlns:ma14="http://schemas.microsoft.com/office/mac/drawingml/2011/main" val="0"/>
+            </a:ext>
+          </a:extLst>
+        </p:spPr>
+        <p:txBody>
+          <a:bodyPr/>
+          <a:lstStyle>
+            <a:lvl1pPr>
+              <a:defRPr sz="2000">
+                <a:solidFill>
+                  <a:srgbClr val="FFFFFF"/>
+                </a:solidFill>
+                <a:latin typeface="Calibri"/>
+                <a:ea typeface="Calibri"/>
+                <a:cs typeface="Calibri"/>
+              </a:defRPr>
+            </a:lvl1pPr>
+          </a:lstStyle>
+          <a:p>
+            <a:pPr algn="ctr"/>
+            <a:fld id="{F7021451-1387-4CA6-816F-3879F97B5CBC}" type="slidenum">
+              <a:rPr b="1" lang="en-US"/>
+              <a:t>53</a:t>
+            </a:fld>
+            <a:endParaRPr lang="en-US"/>
+          </a:p>
+        </p:txBody>
+      </p:sp>
+    </p:spTree>
+  </p:cSld>
+  <p:clrMapOvr>
+    <a:masterClrMapping/>
+  </p:clrMapOvr>
+</p:sld>
+</file>
+
+<file path=ppt/slides/slide54.xml><?xml version="1.0" encoding="utf-8"?>
+<p:sld xmlns:a="http://schemas.openxmlformats.org/drawingml/2006/main" xmlns:r="http://schemas.openxmlformats.org/officeDocument/2006/relationships" xmlns:p="http://schemas.openxmlformats.org/presentationml/2006/main">
+  <p:cSld name="Slide 54">
+    <p:spTree>
+      <p:nvGrpSpPr>
+        <p:cNvPr id="1" name=""/>
+        <p:cNvGrpSpPr/>
+        <p:nvPr/>
+      </p:nvGrpSpPr>
+      <p:grpSpPr>
+        <a:xfrm>
+          <a:off x="0" y="0"/>
+          <a:ext cx="0" cy="0"/>
+          <a:chOff x="0" y="0"/>
+          <a:chExt cx="0" cy="0"/>
+        </a:xfrm>
+      </p:grpSpPr>
+      <p:sp>
+        <p:nvSpPr>
+          <p:cNvPr id="2" name="Text 0"/>
+          <p:cNvSpPr/>
+          <p:nvPr/>
+        </p:nvSpPr>
+        <p:spPr>
+          <a:xfrm>
+            <a:off x="457200" y="713232"/>
+            <a:ext cx="11368735" cy="274320"/>
+          </a:xfrm>
+          <a:prstGeom prst="rect">
+            <a:avLst/>
+          </a:prstGeom>
+          <a:noFill/>
+          <a:ln/>
+        </p:spPr>
+        <p:txBody>
+          <a:bodyPr wrap="square" lIns="0" tIns="0" rIns="0" bIns="0" rtlCol="0" anchor="ctr"/>
+          <a:lstStyle/>
+          <a:p>
+            <a:pPr algn="r" indent="0" marL="0">
+              <a:buNone/>
+            </a:pPr>
+            <a:r>
+              <a:rPr lang="en-US" sz="1400" b="1" dirty="0">
+                <a:solidFill>
+                  <a:srgbClr val="1C3F6E"/>
+                </a:solidFill>
+                <a:latin typeface="Calibri" pitchFamily="34" charset="0"/>
+                <a:ea typeface="Calibri" pitchFamily="34" charset="-122"/>
+                <a:cs typeface="Calibri" pitchFamily="34" charset="-120"/>
+              </a:rPr>
+              <a:t>FORMATIVE EVALUATION</a:t>
+            </a:r>
+            <a:endParaRPr lang="en-US" sz="1400" dirty="0"/>
+          </a:p>
+        </p:txBody>
+      </p:sp>
+      <p:pic>
+        <p:nvPicPr>
+          <p:cNvPr id="3" name="Image 0" descr="/home/claude/f4/img/minesec_sheet.png">    </p:cNvPr>
+          <p:cNvPicPr>
+            <a:picLocks noChangeAspect="1"/>
+          </p:cNvPicPr>
+          <p:nvPr/>
+        </p:nvPicPr>
+        <p:blipFill>
+          <a:blip r:embed="rId1"/>
+          <a:stretch>
+            <a:fillRect/>
+          </a:stretch>
+        </p:blipFill>
+        <p:spPr>
+          <a:xfrm>
+            <a:off x="0" y="658368"/>
+            <a:ext cx="5120640" cy="5833872"/>
+          </a:xfrm>
+          <a:prstGeom prst="rect">
+            <a:avLst/>
+          </a:prstGeom>
+        </p:spPr>
+      </p:pic>
+      <p:sp>
+        <p:nvSpPr>
+          <p:cNvPr id="4" name="Text 1"/>
+          <p:cNvSpPr/>
+          <p:nvPr/>
+        </p:nvSpPr>
+        <p:spPr>
+          <a:xfrm>
+            <a:off x="5349240" y="1005840"/>
+            <a:ext cx="6522415" cy="731520"/>
+          </a:xfrm>
+          <a:prstGeom prst="rect">
+            <a:avLst/>
+          </a:prstGeom>
+          <a:noFill/>
+          <a:ln/>
+        </p:spPr>
+        <p:txBody>
+          <a:bodyPr wrap="square" lIns="0" tIns="0" rIns="0" bIns="0" rtlCol="0" anchor="ctr">
+            <a:normAutofit/>
+          </a:bodyPr>
+          <a:lstStyle/>
+          <a:p>
+            <a:pPr algn="ctr" indent="0" marL="0">
+              <a:buNone/>
+            </a:pPr>
+            <a:r>
+              <a:rPr lang="en-US" sz="3600" b="1" dirty="0">
+                <a:solidFill>
+                  <a:srgbClr val="990011"/>
+                </a:solidFill>
+                <a:latin typeface="Times New Roman" pitchFamily="34" charset="0"/>
+                <a:ea typeface="Times New Roman" pitchFamily="34" charset="-122"/>
+                <a:cs typeface="Times New Roman" pitchFamily="34" charset="-120"/>
+              </a:rPr>
+              <a:t>Expected Answer</a:t>
+            </a:r>
+            <a:endParaRPr lang="en-US" sz="3600" dirty="0"/>
+          </a:p>
+        </p:txBody>
+      </p:sp>
+      <p:sp>
+        <p:nvSpPr>
+          <p:cNvPr id="5" name="Text 2"/>
+          <p:cNvSpPr/>
+          <p:nvPr/>
+        </p:nvSpPr>
+        <p:spPr>
+          <a:xfrm>
+            <a:off x="5349240" y="1783080"/>
+            <a:ext cx="6522415" cy="4663440"/>
+          </a:xfrm>
+          <a:prstGeom prst="rect">
+            <a:avLst/>
+          </a:prstGeom>
+          <a:noFill/>
+          <a:ln/>
+        </p:spPr>
+        <p:txBody>
+          <a:bodyPr wrap="square" lIns="0" tIns="0" rIns="0" bIns="0" rtlCol="0" anchor="t"/>
+          <a:lstStyle/>
+          <a:p>
+            <a:pPr algn="l" indent="0" marL="0">
+              <a:spcAft>
+                <a:spcPts val="800"/>
+              </a:spcAft>
+              <a:buNone/>
+            </a:pPr>
+            <a:r>
+              <a:rPr lang="en-US" sz="4000" dirty="0">
+                <a:solidFill>
+                  <a:srgbClr val="111111"/>
+                </a:solidFill>
+                <a:latin typeface="Times New Roman" pitchFamily="34" charset="0"/>
+                <a:ea typeface="Times New Roman" pitchFamily="34" charset="-122"/>
+                <a:cs typeface="Times New Roman" pitchFamily="34" charset="-120"/>
+              </a:rPr>
+              <a:t>Africa, Asia, Europe; the Atlantic and the Pacific Oceans.</a:t>
+            </a:r>
+            <a:endParaRPr lang="en-US" sz="4000" dirty="0"/>
+          </a:p>
+        </p:txBody>
+      </p:sp>
+      <p:sp>
+        <p:nvSpPr>
+          <p:cNvPr id="25" name="Slide Number Placeholder 0"/>
+          <p:cNvSpPr>
+            <a:spLocks noGrp="1"/>
+          </p:cNvSpPr>
+          <p:nvPr>
+            <p:ph type="sldNum" sz="quarter" idx="4294967295"/>
+          </p:nvPr>
+        </p:nvSpPr>
+        <p:spPr>
+          <a:xfrm>
+            <a:off x="27432" y="91440"/>
+            <a:ext cx="585216" cy="475488"/>
+          </a:xfrm>
+          <a:prstGeom prst="rect">
+            <a:avLst/>
+          </a:prstGeom>
+          <a:extLst>
+            <a:ext uri="{C572A759-6A51-4108-AA02-DFA0A04FC94B}">
+              <ma14:wrappingTextBoxFlag xmlns:ma14="http://schemas.microsoft.com/office/mac/drawingml/2011/main" val="0"/>
+            </a:ext>
+          </a:extLst>
+        </p:spPr>
+        <p:txBody>
+          <a:bodyPr/>
+          <a:lstStyle>
+            <a:lvl1pPr>
+              <a:defRPr sz="2000">
+                <a:solidFill>
+                  <a:srgbClr val="FFFFFF"/>
+                </a:solidFill>
+                <a:latin typeface="Calibri"/>
+                <a:ea typeface="Calibri"/>
+                <a:cs typeface="Calibri"/>
+              </a:defRPr>
+            </a:lvl1pPr>
+          </a:lstStyle>
+          <a:p>
+            <a:pPr algn="ctr"/>
+            <a:fld id="{F7021451-1387-4CA6-816F-3879F97B5CBC}" type="slidenum">
+              <a:rPr b="1" lang="en-US"/>
+              <a:t>54</a:t>
+            </a:fld>
+            <a:endParaRPr lang="en-US"/>
+          </a:p>
+        </p:txBody>
+      </p:sp>
+    </p:spTree>
+  </p:cSld>
+  <p:clrMapOvr>
+    <a:masterClrMapping/>
+  </p:clrMapOvr>
+</p:sld>
+</file>
+
+<file path=ppt/slides/slide55.xml><?xml version="1.0" encoding="utf-8"?>
+<p:sld xmlns:a="http://schemas.openxmlformats.org/drawingml/2006/main" xmlns:r="http://schemas.openxmlformats.org/officeDocument/2006/relationships" xmlns:p="http://schemas.openxmlformats.org/presentationml/2006/main">
+  <p:cSld name="Slide 55">
+    <p:spTree>
+      <p:nvGrpSpPr>
+        <p:cNvPr id="1" name=""/>
+        <p:cNvGrpSpPr/>
+        <p:nvPr/>
+      </p:nvGrpSpPr>
+      <p:grpSpPr>
+        <a:xfrm>
+          <a:off x="0" y="0"/>
+          <a:ext cx="0" cy="0"/>
+          <a:chOff x="0" y="0"/>
+          <a:chExt cx="0" cy="0"/>
+        </a:xfrm>
+      </p:grpSpPr>
+      <p:sp>
+        <p:nvSpPr>
+          <p:cNvPr id="2" name="Text 0"/>
+          <p:cNvSpPr/>
+          <p:nvPr/>
+        </p:nvSpPr>
+        <p:spPr>
+          <a:xfrm>
+            <a:off x="457200" y="713232"/>
+            <a:ext cx="11368735" cy="274320"/>
+          </a:xfrm>
+          <a:prstGeom prst="rect">
+            <a:avLst/>
+          </a:prstGeom>
+          <a:noFill/>
+          <a:ln/>
+        </p:spPr>
+        <p:txBody>
+          <a:bodyPr wrap="square" lIns="0" tIns="0" rIns="0" bIns="0" rtlCol="0" anchor="ctr"/>
+          <a:lstStyle/>
+          <a:p>
+            <a:pPr algn="r" indent="0" marL="0">
+              <a:buNone/>
+            </a:pPr>
+            <a:r>
+              <a:rPr lang="en-US" sz="1400" b="1" dirty="0">
+                <a:solidFill>
+                  <a:srgbClr val="1C3F6E"/>
+                </a:solidFill>
+                <a:latin typeface="Calibri" pitchFamily="34" charset="0"/>
+                <a:ea typeface="Calibri" pitchFamily="34" charset="-122"/>
+                <a:cs typeface="Calibri" pitchFamily="34" charset="-120"/>
+              </a:rPr>
+              <a:t>REMEDIATION</a:t>
+            </a:r>
+            <a:endParaRPr lang="en-US" sz="1400" dirty="0"/>
+          </a:p>
+        </p:txBody>
+      </p:sp>
+      <p:pic>
+        <p:nvPicPr>
+          <p:cNvPr id="3" name="Image 0" descr="/home/claude/f4/img/minesec_sheet.png">    </p:cNvPr>
+          <p:cNvPicPr>
+            <a:picLocks noChangeAspect="1"/>
+          </p:cNvPicPr>
+          <p:nvPr/>
+        </p:nvPicPr>
+        <p:blipFill>
+          <a:blip r:embed="rId1"/>
+          <a:stretch>
+            <a:fillRect/>
+          </a:stretch>
+        </p:blipFill>
+        <p:spPr>
+          <a:xfrm>
+            <a:off x="0" y="658368"/>
+            <a:ext cx="2468880" cy="5833872"/>
+          </a:xfrm>
+          <a:prstGeom prst="rect">
+            <a:avLst/>
+          </a:prstGeom>
+        </p:spPr>
+      </p:pic>
+      <p:sp>
+        <p:nvSpPr>
+          <p:cNvPr id="4" name="Text 1"/>
+          <p:cNvSpPr/>
+          <p:nvPr/>
+        </p:nvSpPr>
+        <p:spPr>
+          <a:xfrm>
+            <a:off x="2697480" y="1005840"/>
+            <a:ext cx="9174175" cy="731520"/>
+          </a:xfrm>
+          <a:prstGeom prst="rect">
+            <a:avLst/>
+          </a:prstGeom>
+          <a:noFill/>
+          <a:ln/>
+        </p:spPr>
+        <p:txBody>
+          <a:bodyPr wrap="square" lIns="0" tIns="0" rIns="0" bIns="0" rtlCol="0" anchor="ctr">
+            <a:normAutofit/>
+          </a:bodyPr>
+          <a:lstStyle/>
+          <a:p>
+            <a:pPr algn="ctr" indent="0" marL="0">
+              <a:buNone/>
+            </a:pPr>
+            <a:r>
+              <a:rPr lang="en-US" sz="3600" b="1" dirty="0">
+                <a:solidFill>
+                  <a:srgbClr val="990011"/>
+                </a:solidFill>
+                <a:latin typeface="Times New Roman" pitchFamily="34" charset="0"/>
+                <a:ea typeface="Times New Roman" pitchFamily="34" charset="-122"/>
+                <a:cs typeface="Times New Roman" pitchFamily="34" charset="-120"/>
+              </a:rPr>
+              <a:t>Remediation</a:t>
+            </a:r>
+            <a:endParaRPr lang="en-US" sz="3600" dirty="0"/>
+          </a:p>
+        </p:txBody>
+      </p:sp>
+      <p:sp>
+        <p:nvSpPr>
+          <p:cNvPr id="5" name="Text 2"/>
+          <p:cNvSpPr/>
+          <p:nvPr/>
+        </p:nvSpPr>
+        <p:spPr>
+          <a:xfrm>
+            <a:off x="2697480" y="1783080"/>
+            <a:ext cx="9174175" cy="4663440"/>
+          </a:xfrm>
+          <a:prstGeom prst="rect">
+            <a:avLst/>
+          </a:prstGeom>
+          <a:noFill/>
+          <a:ln/>
+        </p:spPr>
+        <p:txBody>
+          <a:bodyPr wrap="square" lIns="0" tIns="0" rIns="0" bIns="0" rtlCol="0" anchor="t"/>
+          <a:lstStyle/>
+          <a:p>
+            <a:pPr algn="l" indent="0" marL="0">
+              <a:spcAft>
+                <a:spcPts val="800"/>
+              </a:spcAft>
+              <a:buNone/>
+            </a:pPr>
+            <a:r>
+              <a:rPr lang="en-US" sz="4000" b="1" dirty="0">
+                <a:solidFill>
+                  <a:srgbClr val="111111"/>
+                </a:solidFill>
+                <a:latin typeface="Times New Roman" pitchFamily="34" charset="0"/>
+                <a:ea typeface="Times New Roman" pitchFamily="34" charset="-122"/>
+                <a:cs typeface="Times New Roman" pitchFamily="34" charset="-120"/>
+              </a:rPr>
+              <a:t>Fill in the blanks:</a:t>
+            </a:r>
+            <a:endParaRPr lang="en-US" sz="4000" dirty="0"/>
+          </a:p>
+          <a:p>
+            <a:pPr algn="l" marL="342900" indent="-342900">
+              <a:spcAft>
+                <a:spcPts val="800"/>
+              </a:spcAft>
+              <a:buSzPct val="100000"/>
+              <a:buFont typeface="+mj-lt"/>
+              <a:buAutoNum type="arabicPeriod" startAt="1"/>
+            </a:pPr>
+            <a:r>
+              <a:rPr lang="en-US" sz="4000" dirty="0">
+                <a:solidFill>
+                  <a:srgbClr val="111111"/>
+                </a:solidFill>
+                <a:latin typeface="Times New Roman" pitchFamily="34" charset="0"/>
+                <a:ea typeface="Times New Roman" pitchFamily="34" charset="-122"/>
+                <a:cs typeface="Times New Roman" pitchFamily="34" charset="-120"/>
+              </a:rPr>
+              <a:t>The Earth is the ______ planet from the Sun.</a:t>
+            </a:r>
+            <a:endParaRPr lang="en-US" sz="4000" dirty="0"/>
+          </a:p>
+          <a:p>
+            <a:pPr algn="l" marL="342900" indent="-342900">
+              <a:spcAft>
+                <a:spcPts val="800"/>
+              </a:spcAft>
+              <a:buSzPct val="100000"/>
+              <a:buFont typeface="+mj-lt"/>
+              <a:buAutoNum type="arabicPeriod" startAt="1"/>
+            </a:pPr>
+            <a:r>
+              <a:rPr lang="en-US" sz="4000" dirty="0">
+                <a:solidFill>
+                  <a:srgbClr val="111111"/>
+                </a:solidFill>
+                <a:latin typeface="Times New Roman" pitchFamily="34" charset="0"/>
+                <a:ea typeface="Times New Roman" pitchFamily="34" charset="-122"/>
+                <a:cs typeface="Times New Roman" pitchFamily="34" charset="-120"/>
+              </a:rPr>
+              <a:t>The largest ocean is the ______ Ocean.</a:t>
+            </a:r>
+            <a:endParaRPr lang="en-US" sz="4000" dirty="0"/>
+          </a:p>
+          <a:p>
+            <a:pPr algn="l" marL="342900" indent="-342900">
+              <a:spcAft>
+                <a:spcPts val="800"/>
+              </a:spcAft>
+              <a:buSzPct val="100000"/>
+              <a:buFont typeface="+mj-lt"/>
+              <a:buAutoNum type="arabicPeriod" startAt="1"/>
+            </a:pPr>
+            <a:r>
+              <a:rPr lang="en-US" sz="4000" dirty="0">
+                <a:solidFill>
+                  <a:srgbClr val="111111"/>
+                </a:solidFill>
+                <a:latin typeface="Times New Roman" pitchFamily="34" charset="0"/>
+                <a:ea typeface="Times New Roman" pitchFamily="34" charset="-122"/>
+                <a:cs typeface="Times New Roman" pitchFamily="34" charset="-120"/>
+              </a:rPr>
+              <a:t>Cameroon is on the continent of ______.</a:t>
+            </a:r>
+            <a:endParaRPr lang="en-US" sz="4000" dirty="0"/>
+          </a:p>
+        </p:txBody>
+      </p:sp>
+      <p:sp>
+        <p:nvSpPr>
+          <p:cNvPr id="25" name="Slide Number Placeholder 0"/>
+          <p:cNvSpPr>
+            <a:spLocks noGrp="1"/>
+          </p:cNvSpPr>
+          <p:nvPr>
+            <p:ph type="sldNum" sz="quarter" idx="4294967295"/>
+          </p:nvPr>
+        </p:nvSpPr>
+        <p:spPr>
+          <a:xfrm>
+            <a:off x="27432" y="91440"/>
+            <a:ext cx="585216" cy="475488"/>
+          </a:xfrm>
+          <a:prstGeom prst="rect">
+            <a:avLst/>
+          </a:prstGeom>
+          <a:extLst>
+            <a:ext uri="{C572A759-6A51-4108-AA02-DFA0A04FC94B}">
+              <ma14:wrappingTextBoxFlag xmlns:ma14="http://schemas.microsoft.com/office/mac/drawingml/2011/main" val="0"/>
+            </a:ext>
+          </a:extLst>
+        </p:spPr>
+        <p:txBody>
+          <a:bodyPr/>
+          <a:lstStyle>
+            <a:lvl1pPr>
+              <a:defRPr sz="2000">
+                <a:solidFill>
+                  <a:srgbClr val="FFFFFF"/>
+                </a:solidFill>
+                <a:latin typeface="Calibri"/>
+                <a:ea typeface="Calibri"/>
+                <a:cs typeface="Calibri"/>
+              </a:defRPr>
+            </a:lvl1pPr>
+          </a:lstStyle>
+          <a:p>
+            <a:pPr algn="ctr"/>
+            <a:fld id="{F7021451-1387-4CA6-816F-3879F97B5CBC}" type="slidenum">
+              <a:rPr b="1" lang="en-US"/>
+              <a:t>55</a:t>
+            </a:fld>
+            <a:endParaRPr lang="en-US"/>
+          </a:p>
+        </p:txBody>
+      </p:sp>
+    </p:spTree>
+  </p:cSld>
+  <p:clrMapOvr>
+    <a:masterClrMapping/>
+  </p:clrMapOvr>
+</p:sld>
+</file>
+
+<file path=ppt/slides/slide56.xml><?xml version="1.0" encoding="utf-8"?>
+<p:sld xmlns:a="http://schemas.openxmlformats.org/drawingml/2006/main" xmlns:r="http://schemas.openxmlformats.org/officeDocument/2006/relationships" xmlns:p="http://schemas.openxmlformats.org/presentationml/2006/main">
+  <p:cSld name="Slide 56">
+    <p:spTree>
+      <p:nvGrpSpPr>
+        <p:cNvPr id="1" name=""/>
+        <p:cNvGrpSpPr/>
+        <p:nvPr/>
+      </p:nvGrpSpPr>
+      <p:grpSpPr>
+        <a:xfrm>
+          <a:off x="0" y="0"/>
+          <a:ext cx="0" cy="0"/>
+          <a:chOff x="0" y="0"/>
+          <a:chExt cx="0" cy="0"/>
+        </a:xfrm>
+      </p:grpSpPr>
+      <p:sp>
+        <p:nvSpPr>
+          <p:cNvPr id="2" name="Text 0"/>
+          <p:cNvSpPr/>
+          <p:nvPr/>
+        </p:nvSpPr>
+        <p:spPr>
+          <a:xfrm>
+            <a:off x="457200" y="713232"/>
+            <a:ext cx="11368735" cy="274320"/>
+          </a:xfrm>
+          <a:prstGeom prst="rect">
+            <a:avLst/>
+          </a:prstGeom>
+          <a:noFill/>
+          <a:ln/>
+        </p:spPr>
+        <p:txBody>
+          <a:bodyPr wrap="square" lIns="0" tIns="0" rIns="0" bIns="0" rtlCol="0" anchor="ctr"/>
+          <a:lstStyle/>
+          <a:p>
+            <a:pPr algn="r" indent="0" marL="0">
+              <a:buNone/>
+            </a:pPr>
+            <a:r>
+              <a:rPr lang="en-US" sz="1400" b="1" dirty="0">
+                <a:solidFill>
+                  <a:srgbClr val="1C3F6E"/>
+                </a:solidFill>
+                <a:latin typeface="Calibri" pitchFamily="34" charset="0"/>
+                <a:ea typeface="Calibri" pitchFamily="34" charset="-122"/>
+                <a:cs typeface="Calibri" pitchFamily="34" charset="-120"/>
+              </a:rPr>
+              <a:t>HOMEWORK</a:t>
+            </a:r>
+            <a:endParaRPr lang="en-US" sz="1400" dirty="0"/>
+          </a:p>
+        </p:txBody>
+      </p:sp>
+      <p:pic>
+        <p:nvPicPr>
+          <p:cNvPr id="3" name="Image 0" descr="/home/claude/f4/img/minesec_sheet.png">    </p:cNvPr>
+          <p:cNvPicPr>
+            <a:picLocks noChangeAspect="1"/>
+          </p:cNvPicPr>
+          <p:nvPr/>
+        </p:nvPicPr>
+        <p:blipFill>
+          <a:blip r:embed="rId1"/>
+          <a:stretch>
+            <a:fillRect/>
+          </a:stretch>
+        </p:blipFill>
+        <p:spPr>
+          <a:xfrm>
+            <a:off x="0" y="658368"/>
+            <a:ext cx="5120640" cy="5833872"/>
+          </a:xfrm>
+          <a:prstGeom prst="rect">
+            <a:avLst/>
+          </a:prstGeom>
+        </p:spPr>
+      </p:pic>
+      <p:sp>
+        <p:nvSpPr>
+          <p:cNvPr id="4" name="Text 1"/>
+          <p:cNvSpPr/>
+          <p:nvPr/>
+        </p:nvSpPr>
+        <p:spPr>
+          <a:xfrm>
+            <a:off x="5349240" y="1005840"/>
+            <a:ext cx="6522415" cy="731520"/>
+          </a:xfrm>
+          <a:prstGeom prst="rect">
+            <a:avLst/>
+          </a:prstGeom>
+          <a:noFill/>
+          <a:ln/>
+        </p:spPr>
+        <p:txBody>
+          <a:bodyPr wrap="square" lIns="0" tIns="0" rIns="0" bIns="0" rtlCol="0" anchor="ctr">
+            <a:normAutofit/>
+          </a:bodyPr>
+          <a:lstStyle/>
+          <a:p>
+            <a:pPr algn="ctr" indent="0" marL="0">
+              <a:buNone/>
+            </a:pPr>
+            <a:r>
+              <a:rPr lang="en-US" sz="3600" b="1" dirty="0">
+                <a:solidFill>
+                  <a:srgbClr val="990011"/>
+                </a:solidFill>
+                <a:latin typeface="Times New Roman" pitchFamily="34" charset="0"/>
+                <a:ea typeface="Times New Roman" pitchFamily="34" charset="-122"/>
+                <a:cs typeface="Times New Roman" pitchFamily="34" charset="-120"/>
+              </a:rPr>
+              <a:t>Homework</a:t>
+            </a:r>
+            <a:endParaRPr lang="en-US" sz="3600" dirty="0"/>
+          </a:p>
+        </p:txBody>
+      </p:sp>
+      <p:sp>
+        <p:nvSpPr>
+          <p:cNvPr id="5" name="Text 2"/>
+          <p:cNvSpPr/>
+          <p:nvPr/>
+        </p:nvSpPr>
+        <p:spPr>
+          <a:xfrm>
+            <a:off x="5349240" y="1783080"/>
+            <a:ext cx="6522415" cy="4663440"/>
+          </a:xfrm>
+          <a:prstGeom prst="rect">
+            <a:avLst/>
+          </a:prstGeom>
+          <a:noFill/>
+          <a:ln/>
+        </p:spPr>
+        <p:txBody>
+          <a:bodyPr wrap="square" lIns="0" tIns="0" rIns="0" bIns="0" rtlCol="0" anchor="t"/>
+          <a:lstStyle/>
+          <a:p>
+            <a:pPr algn="l" indent="0" marL="0">
+              <a:spcAft>
+                <a:spcPts val="800"/>
+              </a:spcAft>
+              <a:buNone/>
+            </a:pPr>
+            <a:r>
+              <a:rPr lang="en-US" sz="4000" dirty="0">
+                <a:solidFill>
+                  <a:srgbClr val="111111"/>
+                </a:solidFill>
+                <a:latin typeface="Times New Roman" pitchFamily="34" charset="0"/>
+                <a:ea typeface="Times New Roman" pitchFamily="34" charset="-122"/>
+                <a:cs typeface="Times New Roman" pitchFamily="34" charset="-120"/>
+              </a:rPr>
+              <a:t>On a map of the world in your atlas, find Cameroon, the Equator and the Greenwich Meridian.</a:t>
+            </a:r>
+            <a:endParaRPr lang="en-US" sz="4000" dirty="0"/>
+          </a:p>
+        </p:txBody>
+      </p:sp>
+      <p:sp>
+        <p:nvSpPr>
+          <p:cNvPr id="25" name="Slide Number Placeholder 0"/>
+          <p:cNvSpPr>
+            <a:spLocks noGrp="1"/>
+          </p:cNvSpPr>
+          <p:nvPr>
+            <p:ph type="sldNum" sz="quarter" idx="4294967295"/>
+          </p:nvPr>
+        </p:nvSpPr>
+        <p:spPr>
+          <a:xfrm>
+            <a:off x="27432" y="91440"/>
+            <a:ext cx="585216" cy="475488"/>
+          </a:xfrm>
+          <a:prstGeom prst="rect">
+            <a:avLst/>
+          </a:prstGeom>
+          <a:extLst>
+            <a:ext uri="{C572A759-6A51-4108-AA02-DFA0A04FC94B}">
+              <ma14:wrappingTextBoxFlag xmlns:ma14="http://schemas.microsoft.com/office/mac/drawingml/2011/main" val="0"/>
+            </a:ext>
+          </a:extLst>
+        </p:spPr>
+        <p:txBody>
+          <a:bodyPr/>
+          <a:lstStyle>
+            <a:lvl1pPr>
+              <a:defRPr sz="2000">
+                <a:solidFill>
+                  <a:srgbClr val="FFFFFF"/>
+                </a:solidFill>
+                <a:latin typeface="Calibri"/>
+                <a:ea typeface="Calibri"/>
+                <a:cs typeface="Calibri"/>
+              </a:defRPr>
+            </a:lvl1pPr>
+          </a:lstStyle>
+          <a:p>
+            <a:pPr algn="ctr"/>
+            <a:fld id="{F7021451-1387-4CA6-816F-3879F97B5CBC}" type="slidenum">
+              <a:rPr b="1" lang="en-US"/>
+              <a:t>56</a:t>
+            </a:fld>
+            <a:endParaRPr lang="en-US"/>
+          </a:p>
+        </p:txBody>
+      </p:sp>
+    </p:spTree>
+  </p:cSld>
+  <p:clrMapOvr>
+    <a:masterClrMapping/>
+  </p:clrMapOvr>
+</p:sld>
+</file>
+
+<file path=ppt/slides/slide57.xml><?xml version="1.0" encoding="utf-8"?>
+<p:sld xmlns:a="http://schemas.openxmlformats.org/drawingml/2006/main" xmlns:r="http://schemas.openxmlformats.org/officeDocument/2006/relationships" xmlns:p="http://schemas.openxmlformats.org/presentationml/2006/main">
+  <p:cSld name="Slide 57">
+    <p:spTree>
+      <p:nvGrpSpPr>
+        <p:cNvPr id="1" name=""/>
+        <p:cNvGrpSpPr/>
+        <p:nvPr/>
+      </p:nvGrpSpPr>
+      <p:grpSpPr>
+        <a:xfrm>
+          <a:off x="0" y="0"/>
+          <a:ext cx="0" cy="0"/>
+          <a:chOff x="0" y="0"/>
+          <a:chExt cx="0" cy="0"/>
+        </a:xfrm>
+      </p:grpSpPr>
+      <p:sp>
+        <p:nvSpPr>
+          <p:cNvPr id="2" name="Text 0"/>
+          <p:cNvSpPr/>
+          <p:nvPr/>
+        </p:nvSpPr>
+        <p:spPr>
+          <a:xfrm>
+            <a:off x="457200" y="713232"/>
+            <a:ext cx="11368735" cy="274320"/>
+          </a:xfrm>
+          <a:prstGeom prst="rect">
+            <a:avLst/>
+          </a:prstGeom>
+          <a:noFill/>
+          <a:ln/>
+        </p:spPr>
+        <p:txBody>
+          <a:bodyPr wrap="square" lIns="0" tIns="0" rIns="0" bIns="0" rtlCol="0" anchor="ctr"/>
+          <a:lstStyle/>
+          <a:p>
+            <a:pPr algn="r" indent="0" marL="0">
+              <a:buNone/>
+            </a:pPr>
+            <a:r>
+              <a:rPr lang="en-US" sz="1400" b="1" dirty="0">
+                <a:solidFill>
+                  <a:srgbClr val="1C3F6E"/>
+                </a:solidFill>
+                <a:latin typeface="Calibri" pitchFamily="34" charset="0"/>
+                <a:ea typeface="Calibri" pitchFamily="34" charset="-122"/>
+                <a:cs typeface="Calibri" pitchFamily="34" charset="-120"/>
+              </a:rPr>
+              <a:t>NEXT LESSON</a:t>
+            </a:r>
+            <a:endParaRPr lang="en-US" sz="1400" dirty="0"/>
+          </a:p>
+        </p:txBody>
+      </p:sp>
+      <p:pic>
+        <p:nvPicPr>
+          <p:cNvPr id="3" name="Image 0" descr="/home/claude/f4/img/minesec_sheet.png">    </p:cNvPr>
+          <p:cNvPicPr>
+            <a:picLocks noChangeAspect="1"/>
+          </p:cNvPicPr>
+          <p:nvPr/>
+        </p:nvPicPr>
+        <p:blipFill>
+          <a:blip r:embed="rId1"/>
+          <a:stretch>
+            <a:fillRect/>
+          </a:stretch>
+        </p:blipFill>
+        <p:spPr>
+          <a:xfrm>
+            <a:off x="0" y="658368"/>
+            <a:ext cx="5120640" cy="5833872"/>
+          </a:xfrm>
+          <a:prstGeom prst="rect">
+            <a:avLst/>
+          </a:prstGeom>
+        </p:spPr>
+      </p:pic>
+      <p:sp>
+        <p:nvSpPr>
+          <p:cNvPr id="4" name="Text 1"/>
+          <p:cNvSpPr/>
+          <p:nvPr/>
+        </p:nvSpPr>
+        <p:spPr>
+          <a:xfrm>
+            <a:off x="5349240" y="1005840"/>
+            <a:ext cx="6522415" cy="731520"/>
+          </a:xfrm>
+          <a:prstGeom prst="rect">
+            <a:avLst/>
+          </a:prstGeom>
+          <a:noFill/>
+          <a:ln/>
+        </p:spPr>
+        <p:txBody>
+          <a:bodyPr wrap="square" lIns="0" tIns="0" rIns="0" bIns="0" rtlCol="0" anchor="ctr">
+            <a:normAutofit/>
+          </a:bodyPr>
+          <a:lstStyle/>
+          <a:p>
+            <a:pPr algn="ctr" indent="0" marL="0">
+              <a:buNone/>
+            </a:pPr>
+            <a:r>
+              <a:rPr lang="en-US" sz="3600" b="1" dirty="0">
+                <a:solidFill>
+                  <a:srgbClr val="990011"/>
+                </a:solidFill>
+                <a:latin typeface="Times New Roman" pitchFamily="34" charset="0"/>
+                <a:ea typeface="Times New Roman" pitchFamily="34" charset="-122"/>
+                <a:cs typeface="Times New Roman" pitchFamily="34" charset="-120"/>
+              </a:rPr>
+              <a:t>Next Lesson</a:t>
+            </a:r>
+            <a:endParaRPr lang="en-US" sz="3600" dirty="0"/>
+          </a:p>
+        </p:txBody>
+      </p:sp>
+      <p:sp>
+        <p:nvSpPr>
+          <p:cNvPr id="5" name="Text 2"/>
+          <p:cNvSpPr/>
+          <p:nvPr/>
+        </p:nvSpPr>
+        <p:spPr>
+          <a:xfrm>
+            <a:off x="5349240" y="1783080"/>
+            <a:ext cx="6522415" cy="4663440"/>
+          </a:xfrm>
+          <a:prstGeom prst="rect">
+            <a:avLst/>
+          </a:prstGeom>
+          <a:noFill/>
+          <a:ln/>
+        </p:spPr>
+        <p:txBody>
+          <a:bodyPr wrap="square" lIns="0" tIns="0" rIns="0" bIns="0" rtlCol="0" anchor="ctr"/>
+          <a:lstStyle/>
+          <a:p>
+            <a:pPr algn="ctr" indent="0" marL="0">
+              <a:spcAft>
+                <a:spcPts val="800"/>
+              </a:spcAft>
+              <a:buNone/>
+            </a:pPr>
+            <a:r>
+              <a:rPr lang="en-US" sz="4000" b="1" dirty="0">
+                <a:solidFill>
+                  <a:srgbClr val="111111"/>
+                </a:solidFill>
+                <a:latin typeface="Times New Roman" pitchFamily="34" charset="0"/>
+                <a:ea typeface="Times New Roman" pitchFamily="34" charset="-122"/>
+                <a:cs typeface="Times New Roman" pitchFamily="34" charset="-120"/>
+              </a:rPr>
+              <a:t>Our next lesson will be on:</a:t>
+            </a:r>
+            <a:endParaRPr lang="en-US" sz="4000" dirty="0"/>
+          </a:p>
+          <a:p>
+            <a:pPr algn="ctr" indent="0" marL="0">
+              <a:spcAft>
+                <a:spcPts val="800"/>
+              </a:spcAft>
+              <a:buNone/>
+            </a:pPr>
+            <a:r>
+              <a:rPr lang="en-US" sz="4000" b="1" dirty="0">
+                <a:solidFill>
+                  <a:srgbClr val="990011"/>
+                </a:solidFill>
+                <a:latin typeface="Times New Roman" pitchFamily="34" charset="0"/>
+                <a:ea typeface="Times New Roman" pitchFamily="34" charset="-122"/>
+                <a:cs typeface="Times New Roman" pitchFamily="34" charset="-120"/>
+              </a:rPr>
+              <a:t>Practical Work 1: Representation of the Earth's Shape and Size</a:t>
+            </a:r>
+            <a:endParaRPr lang="en-US" sz="4000" dirty="0"/>
+          </a:p>
+        </p:txBody>
+      </p:sp>
+      <p:sp>
+        <p:nvSpPr>
+          <p:cNvPr id="25" name="Slide Number Placeholder 0"/>
+          <p:cNvSpPr>
+            <a:spLocks noGrp="1"/>
+          </p:cNvSpPr>
+          <p:nvPr>
+            <p:ph type="sldNum" sz="quarter" idx="4294967295"/>
+          </p:nvPr>
+        </p:nvSpPr>
+        <p:spPr>
+          <a:xfrm>
+            <a:off x="27432" y="91440"/>
+            <a:ext cx="585216" cy="475488"/>
+          </a:xfrm>
+          <a:prstGeom prst="rect">
+            <a:avLst/>
+          </a:prstGeom>
+          <a:extLst>
+            <a:ext uri="{C572A759-6A51-4108-AA02-DFA0A04FC94B}">
+              <ma14:wrappingTextBoxFlag xmlns:ma14="http://schemas.microsoft.com/office/mac/drawingml/2011/main" val="0"/>
+            </a:ext>
+          </a:extLst>
+        </p:spPr>
+        <p:txBody>
+          <a:bodyPr/>
+          <a:lstStyle>
+            <a:lvl1pPr>
+              <a:defRPr sz="2000">
+                <a:solidFill>
+                  <a:srgbClr val="FFFFFF"/>
+                </a:solidFill>
+                <a:latin typeface="Calibri"/>
+                <a:ea typeface="Calibri"/>
+                <a:cs typeface="Calibri"/>
+              </a:defRPr>
+            </a:lvl1pPr>
+          </a:lstStyle>
+          <a:p>
+            <a:pPr algn="ctr"/>
+            <a:fld id="{F7021451-1387-4CA6-816F-3879F97B5CBC}" type="slidenum">
+              <a:rPr b="1" lang="en-US"/>
+              <a:t>57</a:t>
+            </a:fld>
+            <a:endParaRPr lang="en-US"/>
+          </a:p>
+        </p:txBody>
+      </p:sp>
+    </p:spTree>
+  </p:cSld>
+  <p:clrMapOvr>
+    <a:masterClrMapping/>
+  </p:clrMapOvr>
+</p:sld>
+</file>
+
+<file path=ppt/slides/slide58.xml><?xml version="1.0" encoding="utf-8"?>
+<p:sld xmlns:a="http://schemas.openxmlformats.org/drawingml/2006/main" xmlns:r="http://schemas.openxmlformats.org/officeDocument/2006/relationships" xmlns:p="http://schemas.openxmlformats.org/presentationml/2006/main">
+  <p:cSld name="Slide 58">
+    <p:spTree>
+      <p:nvGrpSpPr>
+        <p:cNvPr id="1" name=""/>
+        <p:cNvGrpSpPr/>
+        <p:nvPr/>
+      </p:nvGrpSpPr>
+      <p:grpSpPr>
+        <a:xfrm>
+          <a:off x="0" y="0"/>
+          <a:ext cx="0" cy="0"/>
+          <a:chOff x="0" y="0"/>
+          <a:chExt cx="0" cy="0"/>
+        </a:xfrm>
+      </p:grpSpPr>
+      <p:sp>
+        <p:nvSpPr>
+          <p:cNvPr id="2" name="Text 0"/>
+          <p:cNvSpPr/>
+          <p:nvPr/>
+        </p:nvSpPr>
+        <p:spPr>
+          <a:xfrm>
+            <a:off x="457200" y="713232"/>
+            <a:ext cx="11368735" cy="274320"/>
+          </a:xfrm>
+          <a:prstGeom prst="rect">
+            <a:avLst/>
+          </a:prstGeom>
+          <a:noFill/>
+          <a:ln/>
+        </p:spPr>
+        <p:txBody>
+          <a:bodyPr wrap="square" lIns="0" tIns="0" rIns="0" bIns="0" rtlCol="0" anchor="ctr"/>
+          <a:lstStyle/>
+          <a:p>
+            <a:pPr algn="r" indent="0" marL="0">
+              <a:buNone/>
+            </a:pPr>
+            <a:r>
+              <a:rPr lang="en-US" sz="1400" b="1" dirty="0">
+                <a:solidFill>
+                  <a:srgbClr val="1C3F6E"/>
+                </a:solidFill>
+                <a:latin typeface="Calibri" pitchFamily="34" charset="0"/>
+                <a:ea typeface="Calibri" pitchFamily="34" charset="-122"/>
+                <a:cs typeface="Calibri" pitchFamily="34" charset="-120"/>
+              </a:rPr>
               <a:t>BILINGUAL GAME</a:t>
             </a:r>
             <a:endParaRPr lang="en-US" sz="1400" dirty="0"/>
@@ -17339,7 +20973,7 @@
       </p:sp>
       <p:graphicFrame>
         <p:nvGraphicFramePr>
-          <p:cNvPr id="50" name="Table 0"/>
+          <p:cNvPr id="59" name="Table 0"/>
           <p:cNvGraphicFramePr>
             <a:graphicFrameLocks noGrp="1"/>
           </p:cNvGraphicFramePr>
@@ -18375,7 +22009,7 @@
             <a:pPr algn="ctr"/>
             <a:fld id="{F7021451-1387-4CA6-816F-3879F97B5CBC}" type="slidenum">
               <a:rPr b="1" lang="en-US"/>
-              <a:t>49</a:t>
+              <a:t>58</a:t>
             </a:fld>
             <a:endParaRPr lang="en-US"/>
           </a:p>
@@ -18389,9 +22023,9 @@
 </p:sld>
 </file>
 
-<file path=ppt/slides/slide5.xml><?xml version="1.0" encoding="utf-8"?>
+<file path=ppt/slides/slide59.xml><?xml version="1.0" encoding="utf-8"?>
 <p:sld xmlns:a="http://schemas.openxmlformats.org/drawingml/2006/main" xmlns:r="http://schemas.openxmlformats.org/officeDocument/2006/relationships" xmlns:p="http://schemas.openxmlformats.org/presentationml/2006/main">
-  <p:cSld name="Slide 5">
+  <p:cSld name="Slide 59">
     <p:spTree>
       <p:nvGrpSpPr>
         <p:cNvPr id="1" name=""/>
@@ -18439,225 +22073,6 @@
                 <a:ea typeface="Calibri" pitchFamily="34" charset="-122"/>
                 <a:cs typeface="Calibri" pitchFamily="34" charset="-120"/>
               </a:rPr>
-              <a:t>HOMEWORK CORRECTION</a:t>
-            </a:r>
-            <a:endParaRPr lang="en-US" sz="1400" dirty="0"/>
-          </a:p>
-        </p:txBody>
-      </p:sp>
-      <p:pic>
-        <p:nvPicPr>
-          <p:cNvPr id="3" name="Image 0" descr="/home/claude/f4/img/minesec_sheet.png">    </p:cNvPr>
-          <p:cNvPicPr>
-            <a:picLocks noChangeAspect="1"/>
-          </p:cNvPicPr>
-          <p:nvPr/>
-        </p:nvPicPr>
-        <p:blipFill>
-          <a:blip r:embed="rId1"/>
-          <a:stretch>
-            <a:fillRect/>
-          </a:stretch>
-        </p:blipFill>
-        <p:spPr>
-          <a:xfrm>
-            <a:off x="0" y="658368"/>
-            <a:ext cx="5120640" cy="5833872"/>
-          </a:xfrm>
-          <a:prstGeom prst="rect">
-            <a:avLst/>
-          </a:prstGeom>
-        </p:spPr>
-      </p:pic>
-      <p:sp>
-        <p:nvSpPr>
-          <p:cNvPr id="4" name="Text 1"/>
-          <p:cNvSpPr/>
-          <p:nvPr/>
-        </p:nvSpPr>
-        <p:spPr>
-          <a:xfrm>
-            <a:off x="5349240" y="1005840"/>
-            <a:ext cx="6522415" cy="731520"/>
-          </a:xfrm>
-          <a:prstGeom prst="rect">
-            <a:avLst/>
-          </a:prstGeom>
-          <a:noFill/>
-          <a:ln/>
-        </p:spPr>
-        <p:txBody>
-          <a:bodyPr wrap="square" lIns="0" tIns="0" rIns="0" bIns="0" rtlCol="0" anchor="ctr">
-            <a:normAutofit/>
-          </a:bodyPr>
-          <a:lstStyle/>
-          <a:p>
-            <a:pPr algn="ctr" indent="0" marL="0">
-              <a:buNone/>
-            </a:pPr>
-            <a:r>
-              <a:rPr lang="en-US" sz="3600" b="1" dirty="0">
-                <a:solidFill>
-                  <a:srgbClr val="990011"/>
-                </a:solidFill>
-                <a:latin typeface="Times New Roman" pitchFamily="34" charset="0"/>
-                <a:ea typeface="Times New Roman" pitchFamily="34" charset="-122"/>
-                <a:cs typeface="Times New Roman" pitchFamily="34" charset="-120"/>
-              </a:rPr>
-              <a:t>Correction: Possible Answer</a:t>
-            </a:r>
-            <a:endParaRPr lang="en-US" sz="3600" dirty="0"/>
-          </a:p>
-        </p:txBody>
-      </p:sp>
-      <p:sp>
-        <p:nvSpPr>
-          <p:cNvPr id="5" name="Text 2"/>
-          <p:cNvSpPr/>
-          <p:nvPr/>
-        </p:nvSpPr>
-        <p:spPr>
-          <a:xfrm>
-            <a:off x="5349240" y="1783080"/>
-            <a:ext cx="6522415" cy="4663440"/>
-          </a:xfrm>
-          <a:prstGeom prst="rect">
-            <a:avLst/>
-          </a:prstGeom>
-          <a:noFill/>
-          <a:ln/>
-        </p:spPr>
-        <p:txBody>
-          <a:bodyPr wrap="square" lIns="0" tIns="0" rIns="0" bIns="0" rtlCol="0" anchor="t"/>
-          <a:lstStyle/>
-          <a:p>
-            <a:pPr algn="l" indent="0" marL="0">
-              <a:spcAft>
-                <a:spcPts val="800"/>
-              </a:spcAft>
-              <a:buNone/>
-            </a:pPr>
-            <a:r>
-              <a:rPr lang="en-US" sz="4000" dirty="0">
-                <a:solidFill>
-                  <a:srgbClr val="111111"/>
-                </a:solidFill>
-                <a:latin typeface="Times New Roman" pitchFamily="34" charset="0"/>
-                <a:ea typeface="Times New Roman" pitchFamily="34" charset="-122"/>
-                <a:cs typeface="Times New Roman" pitchFamily="34" charset="-120"/>
-              </a:rPr>
-              <a:t>Physical features: a hill, the River Benue, trees and grass. Human activities: trading in the market, moto-taxi transport, farming.</a:t>
-            </a:r>
-            <a:endParaRPr lang="en-US" sz="4000" dirty="0"/>
-          </a:p>
-        </p:txBody>
-      </p:sp>
-      <p:sp>
-        <p:nvSpPr>
-          <p:cNvPr id="25" name="Slide Number Placeholder 0"/>
-          <p:cNvSpPr>
-            <a:spLocks noGrp="1"/>
-          </p:cNvSpPr>
-          <p:nvPr>
-            <p:ph type="sldNum" sz="quarter" idx="4294967295"/>
-          </p:nvPr>
-        </p:nvSpPr>
-        <p:spPr>
-          <a:xfrm>
-            <a:off x="27432" y="91440"/>
-            <a:ext cx="585216" cy="475488"/>
-          </a:xfrm>
-          <a:prstGeom prst="rect">
-            <a:avLst/>
-          </a:prstGeom>
-          <a:extLst>
-            <a:ext uri="{C572A759-6A51-4108-AA02-DFA0A04FC94B}">
-              <ma14:wrappingTextBoxFlag xmlns:ma14="http://schemas.microsoft.com/office/mac/drawingml/2011/main" val="0"/>
-            </a:ext>
-          </a:extLst>
-        </p:spPr>
-        <p:txBody>
-          <a:bodyPr/>
-          <a:lstStyle>
-            <a:lvl1pPr>
-              <a:defRPr sz="2000">
-                <a:solidFill>
-                  <a:srgbClr val="FFFFFF"/>
-                </a:solidFill>
-                <a:latin typeface="Calibri"/>
-                <a:ea typeface="Calibri"/>
-                <a:cs typeface="Calibri"/>
-              </a:defRPr>
-            </a:lvl1pPr>
-          </a:lstStyle>
-          <a:p>
-            <a:pPr algn="ctr"/>
-            <a:fld id="{F7021451-1387-4CA6-816F-3879F97B5CBC}" type="slidenum">
-              <a:rPr b="1" lang="en-US"/>
-              <a:t>5</a:t>
-            </a:fld>
-            <a:endParaRPr lang="en-US"/>
-          </a:p>
-        </p:txBody>
-      </p:sp>
-    </p:spTree>
-  </p:cSld>
-  <p:clrMapOvr>
-    <a:masterClrMapping/>
-  </p:clrMapOvr>
-</p:sld>
-</file>
-
-<file path=ppt/slides/slide50.xml><?xml version="1.0" encoding="utf-8"?>
-<p:sld xmlns:a="http://schemas.openxmlformats.org/drawingml/2006/main" xmlns:r="http://schemas.openxmlformats.org/officeDocument/2006/relationships" xmlns:p="http://schemas.openxmlformats.org/presentationml/2006/main">
-  <p:cSld name="Slide 50">
-    <p:spTree>
-      <p:nvGrpSpPr>
-        <p:cNvPr id="1" name=""/>
-        <p:cNvGrpSpPr/>
-        <p:nvPr/>
-      </p:nvGrpSpPr>
-      <p:grpSpPr>
-        <a:xfrm>
-          <a:off x="0" y="0"/>
-          <a:ext cx="0" cy="0"/>
-          <a:chOff x="0" y="0"/>
-          <a:chExt cx="0" cy="0"/>
-        </a:xfrm>
-      </p:grpSpPr>
-      <p:sp>
-        <p:nvSpPr>
-          <p:cNvPr id="2" name="Text 0"/>
-          <p:cNvSpPr/>
-          <p:nvPr/>
-        </p:nvSpPr>
-        <p:spPr>
-          <a:xfrm>
-            <a:off x="457200" y="713232"/>
-            <a:ext cx="11368735" cy="274320"/>
-          </a:xfrm>
-          <a:prstGeom prst="rect">
-            <a:avLst/>
-          </a:prstGeom>
-          <a:noFill/>
-          <a:ln/>
-        </p:spPr>
-        <p:txBody>
-          <a:bodyPr wrap="square" lIns="0" tIns="0" rIns="0" bIns="0" rtlCol="0" anchor="ctr"/>
-          <a:lstStyle/>
-          <a:p>
-            <a:pPr algn="r" indent="0" marL="0">
-              <a:buNone/>
-            </a:pPr>
-            <a:r>
-              <a:rPr lang="en-US" sz="1400" b="1" dirty="0">
-                <a:solidFill>
-                  <a:srgbClr val="1C3F6E"/>
-                </a:solidFill>
-                <a:latin typeface="Calibri" pitchFamily="34" charset="0"/>
-                <a:ea typeface="Calibri" pitchFamily="34" charset="-122"/>
-                <a:cs typeface="Calibri" pitchFamily="34" charset="-120"/>
-              </a:rPr>
               <a:t>LOGBOOK</a:t>
             </a:r>
             <a:endParaRPr lang="en-US" sz="1400" dirty="0"/>
@@ -18705,7 +22120,7 @@
       </p:sp>
       <p:graphicFrame>
         <p:nvGraphicFramePr>
-          <p:cNvPr id="51" name="Table 0"/>
+          <p:cNvPr id="60" name="Table 0"/>
           <p:cNvGraphicFramePr>
             <a:graphicFrameLocks noGrp="1"/>
           </p:cNvGraphicFramePr>
@@ -19091,7 +22506,7 @@
                           <a:ea typeface="Calibri" pitchFamily="34" charset="-122"/>
                           <a:cs typeface="Calibri" pitchFamily="34" charset="-120"/>
                         </a:rPr>
-                        <a:t>Situate the Earth in the solar system. Describe the shape and the dimensions of the Earth and its locational references. Name the continents and the oceans.</a:t>
+                        <a:t>Situate the Earth in the solar system. Describe the shape, the dimensions and the locational references of the Earth. Describe the distribution of the landmasses and water bodies.</a:t>
                       </a:r>
                       <a:endParaRPr lang="en-US" sz="1600" dirty="0">
                         <a:latin typeface="Calibri" charset="0"/>
@@ -19327,7 +22742,7 @@
             <a:pPr algn="ctr"/>
             <a:fld id="{F7021451-1387-4CA6-816F-3879F97B5CBC}" type="slidenum">
               <a:rPr b="1" lang="en-US"/>
-              <a:t>50</a:t>
+              <a:t>59</a:t>
             </a:fld>
             <a:endParaRPr lang="en-US"/>
           </a:p>
@@ -19341,9 +22756,9 @@
 </p:sld>
 </file>
 
-<file path=ppt/slides/slide51.xml><?xml version="1.0" encoding="utf-8"?>
+<file path=ppt/slides/slide6.xml><?xml version="1.0" encoding="utf-8"?>
 <p:sld xmlns:a="http://schemas.openxmlformats.org/drawingml/2006/main" xmlns:r="http://schemas.openxmlformats.org/officeDocument/2006/relationships" xmlns:p="http://schemas.openxmlformats.org/presentationml/2006/main">
-  <p:cSld name="Slide 51">
+  <p:cSld name="Slide 6">
     <p:spTree>
       <p:nvGrpSpPr>
         <p:cNvPr id="1" name=""/>
@@ -19391,6 +22806,337 @@
                 <a:ea typeface="Calibri" pitchFamily="34" charset="-122"/>
                 <a:cs typeface="Calibri" pitchFamily="34" charset="-120"/>
               </a:rPr>
+              <a:t>LESSON PLAN</a:t>
+            </a:r>
+            <a:endParaRPr lang="en-US" sz="1400" dirty="0"/>
+          </a:p>
+        </p:txBody>
+      </p:sp>
+      <p:pic>
+        <p:nvPicPr>
+          <p:cNvPr id="3" name="Image 0" descr="/home/claude/f4/img/minesec_sheet.png">    </p:cNvPr>
+          <p:cNvPicPr>
+            <a:picLocks noChangeAspect="1"/>
+          </p:cNvPicPr>
+          <p:nvPr/>
+        </p:nvPicPr>
+        <p:blipFill>
+          <a:blip r:embed="rId1"/>
+          <a:stretch>
+            <a:fillRect/>
+          </a:stretch>
+        </p:blipFill>
+        <p:spPr>
+          <a:xfrm>
+            <a:off x="0" y="658368"/>
+            <a:ext cx="2468880" cy="5833872"/>
+          </a:xfrm>
+          <a:prstGeom prst="rect">
+            <a:avLst/>
+          </a:prstGeom>
+        </p:spPr>
+      </p:pic>
+      <p:sp>
+        <p:nvSpPr>
+          <p:cNvPr id="4" name="Text 1"/>
+          <p:cNvSpPr/>
+          <p:nvPr/>
+        </p:nvSpPr>
+        <p:spPr>
+          <a:xfrm>
+            <a:off x="2697480" y="1005840"/>
+            <a:ext cx="9174175" cy="731520"/>
+          </a:xfrm>
+          <a:prstGeom prst="rect">
+            <a:avLst/>
+          </a:prstGeom>
+          <a:noFill/>
+          <a:ln/>
+        </p:spPr>
+        <p:txBody>
+          <a:bodyPr wrap="square" lIns="0" tIns="0" rIns="0" bIns="0" rtlCol="0" anchor="ctr">
+            <a:normAutofit/>
+          </a:bodyPr>
+          <a:lstStyle/>
+          <a:p>
+            <a:pPr algn="ctr" indent="0" marL="0">
+              <a:buNone/>
+            </a:pPr>
+            <a:r>
+              <a:rPr lang="en-US" sz="3600" b="1" dirty="0">
+                <a:solidFill>
+                  <a:srgbClr val="990011"/>
+                </a:solidFill>
+                <a:latin typeface="Times New Roman" pitchFamily="34" charset="0"/>
+                <a:ea typeface="Times New Roman" pitchFamily="34" charset="-122"/>
+                <a:cs typeface="Times New Roman" pitchFamily="34" charset="-120"/>
+              </a:rPr>
+              <a:t>Lesson Plan</a:t>
+            </a:r>
+            <a:endParaRPr lang="en-US" sz="3600" dirty="0"/>
+          </a:p>
+        </p:txBody>
+      </p:sp>
+      <p:sp>
+        <p:nvSpPr>
+          <p:cNvPr id="5" name="Text 2"/>
+          <p:cNvSpPr/>
+          <p:nvPr/>
+        </p:nvSpPr>
+        <p:spPr>
+          <a:xfrm>
+            <a:off x="2697480" y="1783080"/>
+            <a:ext cx="9174175" cy="4663440"/>
+          </a:xfrm>
+          <a:prstGeom prst="rect">
+            <a:avLst/>
+          </a:prstGeom>
+          <a:noFill/>
+          <a:ln/>
+        </p:spPr>
+        <p:txBody>
+          <a:bodyPr wrap="square" lIns="0" tIns="0" rIns="0" bIns="0" rtlCol="0" anchor="t"/>
+          <a:lstStyle/>
+          <a:p>
+            <a:pPr algn="l" marL="342900" indent="-342900">
+              <a:spcAft>
+                <a:spcPts val="800"/>
+              </a:spcAft>
+              <a:buSzPct val="100000"/>
+              <a:buFont typeface="+mj-lt"/>
+              <a:buAutoNum type="arabicPeriod" startAt="1"/>
+            </a:pPr>
+            <a:r>
+              <a:rPr lang="en-US" sz="4000" dirty="0">
+                <a:solidFill>
+                  <a:srgbClr val="111111"/>
+                </a:solidFill>
+                <a:latin typeface="Times New Roman" pitchFamily="34" charset="0"/>
+                <a:ea typeface="Times New Roman" pitchFamily="34" charset="-122"/>
+                <a:cs typeface="Times New Roman" pitchFamily="34" charset="-120"/>
+              </a:rPr>
+              <a:t>Correction of the homework</a:t>
+            </a:r>
+            <a:endParaRPr lang="en-US" sz="4000" dirty="0"/>
+          </a:p>
+          <a:p>
+            <a:pPr algn="l" marL="342900" indent="-342900">
+              <a:spcAft>
+                <a:spcPts val="800"/>
+              </a:spcAft>
+              <a:buSzPct val="100000"/>
+              <a:buFont typeface="+mj-lt"/>
+              <a:buAutoNum type="arabicPeriod" startAt="1"/>
+            </a:pPr>
+            <a:r>
+              <a:rPr lang="en-US" sz="4000" dirty="0">
+                <a:solidFill>
+                  <a:srgbClr val="111111"/>
+                </a:solidFill>
+                <a:latin typeface="Times New Roman" pitchFamily="34" charset="0"/>
+                <a:ea typeface="Times New Roman" pitchFamily="34" charset="-122"/>
+                <a:cs typeface="Times New Roman" pitchFamily="34" charset="-120"/>
+              </a:rPr>
+              <a:t>Objectives and recall</a:t>
+            </a:r>
+            <a:endParaRPr lang="en-US" sz="4000" dirty="0"/>
+          </a:p>
+          <a:p>
+            <a:pPr algn="l" marL="342900" indent="-342900">
+              <a:spcAft>
+                <a:spcPts val="800"/>
+              </a:spcAft>
+              <a:buSzPct val="100000"/>
+              <a:buFont typeface="+mj-lt"/>
+              <a:buAutoNum type="arabicPeriod" startAt="1"/>
+            </a:pPr>
+            <a:r>
+              <a:rPr lang="en-US" sz="4000" dirty="0">
+                <a:solidFill>
+                  <a:srgbClr val="111111"/>
+                </a:solidFill>
+                <a:latin typeface="Times New Roman" pitchFamily="34" charset="0"/>
+                <a:ea typeface="Times New Roman" pitchFamily="34" charset="-122"/>
+                <a:cs typeface="Times New Roman" pitchFamily="34" charset="-120"/>
+              </a:rPr>
+              <a:t>Real-life situation and action to take</a:t>
+            </a:r>
+            <a:endParaRPr lang="en-US" sz="4000" dirty="0"/>
+          </a:p>
+          <a:p>
+            <a:pPr algn="l" marL="342900" indent="-342900">
+              <a:spcAft>
+                <a:spcPts val="800"/>
+              </a:spcAft>
+              <a:buSzPct val="100000"/>
+              <a:buFont typeface="+mj-lt"/>
+              <a:buAutoNum type="arabicPeriod" startAt="1"/>
+            </a:pPr>
+            <a:r>
+              <a:rPr lang="en-US" sz="4000" dirty="0">
+                <a:solidFill>
+                  <a:srgbClr val="111111"/>
+                </a:solidFill>
+                <a:latin typeface="Times New Roman" pitchFamily="34" charset="0"/>
+                <a:ea typeface="Times New Roman" pitchFamily="34" charset="-122"/>
+                <a:cs typeface="Times New Roman" pitchFamily="34" charset="-120"/>
+              </a:rPr>
+              <a:t>Learning activities</a:t>
+            </a:r>
+            <a:endParaRPr lang="en-US" sz="4000" dirty="0"/>
+          </a:p>
+          <a:p>
+            <a:pPr algn="l" marL="342900" indent="-342900">
+              <a:spcAft>
+                <a:spcPts val="800"/>
+              </a:spcAft>
+              <a:buSzPct val="100000"/>
+              <a:buFont typeface="+mj-lt"/>
+              <a:buAutoNum type="arabicPeriod" startAt="1"/>
+            </a:pPr>
+            <a:r>
+              <a:rPr lang="en-US" sz="4000" dirty="0">
+                <a:solidFill>
+                  <a:srgbClr val="111111"/>
+                </a:solidFill>
+                <a:latin typeface="Times New Roman" pitchFamily="34" charset="0"/>
+                <a:ea typeface="Times New Roman" pitchFamily="34" charset="-122"/>
+                <a:cs typeface="Times New Roman" pitchFamily="34" charset="-120"/>
+              </a:rPr>
+              <a:t>Board summary</a:t>
+            </a:r>
+            <a:endParaRPr lang="en-US" sz="4000" dirty="0"/>
+          </a:p>
+          <a:p>
+            <a:pPr algn="l" marL="342900" indent="-342900">
+              <a:spcAft>
+                <a:spcPts val="800"/>
+              </a:spcAft>
+              <a:buSzPct val="100000"/>
+              <a:buFont typeface="+mj-lt"/>
+              <a:buAutoNum type="arabicPeriod" startAt="1"/>
+            </a:pPr>
+            <a:r>
+              <a:rPr lang="en-US" sz="4000" dirty="0">
+                <a:solidFill>
+                  <a:srgbClr val="111111"/>
+                </a:solidFill>
+                <a:latin typeface="Times New Roman" pitchFamily="34" charset="0"/>
+                <a:ea typeface="Times New Roman" pitchFamily="34" charset="-122"/>
+                <a:cs typeface="Times New Roman" pitchFamily="34" charset="-120"/>
+              </a:rPr>
+              <a:t>Evaluation, remediation and homework</a:t>
+            </a:r>
+            <a:endParaRPr lang="en-US" sz="4000" dirty="0"/>
+          </a:p>
+        </p:txBody>
+      </p:sp>
+      <p:sp>
+        <p:nvSpPr>
+          <p:cNvPr id="25" name="Slide Number Placeholder 0"/>
+          <p:cNvSpPr>
+            <a:spLocks noGrp="1"/>
+          </p:cNvSpPr>
+          <p:nvPr>
+            <p:ph type="sldNum" sz="quarter" idx="4294967295"/>
+          </p:nvPr>
+        </p:nvSpPr>
+        <p:spPr>
+          <a:xfrm>
+            <a:off x="27432" y="91440"/>
+            <a:ext cx="585216" cy="475488"/>
+          </a:xfrm>
+          <a:prstGeom prst="rect">
+            <a:avLst/>
+          </a:prstGeom>
+          <a:extLst>
+            <a:ext uri="{C572A759-6A51-4108-AA02-DFA0A04FC94B}">
+              <ma14:wrappingTextBoxFlag xmlns:ma14="http://schemas.microsoft.com/office/mac/drawingml/2011/main" val="0"/>
+            </a:ext>
+          </a:extLst>
+        </p:spPr>
+        <p:txBody>
+          <a:bodyPr/>
+          <a:lstStyle>
+            <a:lvl1pPr>
+              <a:defRPr sz="2000">
+                <a:solidFill>
+                  <a:srgbClr val="FFFFFF"/>
+                </a:solidFill>
+                <a:latin typeface="Calibri"/>
+                <a:ea typeface="Calibri"/>
+                <a:cs typeface="Calibri"/>
+              </a:defRPr>
+            </a:lvl1pPr>
+          </a:lstStyle>
+          <a:p>
+            <a:pPr algn="ctr"/>
+            <a:fld id="{F7021451-1387-4CA6-816F-3879F97B5CBC}" type="slidenum">
+              <a:rPr b="1" lang="en-US"/>
+              <a:t>6</a:t>
+            </a:fld>
+            <a:endParaRPr lang="en-US"/>
+          </a:p>
+        </p:txBody>
+      </p:sp>
+    </p:spTree>
+  </p:cSld>
+  <p:clrMapOvr>
+    <a:masterClrMapping/>
+  </p:clrMapOvr>
+</p:sld>
+</file>
+
+<file path=ppt/slides/slide60.xml><?xml version="1.0" encoding="utf-8"?>
+<p:sld xmlns:a="http://schemas.openxmlformats.org/drawingml/2006/main" xmlns:r="http://schemas.openxmlformats.org/officeDocument/2006/relationships" xmlns:p="http://schemas.openxmlformats.org/presentationml/2006/main">
+  <p:cSld name="Slide 60">
+    <p:spTree>
+      <p:nvGrpSpPr>
+        <p:cNvPr id="1" name=""/>
+        <p:cNvGrpSpPr/>
+        <p:nvPr/>
+      </p:nvGrpSpPr>
+      <p:grpSpPr>
+        <a:xfrm>
+          <a:off x="0" y="0"/>
+          <a:ext cx="0" cy="0"/>
+          <a:chOff x="0" y="0"/>
+          <a:chExt cx="0" cy="0"/>
+        </a:xfrm>
+      </p:grpSpPr>
+      <p:sp>
+        <p:nvSpPr>
+          <p:cNvPr id="2" name="Text 0"/>
+          <p:cNvSpPr/>
+          <p:nvPr/>
+        </p:nvSpPr>
+        <p:spPr>
+          <a:xfrm>
+            <a:off x="457200" y="713232"/>
+            <a:ext cx="11368735" cy="274320"/>
+          </a:xfrm>
+          <a:prstGeom prst="rect">
+            <a:avLst/>
+          </a:prstGeom>
+          <a:noFill/>
+          <a:ln/>
+        </p:spPr>
+        <p:txBody>
+          <a:bodyPr wrap="square" lIns="0" tIns="0" rIns="0" bIns="0" rtlCol="0" anchor="ctr"/>
+          <a:lstStyle/>
+          <a:p>
+            <a:pPr algn="r" indent="0" marL="0">
+              <a:buNone/>
+            </a:pPr>
+            <a:r>
+              <a:rPr lang="en-US" sz="1400" b="1" dirty="0">
+                <a:solidFill>
+                  <a:srgbClr val="1C3F6E"/>
+                </a:solidFill>
+                <a:latin typeface="Calibri" pitchFamily="34" charset="0"/>
+                <a:ea typeface="Calibri" pitchFamily="34" charset="-122"/>
+                <a:cs typeface="Calibri" pitchFamily="34" charset="-120"/>
+              </a:rPr>
               <a:t>LOGBOOK</a:t>
             </a:r>
             <a:endParaRPr lang="en-US" sz="1400" dirty="0"/>
@@ -19438,7 +23184,7 @@
       </p:sp>
       <p:graphicFrame>
         <p:nvGraphicFramePr>
-          <p:cNvPr id="52" name="Table 0"/>
+          <p:cNvPr id="61" name="Table 0"/>
           <p:cNvGraphicFramePr>
             <a:graphicFrameLocks noGrp="1"/>
           </p:cNvGraphicFramePr>
@@ -19548,7 +23294,7 @@
                           <a:ea typeface="Calibri" pitchFamily="34" charset="-122"/>
                           <a:cs typeface="Calibri" pitchFamily="34" charset="-120"/>
                         </a:rPr>
-                        <a:t>DEFINITIONS; The Earth in the Solar System; Shape, Dimensions and Locational References; Landmasses and Water Bodies.</a:t>
+                        <a:t>DEFINITIONS; The Earth in the Solar System; Shape and Dimensions; Locational References; Distribution of Landmasses and Water Bodies.</a:t>
                       </a:r>
                       <a:endParaRPr lang="en-US" sz="1600" dirty="0">
                         <a:latin typeface="Calibri" charset="0"/>
@@ -20198,7 +23944,7 @@
             <a:pPr algn="ctr"/>
             <a:fld id="{F7021451-1387-4CA6-816F-3879F97B5CBC}" type="slidenum">
               <a:rPr b="1" lang="en-US"/>
-              <a:t>51</a:t>
+              <a:t>60</a:t>
             </a:fld>
             <a:endParaRPr lang="en-US"/>
           </a:p>
@@ -20212,9 +23958,9 @@
 </p:sld>
 </file>
 
-<file path=ppt/slides/slide52.xml><?xml version="1.0" encoding="utf-8"?>
+<file path=ppt/slides/slide61.xml><?xml version="1.0" encoding="utf-8"?>
 <p:sld xmlns:a="http://schemas.openxmlformats.org/drawingml/2006/main" xmlns:r="http://schemas.openxmlformats.org/officeDocument/2006/relationships" xmlns:p="http://schemas.openxmlformats.org/presentationml/2006/main">
-  <p:cSld name="Slide 52">
+  <p:cSld name="Slide 61">
     <p:spTree>
       <p:nvGrpSpPr>
         <p:cNvPr id="1" name=""/>
@@ -20523,7 +24269,7 @@
             <a:pPr algn="ctr"/>
             <a:fld id="{F7021451-1387-4CA6-816F-3879F97B5CBC}" type="slidenum">
               <a:rPr b="1" lang="en-US"/>
-              <a:t>52</a:t>
+              <a:t>61</a:t>
             </a:fld>
             <a:endParaRPr lang="en-US"/>
           </a:p>
@@ -20537,9 +24283,9 @@
 </p:sld>
 </file>
 
-<file path=ppt/slides/slide53.xml><?xml version="1.0" encoding="utf-8"?>
+<file path=ppt/slides/slide62.xml><?xml version="1.0" encoding="utf-8"?>
 <p:sld xmlns:a="http://schemas.openxmlformats.org/drawingml/2006/main" xmlns:r="http://schemas.openxmlformats.org/officeDocument/2006/relationships" xmlns:p="http://schemas.openxmlformats.org/presentationml/2006/main">
-  <p:cSld name="Slide 53">
+  <p:cSld name="Slide 62">
     <p:spTree>
       <p:nvGrpSpPr>
         <p:cNvPr id="1" name=""/>
@@ -20737,6 +24483,27 @@
                 <a:ea typeface="Calibri" pitchFamily="34" charset="-122"/>
                 <a:cs typeface="Calibri" pitchFamily="34" charset="-120"/>
               </a:rPr>
+              <a:t>Photo, board summary (The Sun): “Scientists Propose Mechanism to Describe Solar Eruptions of All Sizes” by NASA's Marshall Space Flight Center, CC BY-NC 2.0, via nasa (https://www.flickr.com/photos/28634332@N05/36084784530)</a:t>
+            </a:r>
+            <a:endParaRPr lang="en-US" sz="1800" dirty="0"/>
+          </a:p>
+          <a:p>
+            <a:pPr algn="l" marL="342900" indent="-342900">
+              <a:spcAft>
+                <a:spcPts val="800"/>
+              </a:spcAft>
+              <a:buSzPct val="100000"/>
+              <a:buChar char="•"/>
+            </a:pPr>
+            <a:r>
+              <a:rPr lang="en-US" sz="1800" dirty="0">
+                <a:solidFill>
+                  <a:srgbClr val="111111"/>
+                </a:solidFill>
+                <a:latin typeface="Calibri" pitchFamily="34" charset="0"/>
+                <a:ea typeface="Calibri" pitchFamily="34" charset="-122"/>
+                <a:cs typeface="Calibri" pitchFamily="34" charset="-120"/>
+              </a:rPr>
               <a:t>Diagrams and animations: drawn for this lesson (Geography Department).</a:t>
             </a:r>
             <a:endParaRPr lang="en-US" sz="1800" dirty="0"/>
@@ -20785,338 +24552,7 @@
             <a:pPr algn="ctr"/>
             <a:fld id="{F7021451-1387-4CA6-816F-3879F97B5CBC}" type="slidenum">
               <a:rPr b="1" lang="en-US"/>
-              <a:t>53</a:t>
-            </a:fld>
-            <a:endParaRPr lang="en-US"/>
-          </a:p>
-        </p:txBody>
-      </p:sp>
-    </p:spTree>
-  </p:cSld>
-  <p:clrMapOvr>
-    <a:masterClrMapping/>
-  </p:clrMapOvr>
-</p:sld>
-</file>
-
-<file path=ppt/slides/slide6.xml><?xml version="1.0" encoding="utf-8"?>
-<p:sld xmlns:a="http://schemas.openxmlformats.org/drawingml/2006/main" xmlns:r="http://schemas.openxmlformats.org/officeDocument/2006/relationships" xmlns:p="http://schemas.openxmlformats.org/presentationml/2006/main">
-  <p:cSld name="Slide 6">
-    <p:spTree>
-      <p:nvGrpSpPr>
-        <p:cNvPr id="1" name=""/>
-        <p:cNvGrpSpPr/>
-        <p:nvPr/>
-      </p:nvGrpSpPr>
-      <p:grpSpPr>
-        <a:xfrm>
-          <a:off x="0" y="0"/>
-          <a:ext cx="0" cy="0"/>
-          <a:chOff x="0" y="0"/>
-          <a:chExt cx="0" cy="0"/>
-        </a:xfrm>
-      </p:grpSpPr>
-      <p:sp>
-        <p:nvSpPr>
-          <p:cNvPr id="2" name="Text 0"/>
-          <p:cNvSpPr/>
-          <p:nvPr/>
-        </p:nvSpPr>
-        <p:spPr>
-          <a:xfrm>
-            <a:off x="457200" y="713232"/>
-            <a:ext cx="11368735" cy="274320"/>
-          </a:xfrm>
-          <a:prstGeom prst="rect">
-            <a:avLst/>
-          </a:prstGeom>
-          <a:noFill/>
-          <a:ln/>
-        </p:spPr>
-        <p:txBody>
-          <a:bodyPr wrap="square" lIns="0" tIns="0" rIns="0" bIns="0" rtlCol="0" anchor="ctr"/>
-          <a:lstStyle/>
-          <a:p>
-            <a:pPr algn="r" indent="0" marL="0">
-              <a:buNone/>
-            </a:pPr>
-            <a:r>
-              <a:rPr lang="en-US" sz="1400" b="1" dirty="0">
-                <a:solidFill>
-                  <a:srgbClr val="1C3F6E"/>
-                </a:solidFill>
-                <a:latin typeface="Calibri" pitchFamily="34" charset="0"/>
-                <a:ea typeface="Calibri" pitchFamily="34" charset="-122"/>
-                <a:cs typeface="Calibri" pitchFamily="34" charset="-120"/>
-              </a:rPr>
-              <a:t>LESSON PLAN</a:t>
-            </a:r>
-            <a:endParaRPr lang="en-US" sz="1400" dirty="0"/>
-          </a:p>
-        </p:txBody>
-      </p:sp>
-      <p:pic>
-        <p:nvPicPr>
-          <p:cNvPr id="3" name="Image 0" descr="/home/claude/f4/img/minesec_sheet.png">    </p:cNvPr>
-          <p:cNvPicPr>
-            <a:picLocks noChangeAspect="1"/>
-          </p:cNvPicPr>
-          <p:nvPr/>
-        </p:nvPicPr>
-        <p:blipFill>
-          <a:blip r:embed="rId1"/>
-          <a:stretch>
-            <a:fillRect/>
-          </a:stretch>
-        </p:blipFill>
-        <p:spPr>
-          <a:xfrm>
-            <a:off x="0" y="658368"/>
-            <a:ext cx="2468880" cy="5833872"/>
-          </a:xfrm>
-          <a:prstGeom prst="rect">
-            <a:avLst/>
-          </a:prstGeom>
-        </p:spPr>
-      </p:pic>
-      <p:sp>
-        <p:nvSpPr>
-          <p:cNvPr id="4" name="Text 1"/>
-          <p:cNvSpPr/>
-          <p:nvPr/>
-        </p:nvSpPr>
-        <p:spPr>
-          <a:xfrm>
-            <a:off x="2697480" y="1005840"/>
-            <a:ext cx="9174175" cy="731520"/>
-          </a:xfrm>
-          <a:prstGeom prst="rect">
-            <a:avLst/>
-          </a:prstGeom>
-          <a:noFill/>
-          <a:ln/>
-        </p:spPr>
-        <p:txBody>
-          <a:bodyPr wrap="square" lIns="0" tIns="0" rIns="0" bIns="0" rtlCol="0" anchor="ctr">
-            <a:normAutofit/>
-          </a:bodyPr>
-          <a:lstStyle/>
-          <a:p>
-            <a:pPr algn="ctr" indent="0" marL="0">
-              <a:buNone/>
-            </a:pPr>
-            <a:r>
-              <a:rPr lang="en-US" sz="3600" b="1" dirty="0">
-                <a:solidFill>
-                  <a:srgbClr val="990011"/>
-                </a:solidFill>
-                <a:latin typeface="Times New Roman" pitchFamily="34" charset="0"/>
-                <a:ea typeface="Times New Roman" pitchFamily="34" charset="-122"/>
-                <a:cs typeface="Times New Roman" pitchFamily="34" charset="-120"/>
-              </a:rPr>
-              <a:t>Lesson Plan</a:t>
-            </a:r>
-            <a:endParaRPr lang="en-US" sz="3600" dirty="0"/>
-          </a:p>
-        </p:txBody>
-      </p:sp>
-      <p:sp>
-        <p:nvSpPr>
-          <p:cNvPr id="5" name="Text 2"/>
-          <p:cNvSpPr/>
-          <p:nvPr/>
-        </p:nvSpPr>
-        <p:spPr>
-          <a:xfrm>
-            <a:off x="2697480" y="1783080"/>
-            <a:ext cx="9174175" cy="4663440"/>
-          </a:xfrm>
-          <a:prstGeom prst="rect">
-            <a:avLst/>
-          </a:prstGeom>
-          <a:noFill/>
-          <a:ln/>
-        </p:spPr>
-        <p:txBody>
-          <a:bodyPr wrap="square" lIns="0" tIns="0" rIns="0" bIns="0" rtlCol="0" anchor="t"/>
-          <a:lstStyle/>
-          <a:p>
-            <a:pPr algn="l" marL="342900" indent="-342900">
-              <a:spcAft>
-                <a:spcPts val="800"/>
-              </a:spcAft>
-              <a:buSzPct val="100000"/>
-              <a:buFont typeface="+mj-lt"/>
-              <a:buAutoNum type="arabicPeriod" startAt="1"/>
-            </a:pPr>
-            <a:r>
-              <a:rPr lang="en-US" sz="4000" dirty="0">
-                <a:solidFill>
-                  <a:srgbClr val="111111"/>
-                </a:solidFill>
-                <a:latin typeface="Times New Roman" pitchFamily="34" charset="0"/>
-                <a:ea typeface="Times New Roman" pitchFamily="34" charset="-122"/>
-                <a:cs typeface="Times New Roman" pitchFamily="34" charset="-120"/>
-              </a:rPr>
-              <a:t>Correction of the homework</a:t>
-            </a:r>
-            <a:endParaRPr lang="en-US" sz="4000" dirty="0"/>
-          </a:p>
-          <a:p>
-            <a:pPr algn="l" marL="342900" indent="-342900">
-              <a:spcAft>
-                <a:spcPts val="800"/>
-              </a:spcAft>
-              <a:buSzPct val="100000"/>
-              <a:buFont typeface="+mj-lt"/>
-              <a:buAutoNum type="arabicPeriod" startAt="1"/>
-            </a:pPr>
-            <a:r>
-              <a:rPr lang="en-US" sz="4000" dirty="0">
-                <a:solidFill>
-                  <a:srgbClr val="111111"/>
-                </a:solidFill>
-                <a:latin typeface="Times New Roman" pitchFamily="34" charset="0"/>
-                <a:ea typeface="Times New Roman" pitchFamily="34" charset="-122"/>
-                <a:cs typeface="Times New Roman" pitchFamily="34" charset="-120"/>
-              </a:rPr>
-              <a:t>Objectives and recall</a:t>
-            </a:r>
-            <a:endParaRPr lang="en-US" sz="4000" dirty="0"/>
-          </a:p>
-          <a:p>
-            <a:pPr algn="l" marL="342900" indent="-342900">
-              <a:spcAft>
-                <a:spcPts val="800"/>
-              </a:spcAft>
-              <a:buSzPct val="100000"/>
-              <a:buFont typeface="+mj-lt"/>
-              <a:buAutoNum type="arabicPeriod" startAt="1"/>
-            </a:pPr>
-            <a:r>
-              <a:rPr lang="en-US" sz="4000" dirty="0">
-                <a:solidFill>
-                  <a:srgbClr val="111111"/>
-                </a:solidFill>
-                <a:latin typeface="Times New Roman" pitchFamily="34" charset="0"/>
-                <a:ea typeface="Times New Roman" pitchFamily="34" charset="-122"/>
-                <a:cs typeface="Times New Roman" pitchFamily="34" charset="-120"/>
-              </a:rPr>
-              <a:t>Real-life situation and action to take</a:t>
-            </a:r>
-            <a:endParaRPr lang="en-US" sz="4000" dirty="0"/>
-          </a:p>
-          <a:p>
-            <a:pPr algn="l" marL="342900" indent="-342900">
-              <a:spcAft>
-                <a:spcPts val="800"/>
-              </a:spcAft>
-              <a:buSzPct val="100000"/>
-              <a:buFont typeface="+mj-lt"/>
-              <a:buAutoNum type="arabicPeriod" startAt="1"/>
-            </a:pPr>
-            <a:r>
-              <a:rPr lang="en-US" sz="4000" dirty="0">
-                <a:solidFill>
-                  <a:srgbClr val="111111"/>
-                </a:solidFill>
-                <a:latin typeface="Times New Roman" pitchFamily="34" charset="0"/>
-                <a:ea typeface="Times New Roman" pitchFamily="34" charset="-122"/>
-                <a:cs typeface="Times New Roman" pitchFamily="34" charset="-120"/>
-              </a:rPr>
-              <a:t>Learning activities</a:t>
-            </a:r>
-            <a:endParaRPr lang="en-US" sz="4000" dirty="0"/>
-          </a:p>
-          <a:p>
-            <a:pPr algn="l" marL="342900" indent="-342900">
-              <a:spcAft>
-                <a:spcPts val="800"/>
-              </a:spcAft>
-              <a:buSzPct val="100000"/>
-              <a:buFont typeface="+mj-lt"/>
-              <a:buAutoNum type="arabicPeriod" startAt="1"/>
-            </a:pPr>
-            <a:r>
-              <a:rPr lang="en-US" sz="4000" dirty="0">
-                <a:solidFill>
-                  <a:srgbClr val="111111"/>
-                </a:solidFill>
-                <a:latin typeface="Times New Roman" pitchFamily="34" charset="0"/>
-                <a:ea typeface="Times New Roman" pitchFamily="34" charset="-122"/>
-                <a:cs typeface="Times New Roman" pitchFamily="34" charset="-120"/>
-              </a:rPr>
-              <a:t>Board summary</a:t>
-            </a:r>
-            <a:endParaRPr lang="en-US" sz="4000" dirty="0"/>
-          </a:p>
-          <a:p>
-            <a:pPr algn="l" marL="342900" indent="-342900">
-              <a:spcAft>
-                <a:spcPts val="800"/>
-              </a:spcAft>
-              <a:buSzPct val="100000"/>
-              <a:buFont typeface="+mj-lt"/>
-              <a:buAutoNum type="arabicPeriod" startAt="1"/>
-            </a:pPr>
-            <a:r>
-              <a:rPr lang="en-US" sz="4000" dirty="0">
-                <a:solidFill>
-                  <a:srgbClr val="111111"/>
-                </a:solidFill>
-                <a:latin typeface="Times New Roman" pitchFamily="34" charset="0"/>
-                <a:ea typeface="Times New Roman" pitchFamily="34" charset="-122"/>
-                <a:cs typeface="Times New Roman" pitchFamily="34" charset="-120"/>
-              </a:rPr>
-              <a:t>Evaluation, remediation and homework</a:t>
-            </a:r>
-            <a:endParaRPr lang="en-US" sz="4000" dirty="0"/>
-          </a:p>
-        </p:txBody>
-      </p:sp>
-      <p:sp>
-        <p:nvSpPr>
-          <p:cNvPr id="25" name="Slide Number Placeholder 0"/>
-          <p:cNvSpPr>
-            <a:spLocks noGrp="1"/>
-          </p:cNvSpPr>
-          <p:nvPr>
-            <p:ph type="sldNum" sz="quarter" idx="4294967295"/>
-          </p:nvPr>
-        </p:nvSpPr>
-        <p:spPr>
-          <a:xfrm>
-            <a:off x="27432" y="91440"/>
-            <a:ext cx="585216" cy="475488"/>
-          </a:xfrm>
-          <a:prstGeom prst="rect">
-            <a:avLst/>
-          </a:prstGeom>
-          <a:extLst>
-            <a:ext uri="{C572A759-6A51-4108-AA02-DFA0A04FC94B}">
-              <ma14:wrappingTextBoxFlag xmlns:ma14="http://schemas.microsoft.com/office/mac/drawingml/2011/main" val="0"/>
-            </a:ext>
-          </a:extLst>
-        </p:spPr>
-        <p:txBody>
-          <a:bodyPr/>
-          <a:lstStyle>
-            <a:lvl1pPr>
-              <a:defRPr sz="2000">
-                <a:solidFill>
-                  <a:srgbClr val="FFFFFF"/>
-                </a:solidFill>
-                <a:latin typeface="Calibri"/>
-                <a:ea typeface="Calibri"/>
-                <a:cs typeface="Calibri"/>
-              </a:defRPr>
-            </a:lvl1pPr>
-          </a:lstStyle>
-          <a:p>
-            <a:pPr algn="ctr"/>
-            <a:fld id="{F7021451-1387-4CA6-816F-3879F97B5CBC}" type="slidenum">
-              <a:rPr b="1" lang="en-US"/>
-              <a:t>6</a:t>
+              <a:t>62</a:t>
             </a:fld>
             <a:endParaRPr lang="en-US"/>
           </a:p>
@@ -21203,7 +24639,7 @@
         <p:spPr>
           <a:xfrm>
             <a:off x="0" y="658368"/>
-            <a:ext cx="1463040" cy="5833872"/>
+            <a:ext cx="3840480" cy="5833872"/>
           </a:xfrm>
           <a:prstGeom prst="rect">
             <a:avLst/>
@@ -21218,8 +24654,8 @@
         </p:nvSpPr>
         <p:spPr>
           <a:xfrm>
-            <a:off x="1691640" y="1005840"/>
-            <a:ext cx="10180015" cy="731520"/>
+            <a:off x="4069080" y="1005840"/>
+            <a:ext cx="7802575" cy="731520"/>
           </a:xfrm>
           <a:prstGeom prst="rect">
             <a:avLst/>
@@ -21259,8 +24695,8 @@
         </p:nvSpPr>
         <p:spPr>
           <a:xfrm>
-            <a:off x="1691640" y="1783080"/>
-            <a:ext cx="10180015" cy="4663440"/>
+            <a:off x="4069080" y="1783080"/>
+            <a:ext cx="7802575" cy="4663440"/>
           </a:xfrm>
           <a:prstGeom prst="rect">
             <a:avLst/>
@@ -21331,29 +24767,7 @@
                 <a:ea typeface="Times New Roman" pitchFamily="34" charset="-122"/>
                 <a:cs typeface="Times New Roman" pitchFamily="34" charset="-120"/>
               </a:rPr>
-              <a:t>Describe the shape and the dimensions of the Earth and its locational references.</a:t>
-            </a:r>
-            <a:endParaRPr lang="en-US" sz="4000" dirty="0"/>
-          </a:p>
-          <a:p>
-            <a:pPr algn="l" marL="342900" indent="-342900">
-              <a:spcAft>
-                <a:spcPts val="800"/>
-              </a:spcAft>
-              <a:buSzPct val="100000"/>
-              <a:buFont typeface="+mj-lt"/>
-              <a:buAutoNum type="arabicPeriod" startAt="1"/>
-            </a:pPr>
-            <a:r>
-              <a:rPr lang="en-US" sz="4000" dirty="0">
-                <a:solidFill>
-                  <a:srgbClr val="111111"/>
-                </a:solidFill>
-                <a:latin typeface="Times New Roman" pitchFamily="34" charset="0"/>
-                <a:ea typeface="Times New Roman" pitchFamily="34" charset="-122"/>
-                <a:cs typeface="Times New Roman" pitchFamily="34" charset="-120"/>
-              </a:rPr>
-              <a:t>Name the continents and the oceans.</a:t>
+              <a:t>Describe the shape, the dimensions and the locational references of the Earth.</a:t>
             </a:r>
             <a:endParaRPr lang="en-US" sz="4000" dirty="0"/>
           </a:p>
@@ -21465,7 +24879,7 @@
                 <a:ea typeface="Calibri" pitchFamily="34" charset="-122"/>
                 <a:cs typeface="Calibri" pitchFamily="34" charset="-120"/>
               </a:rPr>
-              <a:t>PREVIOUS KNOWLEDGE</a:t>
+              <a:t>OBJECTIVES</a:t>
             </a:r>
             <a:endParaRPr lang="en-US" sz="1400" dirty="0"/>
           </a:p>
@@ -21530,7 +24944,7 @@
                 <a:ea typeface="Times New Roman" pitchFamily="34" charset="-122"/>
                 <a:cs typeface="Times New Roman" pitchFamily="34" charset="-120"/>
               </a:rPr>
-              <a:t>Previous Knowledge</a:t>
+              <a:t>Objectives (continued)</a:t>
             </a:r>
             <a:endParaRPr lang="en-US" sz="3600" dirty="0"/>
           </a:p>
@@ -21562,7 +24976,8 @@
                 <a:spcPts val="800"/>
               </a:spcAft>
               <a:buSzPct val="100000"/>
-              <a:buChar char="•"/>
+              <a:buFont typeface="+mj-lt"/>
+              <a:buAutoNum type="arabicPeriod" startAt="1"/>
             </a:pPr>
             <a:r>
               <a:rPr lang="en-US" sz="4000" dirty="0">
@@ -21573,49 +24988,7 @@
                 <a:ea typeface="Times New Roman" pitchFamily="34" charset="-122"/>
                 <a:cs typeface="Times New Roman" pitchFamily="34" charset="-120"/>
               </a:rPr>
-              <a:t>Geography studies the Earth and its people.</a:t>
-            </a:r>
-            <a:endParaRPr lang="en-US" sz="4000" dirty="0"/>
-          </a:p>
-          <a:p>
-            <a:pPr algn="l" marL="342900" indent="-342900">
-              <a:spcAft>
-                <a:spcPts val="800"/>
-              </a:spcAft>
-              <a:buSzPct val="100000"/>
-              <a:buChar char="•"/>
-            </a:pPr>
-            <a:r>
-              <a:rPr lang="en-US" sz="4000" dirty="0">
-                <a:solidFill>
-                  <a:srgbClr val="111111"/>
-                </a:solidFill>
-                <a:latin typeface="Times New Roman" pitchFamily="34" charset="0"/>
-                <a:ea typeface="Times New Roman" pitchFamily="34" charset="-122"/>
-                <a:cs typeface="Times New Roman" pitchFamily="34" charset="-120"/>
-              </a:rPr>
-              <a:t>The Sun gives us light and heat.</a:t>
-            </a:r>
-            <a:endParaRPr lang="en-US" sz="4000" dirty="0"/>
-          </a:p>
-          <a:p>
-            <a:pPr algn="l" marL="342900" indent="-342900">
-              <a:spcAft>
-                <a:spcPts val="800"/>
-              </a:spcAft>
-              <a:buSzPct val="100000"/>
-              <a:buChar char="•"/>
-            </a:pPr>
-            <a:r>
-              <a:rPr lang="en-US" sz="4000" dirty="0">
-                <a:solidFill>
-                  <a:srgbClr val="111111"/>
-                </a:solidFill>
-                <a:latin typeface="Times New Roman" pitchFamily="34" charset="0"/>
-                <a:ea typeface="Times New Roman" pitchFamily="34" charset="-122"/>
-                <a:cs typeface="Times New Roman" pitchFamily="34" charset="-120"/>
-              </a:rPr>
-              <a:t>Maps show land and water.</a:t>
+              <a:t>Describe the distribution of the landmasses and water bodies.</a:t>
             </a:r>
             <a:endParaRPr lang="en-US" sz="4000" dirty="0"/>
           </a:p>
@@ -21727,7 +25100,7 @@
                 <a:ea typeface="Calibri" pitchFamily="34" charset="-122"/>
                 <a:cs typeface="Calibri" pitchFamily="34" charset="-120"/>
               </a:rPr>
-              <a:t>REAL-LIFE SITUATION</a:t>
+              <a:t>PREVIOUS KNOWLEDGE</a:t>
             </a:r>
             <a:endParaRPr lang="en-US" sz="1400" dirty="0"/>
           </a:p>
@@ -21750,7 +25123,7 @@
         <p:spPr>
           <a:xfrm>
             <a:off x="0" y="658368"/>
-            <a:ext cx="3840480" cy="5833872"/>
+            <a:ext cx="5120640" cy="5833872"/>
           </a:xfrm>
           <a:prstGeom prst="rect">
             <a:avLst/>
@@ -21765,8 +25138,8 @@
         </p:nvSpPr>
         <p:spPr>
           <a:xfrm>
-            <a:off x="4069080" y="1005840"/>
-            <a:ext cx="7802575" cy="731520"/>
+            <a:off x="5349240" y="1005840"/>
+            <a:ext cx="6522415" cy="731520"/>
           </a:xfrm>
           <a:prstGeom prst="rect">
             <a:avLst/>
@@ -21792,7 +25165,7 @@
                 <a:ea typeface="Times New Roman" pitchFamily="34" charset="-122"/>
                 <a:cs typeface="Times New Roman" pitchFamily="34" charset="-120"/>
               </a:rPr>
-              <a:t>Situation in Real Life</a:t>
+              <a:t>Previous Knowledge</a:t>
             </a:r>
             <a:endParaRPr lang="en-US" sz="3600" dirty="0"/>
           </a:p>
@@ -21806,8 +25179,8 @@
         </p:nvSpPr>
         <p:spPr>
           <a:xfrm>
-            <a:off x="4069080" y="1783080"/>
-            <a:ext cx="7802575" cy="4663440"/>
+            <a:off x="5349240" y="1783080"/>
+            <a:ext cx="6522415" cy="4663440"/>
           </a:xfrm>
           <a:prstGeom prst="rect">
             <a:avLst/>
@@ -21819,11 +25192,12 @@
           <a:bodyPr wrap="square" lIns="0" tIns="0" rIns="0" bIns="0" rtlCol="0" anchor="t"/>
           <a:lstStyle/>
           <a:p>
-            <a:pPr algn="l" indent="0" marL="0">
+            <a:pPr algn="l" marL="342900" indent="-342900">
               <a:spcAft>
                 <a:spcPts val="800"/>
               </a:spcAft>
-              <a:buNone/>
+              <a:buSzPct val="100000"/>
+              <a:buChar char="•"/>
             </a:pPr>
             <a:r>
               <a:rPr lang="en-US" sz="4000" dirty="0">
@@ -21834,7 +25208,49 @@
                 <a:ea typeface="Times New Roman" pitchFamily="34" charset="-122"/>
                 <a:cs typeface="Times New Roman" pitchFamily="34" charset="-120"/>
               </a:rPr>
-              <a:t>During a clear night in Garoua, Aminatou sees many stars and asks her brother if the Earth is also a star. Her brother shows her a globe and says that the Earth is a planet, mostly covered by water.</a:t>
+              <a:t>Geography studies the Earth and its people.</a:t>
+            </a:r>
+            <a:endParaRPr lang="en-US" sz="4000" dirty="0"/>
+          </a:p>
+          <a:p>
+            <a:pPr algn="l" marL="342900" indent="-342900">
+              <a:spcAft>
+                <a:spcPts val="800"/>
+              </a:spcAft>
+              <a:buSzPct val="100000"/>
+              <a:buChar char="•"/>
+            </a:pPr>
+            <a:r>
+              <a:rPr lang="en-US" sz="4000" dirty="0">
+                <a:solidFill>
+                  <a:srgbClr val="111111"/>
+                </a:solidFill>
+                <a:latin typeface="Times New Roman" pitchFamily="34" charset="0"/>
+                <a:ea typeface="Times New Roman" pitchFamily="34" charset="-122"/>
+                <a:cs typeface="Times New Roman" pitchFamily="34" charset="-120"/>
+              </a:rPr>
+              <a:t>The Sun gives us light and heat.</a:t>
+            </a:r>
+            <a:endParaRPr lang="en-US" sz="4000" dirty="0"/>
+          </a:p>
+          <a:p>
+            <a:pPr algn="l" marL="342900" indent="-342900">
+              <a:spcAft>
+                <a:spcPts val="800"/>
+              </a:spcAft>
+              <a:buSzPct val="100000"/>
+              <a:buChar char="•"/>
+            </a:pPr>
+            <a:r>
+              <a:rPr lang="en-US" sz="4000" dirty="0">
+                <a:solidFill>
+                  <a:srgbClr val="111111"/>
+                </a:solidFill>
+                <a:latin typeface="Times New Roman" pitchFamily="34" charset="0"/>
+                <a:ea typeface="Times New Roman" pitchFamily="34" charset="-122"/>
+                <a:cs typeface="Times New Roman" pitchFamily="34" charset="-120"/>
+              </a:rPr>
+              <a:t>Maps show land and water.</a:t>
             </a:r>
             <a:endParaRPr lang="en-US" sz="4000" dirty="0"/>
           </a:p>

--- a/lecons/F1/02_F1_M1_L02_Our_Planet_the_Earth.pptx
+++ b/lecons/F1/02_F1_M1_L02_Our_Planet_the_Earth.pptx
@@ -3467,7 +3467,7 @@
           <a:p>
             <a:r>
               <a:rPr lang="en-US" dirty="0"/>
-              <a:t>Before we start the new lesson, let us correct the homework I gave you at the end of Lesson 1: Geography: Meaning, Branches, Methods and Importance. The question was: Write three physical features and three human activities that you see on your way to school. Take out your exercise books.</a:t>
+              <a:t>Before we start the new lesson, let us correct the homework I gave you at the end of Lesson 1: Geography: Meaning, Branches, Methods and Importance. The question was: Name the eight planets of the solar system. Take out your exercise books.</a:t>
             </a:r>
             <a:endParaRPr lang="en-US" dirty="0"/>
           </a:p>
@@ -4435,7 +4435,7 @@
           <a:p>
             <a:r>
               <a:rPr lang="en-US" dirty="0"/>
-              <a:t>Here is a good answer. Physical features: a hill, the River Benue, trees and grass. Human activities: trading in the market, moto-taxi transport, farming. Compare it with your own answer and correct your work in red.</a:t>
+              <a:t>Here is a good answer. Mercury, Venus, the Earth, Mars, Jupiter, Saturn, Uranus and Neptune. Compare it with your own answer and correct your work in red.</a:t>
             </a:r>
             <a:endParaRPr lang="en-US" dirty="0"/>
           </a:p>
@@ -5051,7 +5051,7 @@
           <a:p>
             <a:r>
               <a:rPr lang="en-US" dirty="0"/>
-              <a:t>For your homework: On a map of the world in your atlas, find Cameroon, the Equator and the Greenwich Meridian. We shall correct it at the beginning of our next lesson.</a:t>
+              <a:t>For your homework: Name three ways of representing the Earth. We shall correct it at the beginning of our next lesson.</a:t>
             </a:r>
             <a:endParaRPr lang="en-US" dirty="0"/>
           </a:p>
@@ -15667,7 +15667,7 @@
         <p:spPr>
           <a:xfrm>
             <a:off x="0" y="658368"/>
-            <a:ext cx="3840480" cy="5833872"/>
+            <a:ext cx="5120640" cy="5833872"/>
           </a:xfrm>
           <a:prstGeom prst="rect">
             <a:avLst/>
@@ -15682,8 +15682,8 @@
         </p:nvSpPr>
         <p:spPr>
           <a:xfrm>
-            <a:off x="4069080" y="1005840"/>
-            <a:ext cx="7802575" cy="731520"/>
+            <a:off x="5349240" y="1005840"/>
+            <a:ext cx="6522415" cy="731520"/>
           </a:xfrm>
           <a:prstGeom prst="rect">
             <a:avLst/>
@@ -15723,8 +15723,8 @@
         </p:nvSpPr>
         <p:spPr>
           <a:xfrm>
-            <a:off x="4069080" y="1783080"/>
-            <a:ext cx="7802575" cy="4663440"/>
+            <a:off x="5349240" y="1783080"/>
+            <a:ext cx="6522415" cy="4663440"/>
           </a:xfrm>
           <a:prstGeom prst="rect">
             <a:avLst/>
@@ -15771,7 +15771,7 @@
                 <a:ea typeface="Times New Roman" pitchFamily="34" charset="-122"/>
                 <a:cs typeface="Times New Roman" pitchFamily="34" charset="-120"/>
               </a:rPr>
-              <a:t>Write three physical features and three human activities that you see on your way to school.</a:t>
+              <a:t>Name the eight planets of the solar system.</a:t>
             </a:r>
             <a:endParaRPr lang="en-US" sz="4000" dirty="0"/>
           </a:p>
@@ -18959,7 +18959,7 @@
                 <a:ea typeface="Times New Roman" pitchFamily="34" charset="-122"/>
                 <a:cs typeface="Times New Roman" pitchFamily="34" charset="-120"/>
               </a:rPr>
-              <a:t>Physical features: a hill, the River Benue, trees and grass. Human activities: trading in the market, moto-taxi transport, farming.</a:t>
+              <a:t>Mercury, Venus, the Earth, Mars, Jupiter, Saturn, Uranus and Neptune.</a:t>
             </a:r>
             <a:endParaRPr lang="en-US" sz="4000" dirty="0"/>
           </a:p>
@@ -20575,7 +20575,7 @@
                 <a:ea typeface="Times New Roman" pitchFamily="34" charset="-122"/>
                 <a:cs typeface="Times New Roman" pitchFamily="34" charset="-120"/>
               </a:rPr>
-              <a:t>On a map of the world in your atlas, find Cameroon, the Equator and the Greenwich Meridian.</a:t>
+              <a:t>Name three ways of representing the Earth.</a:t>
             </a:r>
             <a:endParaRPr lang="en-US" sz="4000" dirty="0"/>
           </a:p>
@@ -23570,7 +23570,7 @@
                           <a:ea typeface="Calibri" pitchFamily="34" charset="-122"/>
                           <a:cs typeface="Calibri" pitchFamily="34" charset="-120"/>
                         </a:rPr>
-                        <a:t>On a map of the world in your atlas, find Cameroon, the Equator and the Greenwich Meridian.</a:t>
+                        <a:t>Name three ways of representing the Earth.</a:t>
                       </a:r>
                       <a:endParaRPr lang="en-US" sz="1600" dirty="0">
                         <a:latin typeface="Calibri" charset="0"/>
